--- a/docs/帮扶管理信息系统介绍-零基础版.pptx
+++ b/docs/帮扶管理信息系统介绍-零基础版.pptx
@@ -3531,6 +3531,10 @@
             </a:solidFill>
           </a:ln>
         </p:spPr>
+        <p:txBody>
+          <a:bodyPr/>
+          <a:p/>
+        </p:txBody>
       </p:sp>
       <p:sp>
         <p:nvSpPr>
@@ -3555,6 +3559,10 @@
             </a:solidFill>
           </a:ln>
         </p:spPr>
+        <p:txBody>
+          <a:bodyPr/>
+          <a:p/>
+        </p:txBody>
       </p:sp>
       <p:sp>
         <p:nvSpPr>
@@ -3579,6 +3587,10 @@
             </a:solidFill>
           </a:ln>
         </p:spPr>
+        <p:txBody>
+          <a:bodyPr/>
+          <a:p/>
+        </p:txBody>
       </p:sp>
       <p:sp>
         <p:nvSpPr>
@@ -3601,6 +3613,10 @@
             <a:noFill/>
           </a:ln>
         </p:spPr>
+        <p:txBody>
+          <a:bodyPr/>
+          <a:p/>
+        </p:txBody>
       </p:sp>
       <p:sp>
         <p:nvSpPr>
@@ -3785,6 +3801,10 @@
             <a:noFill/>
           </a:ln>
         </p:spPr>
+        <p:txBody>
+          <a:bodyPr/>
+          <a:p/>
+        </p:txBody>
       </p:sp>
       <p:sp>
         <p:nvSpPr>
@@ -3861,7 +3881,7 @@
                 <a:ea typeface="+mn-ea"/>
                 <a:cs typeface="+mn-cs"/>
               </a:rPr>
-              <a:t>V1.18.8 | 2026-10-26 | FastAPI + Vue 3 + Electron + SQLite</a:t>
+              <a:t>V1.18.12 | 2026-10-26 | FastAPI + Vue 3 + Electron + SQLite</a:t>
             </a:r>
           </a:p>
         </p:txBody>
@@ -3963,6 +3983,10 @@
             <a:noFill/>
           </a:ln>
         </p:spPr>
+        <p:txBody>
+          <a:bodyPr/>
+          <a:p/>
+        </p:txBody>
       </p:sp>
       <p:sp>
         <p:nvSpPr>
@@ -3985,6 +4009,10 @@
             <a:noFill/>
           </a:ln>
         </p:spPr>
+        <p:txBody>
+          <a:bodyPr/>
+          <a:p/>
+        </p:txBody>
       </p:sp>
       <p:sp>
         <p:nvSpPr>
@@ -4101,6 +4129,10 @@
             </a:solidFill>
           </a:ln>
         </p:spPr>
+        <p:txBody>
+          <a:bodyPr/>
+          <a:p/>
+        </p:txBody>
       </p:sp>
       <p:grpSp>
         <p:nvGrpSpPr>
@@ -4774,7 +4806,7 @@
                 <a:ea typeface="+mn-ea"/>
                 <a:cs typeface="+mn-cs"/>
               </a:rPr>
-              <a:t>帮扶管理信息系统 v1.18.8</a:t>
+              <a:t>帮扶管理信息系统 v1.18.12</a:t>
             </a:r>
           </a:p>
         </p:txBody>
@@ -5021,6 +5053,10 @@
             <a:noFill/>
           </a:ln>
         </p:spPr>
+        <p:txBody>
+          <a:bodyPr/>
+          <a:p/>
+        </p:txBody>
       </p:sp>
       <p:grpSp>
         <p:nvGrpSpPr>
@@ -5458,6 +5494,10 @@
             <a:noFill/>
           </a:ln>
         </p:spPr>
+        <p:txBody>
+          <a:bodyPr/>
+          <a:p/>
+        </p:txBody>
       </p:sp>
       <p:sp>
         <p:nvSpPr>
@@ -5480,6 +5520,10 @@
             <a:noFill/>
           </a:ln>
         </p:spPr>
+        <p:txBody>
+          <a:bodyPr/>
+          <a:p/>
+        </p:txBody>
       </p:sp>
       <p:sp>
         <p:nvSpPr>
@@ -5596,6 +5640,10 @@
             </a:solidFill>
           </a:ln>
         </p:spPr>
+        <p:txBody>
+          <a:bodyPr/>
+          <a:p/>
+        </p:txBody>
       </p:sp>
       <p:grpSp>
         <p:nvGrpSpPr>
@@ -6423,7 +6471,7 @@
                 <a:ea typeface="+mn-ea"/>
                 <a:cs typeface="+mn-cs"/>
               </a:rPr>
-              <a:t>帮扶管理信息系统 v1.18.8</a:t>
+              <a:t>帮扶管理信息系统 v1.18.12</a:t>
             </a:r>
           </a:p>
         </p:txBody>
@@ -6525,6 +6573,10 @@
             <a:noFill/>
           </a:ln>
         </p:spPr>
+        <p:txBody>
+          <a:bodyPr/>
+          <a:p/>
+        </p:txBody>
       </p:sp>
       <p:sp>
         <p:nvSpPr>
@@ -6547,6 +6599,10 @@
             <a:noFill/>
           </a:ln>
         </p:spPr>
+        <p:txBody>
+          <a:bodyPr/>
+          <a:p/>
+        </p:txBody>
       </p:sp>
       <p:sp>
         <p:nvSpPr>
@@ -6663,6 +6719,10 @@
             </a:solidFill>
           </a:ln>
         </p:spPr>
+        <p:txBody>
+          <a:bodyPr/>
+          <a:p/>
+        </p:txBody>
       </p:sp>
       <p:grpSp>
         <p:nvGrpSpPr>
@@ -7274,7 +7334,7 @@
                 <a:ea typeface="+mn-ea"/>
                 <a:cs typeface="+mn-cs"/>
               </a:rPr>
-              <a:t>帮扶管理信息系统 v1.18.8</a:t>
+              <a:t>帮扶管理信息系统 v1.18.12</a:t>
             </a:r>
           </a:p>
         </p:txBody>
@@ -7376,6 +7436,10 @@
             <a:noFill/>
           </a:ln>
         </p:spPr>
+        <p:txBody>
+          <a:bodyPr/>
+          <a:p/>
+        </p:txBody>
       </p:sp>
       <p:sp>
         <p:nvSpPr>
@@ -7398,6 +7462,10 @@
             <a:noFill/>
           </a:ln>
         </p:spPr>
+        <p:txBody>
+          <a:bodyPr/>
+          <a:p/>
+        </p:txBody>
       </p:sp>
       <p:sp>
         <p:nvSpPr>
@@ -7514,6 +7582,10 @@
             </a:solidFill>
           </a:ln>
         </p:spPr>
+        <p:txBody>
+          <a:bodyPr/>
+          <a:p/>
+        </p:txBody>
       </p:sp>
       <p:grpSp>
         <p:nvGrpSpPr>
@@ -8461,7 +8533,7 @@
                 <a:ea typeface="+mn-ea"/>
                 <a:cs typeface="+mn-cs"/>
               </a:rPr>
-              <a:t>帮扶管理信息系统 v1.18.8</a:t>
+              <a:t>帮扶管理信息系统 v1.18.12</a:t>
             </a:r>
           </a:p>
         </p:txBody>
@@ -8563,6 +8635,10 @@
             <a:noFill/>
           </a:ln>
         </p:spPr>
+        <p:txBody>
+          <a:bodyPr/>
+          <a:p/>
+        </p:txBody>
       </p:sp>
       <p:sp>
         <p:nvSpPr>
@@ -8585,6 +8661,10 @@
             <a:noFill/>
           </a:ln>
         </p:spPr>
+        <p:txBody>
+          <a:bodyPr/>
+          <a:p/>
+        </p:txBody>
       </p:sp>
       <p:sp>
         <p:nvSpPr>
@@ -8701,6 +8781,10 @@
             </a:solidFill>
           </a:ln>
         </p:spPr>
+        <p:txBody>
+          <a:bodyPr/>
+          <a:p/>
+        </p:txBody>
       </p:sp>
       <p:grpSp>
         <p:nvGrpSpPr>
@@ -9972,7 +10056,7 @@
                 <a:ea typeface="+mn-ea"/>
                 <a:cs typeface="+mn-cs"/>
               </a:rPr>
-              <a:t>帮扶管理信息系统 v1.18.8</a:t>
+              <a:t>帮扶管理信息系统 v1.18.12</a:t>
             </a:r>
           </a:p>
         </p:txBody>
@@ -10074,6 +10158,10 @@
             <a:noFill/>
           </a:ln>
         </p:spPr>
+        <p:txBody>
+          <a:bodyPr/>
+          <a:p/>
+        </p:txBody>
       </p:sp>
       <p:sp>
         <p:nvSpPr>
@@ -10096,6 +10184,10 @@
             <a:noFill/>
           </a:ln>
         </p:spPr>
+        <p:txBody>
+          <a:bodyPr/>
+          <a:p/>
+        </p:txBody>
       </p:sp>
       <p:sp>
         <p:nvSpPr>
@@ -10212,6 +10304,10 @@
             </a:solidFill>
           </a:ln>
         </p:spPr>
+        <p:txBody>
+          <a:bodyPr/>
+          <a:p/>
+        </p:txBody>
       </p:sp>
       <p:grpSp>
         <p:nvGrpSpPr>
@@ -11119,7 +11215,7 @@
                 <a:ea typeface="+mn-ea"/>
                 <a:cs typeface="+mn-cs"/>
               </a:rPr>
-              <a:t>帮扶管理信息系统 v1.18.8</a:t>
+              <a:t>帮扶管理信息系统 v1.18.12</a:t>
             </a:r>
           </a:p>
         </p:txBody>
@@ -11221,6 +11317,10 @@
             <a:noFill/>
           </a:ln>
         </p:spPr>
+        <p:txBody>
+          <a:bodyPr/>
+          <a:p/>
+        </p:txBody>
       </p:sp>
       <p:sp>
         <p:nvSpPr>
@@ -11243,6 +11343,10 @@
             <a:noFill/>
           </a:ln>
         </p:spPr>
+        <p:txBody>
+          <a:bodyPr/>
+          <a:p/>
+        </p:txBody>
       </p:sp>
       <p:sp>
         <p:nvSpPr>
@@ -11359,6 +11463,10 @@
             </a:solidFill>
           </a:ln>
         </p:spPr>
+        <p:txBody>
+          <a:bodyPr/>
+          <a:p/>
+        </p:txBody>
       </p:sp>
       <p:grpSp>
         <p:nvGrpSpPr>
@@ -12244,7 +12352,7 @@
                 <a:ea typeface="+mn-ea"/>
                 <a:cs typeface="+mn-cs"/>
               </a:rPr>
-              <a:t>帮扶管理信息系统 v1.18.8</a:t>
+              <a:t>帮扶管理信息系统 v1.18.12</a:t>
             </a:r>
           </a:p>
         </p:txBody>
@@ -12346,6 +12454,10 @@
             <a:noFill/>
           </a:ln>
         </p:spPr>
+        <p:txBody>
+          <a:bodyPr/>
+          <a:p/>
+        </p:txBody>
       </p:sp>
       <p:sp>
         <p:nvSpPr>
@@ -12368,6 +12480,10 @@
             <a:noFill/>
           </a:ln>
         </p:spPr>
+        <p:txBody>
+          <a:bodyPr/>
+          <a:p/>
+        </p:txBody>
       </p:sp>
       <p:sp>
         <p:nvSpPr>
@@ -12484,6 +12600,10 @@
             </a:solidFill>
           </a:ln>
         </p:spPr>
+        <p:txBody>
+          <a:bodyPr/>
+          <a:p/>
+        </p:txBody>
       </p:sp>
       <p:grpSp>
         <p:nvGrpSpPr>
@@ -13421,7 +13541,7 @@
                 <a:ea typeface="+mn-ea"/>
                 <a:cs typeface="+mn-cs"/>
               </a:rPr>
-              <a:t>帮扶管理信息系统 v1.18.8</a:t>
+              <a:t>帮扶管理信息系统 v1.18.12</a:t>
             </a:r>
           </a:p>
         </p:txBody>
@@ -13523,6 +13643,10 @@
             <a:noFill/>
           </a:ln>
         </p:spPr>
+        <p:txBody>
+          <a:bodyPr/>
+          <a:p/>
+        </p:txBody>
       </p:sp>
       <p:sp>
         <p:nvSpPr>
@@ -13545,6 +13669,10 @@
             <a:noFill/>
           </a:ln>
         </p:spPr>
+        <p:txBody>
+          <a:bodyPr/>
+          <a:p/>
+        </p:txBody>
       </p:sp>
       <p:sp>
         <p:nvSpPr>
@@ -13661,6 +13789,10 @@
             </a:solidFill>
           </a:ln>
         </p:spPr>
+        <p:txBody>
+          <a:bodyPr/>
+          <a:p/>
+        </p:txBody>
       </p:sp>
       <p:grpSp>
         <p:nvGrpSpPr>
@@ -14022,7 +14154,7 @@
                 <a:ea typeface="+mn-ea"/>
                 <a:cs typeface="+mn-cs"/>
               </a:rPr>
-              <a:t>帮扶管理信息系统 v1.18.8</a:t>
+              <a:t>帮扶管理信息系统 v1.18.12</a:t>
             </a:r>
           </a:p>
         </p:txBody>
@@ -14124,6 +14256,10 @@
             <a:noFill/>
           </a:ln>
         </p:spPr>
+        <p:txBody>
+          <a:bodyPr/>
+          <a:p/>
+        </p:txBody>
       </p:sp>
       <p:sp>
         <p:nvSpPr>
@@ -14146,6 +14282,10 @@
             <a:noFill/>
           </a:ln>
         </p:spPr>
+        <p:txBody>
+          <a:bodyPr/>
+          <a:p/>
+        </p:txBody>
       </p:sp>
       <p:sp>
         <p:nvSpPr>
@@ -14248,6 +14388,10 @@
             <a:noFill/>
           </a:ln>
         </p:spPr>
+        <p:txBody>
+          <a:bodyPr/>
+          <a:p/>
+        </p:txBody>
       </p:sp>
       <p:grpSp>
         <p:nvGrpSpPr>
@@ -15199,7 +15343,7 @@
                 <a:ea typeface="+mn-ea"/>
                 <a:cs typeface="+mn-cs"/>
               </a:rPr>
-              <a:t>帮扶管理信息系统 v1.18.8</a:t>
+              <a:t>帮扶管理信息系统 v1.18.12</a:t>
             </a:r>
           </a:p>
         </p:txBody>
@@ -15301,6 +15445,10 @@
             <a:noFill/>
           </a:ln>
         </p:spPr>
+        <p:txBody>
+          <a:bodyPr/>
+          <a:p/>
+        </p:txBody>
       </p:sp>
       <p:sp>
         <p:nvSpPr>
@@ -15323,6 +15471,10 @@
             <a:noFill/>
           </a:ln>
         </p:spPr>
+        <p:txBody>
+          <a:bodyPr/>
+          <a:p/>
+        </p:txBody>
       </p:sp>
       <p:sp>
         <p:nvSpPr>
@@ -15439,6 +15591,10 @@
             </a:solidFill>
           </a:ln>
         </p:spPr>
+        <p:txBody>
+          <a:bodyPr/>
+          <a:p/>
+        </p:txBody>
       </p:sp>
       <p:grpSp>
         <p:nvGrpSpPr>
@@ -16050,7 +16206,7 @@
                 <a:ea typeface="+mn-ea"/>
                 <a:cs typeface="+mn-cs"/>
               </a:rPr>
-              <a:t>帮扶管理信息系统 v1.18.8</a:t>
+              <a:t>帮扶管理信息系统 v1.18.12</a:t>
             </a:r>
           </a:p>
         </p:txBody>
@@ -16297,6 +16453,10 @@
             <a:noFill/>
           </a:ln>
         </p:spPr>
+        <p:txBody>
+          <a:bodyPr/>
+          <a:p/>
+        </p:txBody>
       </p:sp>
       <p:grpSp>
         <p:nvGrpSpPr>
@@ -16734,6 +16894,10 @@
             <a:noFill/>
           </a:ln>
         </p:spPr>
+        <p:txBody>
+          <a:bodyPr/>
+          <a:p/>
+        </p:txBody>
       </p:sp>
       <p:sp>
         <p:nvSpPr>
@@ -16756,6 +16920,10 @@
             <a:noFill/>
           </a:ln>
         </p:spPr>
+        <p:txBody>
+          <a:bodyPr/>
+          <a:p/>
+        </p:txBody>
       </p:sp>
       <p:sp>
         <p:nvSpPr>
@@ -16872,6 +17040,10 @@
             </a:solidFill>
           </a:ln>
         </p:spPr>
+        <p:txBody>
+          <a:bodyPr/>
+          <a:p/>
+        </p:txBody>
       </p:sp>
       <p:grpSp>
         <p:nvGrpSpPr>
@@ -17499,7 +17671,7 @@
                 <a:ea typeface="+mn-ea"/>
                 <a:cs typeface="+mn-cs"/>
               </a:rPr>
-              <a:t>帮扶管理信息系统 v1.18.8</a:t>
+              <a:t>帮扶管理信息系统 v1.18.12</a:t>
             </a:r>
           </a:p>
         </p:txBody>
@@ -17601,6 +17773,10 @@
             <a:noFill/>
           </a:ln>
         </p:spPr>
+        <p:txBody>
+          <a:bodyPr/>
+          <a:p/>
+        </p:txBody>
       </p:sp>
       <p:sp>
         <p:nvSpPr>
@@ -17623,6 +17799,10 @@
             <a:noFill/>
           </a:ln>
         </p:spPr>
+        <p:txBody>
+          <a:bodyPr/>
+          <a:p/>
+        </p:txBody>
       </p:sp>
       <p:sp>
         <p:nvSpPr>
@@ -17739,6 +17919,10 @@
             </a:solidFill>
           </a:ln>
         </p:spPr>
+        <p:txBody>
+          <a:bodyPr/>
+          <a:p/>
+        </p:txBody>
       </p:sp>
       <p:grpSp>
         <p:nvGrpSpPr>
@@ -18546,7 +18730,7 @@
                 <a:ea typeface="+mn-ea"/>
                 <a:cs typeface="+mn-cs"/>
               </a:rPr>
-              <a:t>帮扶管理信息系统 v1.18.8</a:t>
+              <a:t>帮扶管理信息系统 v1.18.12</a:t>
             </a:r>
           </a:p>
         </p:txBody>
@@ -18648,6 +18832,10 @@
             <a:noFill/>
           </a:ln>
         </p:spPr>
+        <p:txBody>
+          <a:bodyPr/>
+          <a:p/>
+        </p:txBody>
       </p:sp>
       <p:sp>
         <p:nvSpPr>
@@ -18670,6 +18858,10 @@
             <a:noFill/>
           </a:ln>
         </p:spPr>
+        <p:txBody>
+          <a:bodyPr/>
+          <a:p/>
+        </p:txBody>
       </p:sp>
       <p:sp>
         <p:nvSpPr>
@@ -18786,6 +18978,10 @@
             </a:solidFill>
           </a:ln>
         </p:spPr>
+        <p:txBody>
+          <a:bodyPr/>
+          <a:p/>
+        </p:txBody>
       </p:sp>
       <p:grpSp>
         <p:nvGrpSpPr>
@@ -19285,7 +19481,7 @@
                 <a:ea typeface="+mn-ea"/>
                 <a:cs typeface="+mn-cs"/>
               </a:rPr>
-              <a:t>帮扶管理信息系统 v1.18.8</a:t>
+              <a:t>帮扶管理信息系统 v1.18.12</a:t>
             </a:r>
           </a:p>
         </p:txBody>
@@ -19387,6 +19583,10 @@
             <a:noFill/>
           </a:ln>
         </p:spPr>
+        <p:txBody>
+          <a:bodyPr/>
+          <a:p/>
+        </p:txBody>
       </p:sp>
       <p:sp>
         <p:nvSpPr>
@@ -19409,6 +19609,10 @@
             <a:noFill/>
           </a:ln>
         </p:spPr>
+        <p:txBody>
+          <a:bodyPr/>
+          <a:p/>
+        </p:txBody>
       </p:sp>
       <p:sp>
         <p:nvSpPr>
@@ -19525,6 +19729,10 @@
             </a:solidFill>
           </a:ln>
         </p:spPr>
+        <p:txBody>
+          <a:bodyPr/>
+          <a:p/>
+        </p:txBody>
       </p:sp>
       <p:grpSp>
         <p:nvGrpSpPr>
@@ -20152,7 +20360,7 @@
                 <a:ea typeface="+mn-ea"/>
                 <a:cs typeface="+mn-cs"/>
               </a:rPr>
-              <a:t>帮扶管理信息系统 v1.18.8</a:t>
+              <a:t>帮扶管理信息系统 v1.18.12</a:t>
             </a:r>
           </a:p>
         </p:txBody>
@@ -20254,6 +20462,10 @@
             <a:noFill/>
           </a:ln>
         </p:spPr>
+        <p:txBody>
+          <a:bodyPr/>
+          <a:p/>
+        </p:txBody>
       </p:sp>
       <p:sp>
         <p:nvSpPr>
@@ -20276,6 +20488,10 @@
             <a:noFill/>
           </a:ln>
         </p:spPr>
+        <p:txBody>
+          <a:bodyPr/>
+          <a:p/>
+        </p:txBody>
       </p:sp>
       <p:sp>
         <p:nvSpPr>
@@ -20392,6 +20608,10 @@
             </a:solidFill>
           </a:ln>
         </p:spPr>
+        <p:txBody>
+          <a:bodyPr/>
+          <a:p/>
+        </p:txBody>
       </p:sp>
       <p:grpSp>
         <p:nvGrpSpPr>
@@ -21033,7 +21253,7 @@
                 <a:ea typeface="+mn-ea"/>
                 <a:cs typeface="+mn-cs"/>
               </a:rPr>
-              <a:t>帮扶管理信息系统 v1.18.8</a:t>
+              <a:t>帮扶管理信息系统 v1.18.12</a:t>
             </a:r>
           </a:p>
         </p:txBody>
@@ -21135,6 +21355,10 @@
             <a:noFill/>
           </a:ln>
         </p:spPr>
+        <p:txBody>
+          <a:bodyPr/>
+          <a:p/>
+        </p:txBody>
       </p:sp>
       <p:sp>
         <p:nvSpPr>
@@ -21157,6 +21381,10 @@
             <a:noFill/>
           </a:ln>
         </p:spPr>
+        <p:txBody>
+          <a:bodyPr/>
+          <a:p/>
+        </p:txBody>
       </p:sp>
       <p:sp>
         <p:nvSpPr>
@@ -21273,6 +21501,10 @@
             </a:solidFill>
           </a:ln>
         </p:spPr>
+        <p:txBody>
+          <a:bodyPr/>
+          <a:p/>
+        </p:txBody>
       </p:sp>
       <p:grpSp>
         <p:nvGrpSpPr>
@@ -22024,7 +22256,7 @@
                 <a:ea typeface="+mn-ea"/>
                 <a:cs typeface="+mn-cs"/>
               </a:rPr>
-              <a:t>帮扶管理信息系统 v1.18.8</a:t>
+              <a:t>帮扶管理信息系统 v1.18.12</a:t>
             </a:r>
           </a:p>
         </p:txBody>
@@ -22126,6 +22358,10 @@
             <a:noFill/>
           </a:ln>
         </p:spPr>
+        <p:txBody>
+          <a:bodyPr/>
+          <a:p/>
+        </p:txBody>
       </p:sp>
       <p:sp>
         <p:nvSpPr>
@@ -22148,6 +22384,10 @@
             <a:noFill/>
           </a:ln>
         </p:spPr>
+        <p:txBody>
+          <a:bodyPr/>
+          <a:p/>
+        </p:txBody>
       </p:sp>
       <p:sp>
         <p:nvSpPr>
@@ -22264,6 +22504,10 @@
             </a:solidFill>
           </a:ln>
         </p:spPr>
+        <p:txBody>
+          <a:bodyPr/>
+          <a:p/>
+        </p:txBody>
       </p:sp>
       <p:grpSp>
         <p:nvGrpSpPr>
@@ -23109,7 +23353,7 @@
                 <a:ea typeface="+mn-ea"/>
                 <a:cs typeface="+mn-cs"/>
               </a:rPr>
-              <a:t>帮扶管理信息系统 v1.18.8</a:t>
+              <a:t>帮扶管理信息系统 v1.18.12</a:t>
             </a:r>
           </a:p>
         </p:txBody>
@@ -23356,6 +23600,10 @@
             <a:noFill/>
           </a:ln>
         </p:spPr>
+        <p:txBody>
+          <a:bodyPr/>
+          <a:p/>
+        </p:txBody>
       </p:sp>
       <p:grpSp>
         <p:nvGrpSpPr>
@@ -23731,6 +23979,10 @@
             <a:noFill/>
           </a:ln>
         </p:spPr>
+        <p:txBody>
+          <a:bodyPr/>
+          <a:p/>
+        </p:txBody>
       </p:sp>
       <p:sp>
         <p:nvSpPr>
@@ -23753,6 +24005,10 @@
             <a:noFill/>
           </a:ln>
         </p:spPr>
+        <p:txBody>
+          <a:bodyPr/>
+          <a:p/>
+        </p:txBody>
       </p:sp>
       <p:sp>
         <p:nvSpPr>
@@ -23869,6 +24125,10 @@
             </a:solidFill>
           </a:ln>
         </p:spPr>
+        <p:txBody>
+          <a:bodyPr/>
+          <a:p/>
+        </p:txBody>
       </p:sp>
       <p:grpSp>
         <p:nvGrpSpPr>
@@ -24168,7 +24428,7 @@
                 <a:ea typeface="+mn-ea"/>
                 <a:cs typeface="+mn-cs"/>
               </a:rPr>
-              <a:t>帮扶管理信息系统 v1.18.8</a:t>
+              <a:t>帮扶管理信息系统 v1.18.12</a:t>
             </a:r>
           </a:p>
         </p:txBody>
@@ -24270,6 +24530,10 @@
             <a:noFill/>
           </a:ln>
         </p:spPr>
+        <p:txBody>
+          <a:bodyPr/>
+          <a:p/>
+        </p:txBody>
       </p:sp>
       <p:sp>
         <p:nvSpPr>
@@ -24292,6 +24556,10 @@
             <a:noFill/>
           </a:ln>
         </p:spPr>
+        <p:txBody>
+          <a:bodyPr/>
+          <a:p/>
+        </p:txBody>
       </p:sp>
       <p:sp>
         <p:nvSpPr>
@@ -24408,6 +24676,10 @@
             </a:solidFill>
           </a:ln>
         </p:spPr>
+        <p:txBody>
+          <a:bodyPr/>
+          <a:p/>
+        </p:txBody>
       </p:sp>
       <p:grpSp>
         <p:nvGrpSpPr>
@@ -25717,7 +25989,7 @@
                 <a:ea typeface="+mn-ea"/>
                 <a:cs typeface="+mn-cs"/>
               </a:rPr>
-              <a:t>帮扶管理信息系统 v1.18.8</a:t>
+              <a:t>帮扶管理信息系统 v1.18.12</a:t>
             </a:r>
           </a:p>
         </p:txBody>
@@ -25819,6 +26091,10 @@
             <a:noFill/>
           </a:ln>
         </p:spPr>
+        <p:txBody>
+          <a:bodyPr/>
+          <a:p/>
+        </p:txBody>
       </p:sp>
       <p:sp>
         <p:nvSpPr>
@@ -25841,6 +26117,10 @@
             <a:noFill/>
           </a:ln>
         </p:spPr>
+        <p:txBody>
+          <a:bodyPr/>
+          <a:p/>
+        </p:txBody>
       </p:sp>
       <p:sp>
         <p:nvSpPr>
@@ -25997,6 +26277,10 @@
             </a:solidFill>
           </a:ln>
         </p:spPr>
+        <p:txBody>
+          <a:bodyPr/>
+          <a:p/>
+        </p:txBody>
       </p:sp>
       <p:grpSp>
         <p:nvGrpSpPr>
@@ -27136,7 +27420,7 @@
                 <a:ea typeface="+mn-ea"/>
                 <a:cs typeface="+mn-cs"/>
               </a:rPr>
-              <a:t>帮扶管理信息系统 v1.18.8</a:t>
+              <a:t>帮扶管理信息系统 v1.18.12</a:t>
             </a:r>
           </a:p>
         </p:txBody>
@@ -27238,6 +27522,10 @@
             <a:noFill/>
           </a:ln>
         </p:spPr>
+        <p:txBody>
+          <a:bodyPr/>
+          <a:p/>
+        </p:txBody>
       </p:sp>
       <p:sp>
         <p:nvSpPr>
@@ -27260,6 +27548,10 @@
             <a:noFill/>
           </a:ln>
         </p:spPr>
+        <p:txBody>
+          <a:bodyPr/>
+          <a:p/>
+        </p:txBody>
       </p:sp>
       <p:sp>
         <p:nvSpPr>
@@ -27376,6 +27668,10 @@
             </a:solidFill>
           </a:ln>
         </p:spPr>
+        <p:txBody>
+          <a:bodyPr/>
+          <a:p/>
+        </p:txBody>
       </p:sp>
       <p:grpSp>
         <p:nvGrpSpPr>
@@ -28119,7 +28415,7 @@
                 <a:ea typeface="+mn-ea"/>
                 <a:cs typeface="+mn-cs"/>
               </a:rPr>
-              <a:t>帮扶管理信息系统 v1.18.8</a:t>
+              <a:t>帮扶管理信息系统 v1.18.12</a:t>
             </a:r>
           </a:p>
         </p:txBody>
@@ -28221,6 +28517,10 @@
             <a:noFill/>
           </a:ln>
         </p:spPr>
+        <p:txBody>
+          <a:bodyPr/>
+          <a:p/>
+        </p:txBody>
       </p:sp>
       <p:sp>
         <p:nvSpPr>
@@ -28243,6 +28543,10 @@
             <a:noFill/>
           </a:ln>
         </p:spPr>
+        <p:txBody>
+          <a:bodyPr/>
+          <a:p/>
+        </p:txBody>
       </p:sp>
       <p:sp>
         <p:nvSpPr>
@@ -28359,6 +28663,10 @@
             </a:solidFill>
           </a:ln>
         </p:spPr>
+        <p:txBody>
+          <a:bodyPr/>
+          <a:p/>
+        </p:txBody>
       </p:sp>
       <p:grpSp>
         <p:nvGrpSpPr>
@@ -29546,7 +29854,7 @@
                 <a:ea typeface="+mn-ea"/>
                 <a:cs typeface="+mn-cs"/>
               </a:rPr>
-              <a:t>帮扶管理信息系统 v1.18.8</a:t>
+              <a:t>帮扶管理信息系统 v1.18.12</a:t>
             </a:r>
           </a:p>
         </p:txBody>
@@ -29648,6 +29956,10 @@
             <a:noFill/>
           </a:ln>
         </p:spPr>
+        <p:txBody>
+          <a:bodyPr/>
+          <a:p/>
+        </p:txBody>
       </p:sp>
       <p:sp>
         <p:nvSpPr>
@@ -29670,6 +29982,10 @@
             <a:noFill/>
           </a:ln>
         </p:spPr>
+        <p:txBody>
+          <a:bodyPr/>
+          <a:p/>
+        </p:txBody>
       </p:sp>
       <p:sp>
         <p:nvSpPr>
@@ -29786,6 +30102,10 @@
             </a:solidFill>
           </a:ln>
         </p:spPr>
+        <p:txBody>
+          <a:bodyPr/>
+          <a:p/>
+        </p:txBody>
       </p:sp>
       <p:grpSp>
         <p:nvGrpSpPr>
@@ -30413,7 +30733,7 @@
                 <a:ea typeface="+mn-ea"/>
                 <a:cs typeface="+mn-cs"/>
               </a:rPr>
-              <a:t>帮扶管理信息系统 v1.18.8</a:t>
+              <a:t>帮扶管理信息系统 v1.18.12</a:t>
             </a:r>
           </a:p>
         </p:txBody>
@@ -30660,6 +30980,10 @@
             <a:noFill/>
           </a:ln>
         </p:spPr>
+        <p:txBody>
+          <a:bodyPr/>
+          <a:p/>
+        </p:txBody>
       </p:sp>
       <p:grpSp>
         <p:nvGrpSpPr>
@@ -31097,6 +31421,10 @@
             <a:noFill/>
           </a:ln>
         </p:spPr>
+        <p:txBody>
+          <a:bodyPr/>
+          <a:p/>
+        </p:txBody>
       </p:sp>
       <p:sp>
         <p:nvSpPr>
@@ -31119,6 +31447,10 @@
             <a:noFill/>
           </a:ln>
         </p:spPr>
+        <p:txBody>
+          <a:bodyPr/>
+          <a:p/>
+        </p:txBody>
       </p:sp>
       <p:sp>
         <p:nvSpPr>
@@ -31235,6 +31567,10 @@
             </a:solidFill>
           </a:ln>
         </p:spPr>
+        <p:txBody>
+          <a:bodyPr/>
+          <a:p/>
+        </p:txBody>
       </p:sp>
       <p:grpSp>
         <p:nvGrpSpPr>
@@ -31978,7 +32314,7 @@
                 <a:ea typeface="+mn-ea"/>
                 <a:cs typeface="+mn-cs"/>
               </a:rPr>
-              <a:t>帮扶管理信息系统 v1.18.8</a:t>
+              <a:t>帮扶管理信息系统 v1.18.12</a:t>
             </a:r>
           </a:p>
         </p:txBody>
@@ -32080,6 +32416,10 @@
             <a:noFill/>
           </a:ln>
         </p:spPr>
+        <p:txBody>
+          <a:bodyPr/>
+          <a:p/>
+        </p:txBody>
       </p:sp>
       <p:sp>
         <p:nvSpPr>
@@ -32102,6 +32442,10 @@
             <a:noFill/>
           </a:ln>
         </p:spPr>
+        <p:txBody>
+          <a:bodyPr/>
+          <a:p/>
+        </p:txBody>
       </p:sp>
       <p:sp>
         <p:nvSpPr>
@@ -32218,6 +32562,10 @@
             </a:solidFill>
           </a:ln>
         </p:spPr>
+        <p:txBody>
+          <a:bodyPr/>
+          <a:p/>
+        </p:txBody>
       </p:sp>
       <p:grpSp>
         <p:nvGrpSpPr>
@@ -32859,7 +33207,7 @@
                 <a:ea typeface="+mn-ea"/>
                 <a:cs typeface="+mn-cs"/>
               </a:rPr>
-              <a:t>帮扶管理信息系统 v1.18.8</a:t>
+              <a:t>帮扶管理信息系统 v1.18.12</a:t>
             </a:r>
           </a:p>
         </p:txBody>
@@ -32961,6 +33309,10 @@
             <a:noFill/>
           </a:ln>
         </p:spPr>
+        <p:txBody>
+          <a:bodyPr/>
+          <a:p/>
+        </p:txBody>
       </p:sp>
       <p:sp>
         <p:nvSpPr>
@@ -32983,6 +33335,10 @@
             <a:noFill/>
           </a:ln>
         </p:spPr>
+        <p:txBody>
+          <a:bodyPr/>
+          <a:p/>
+        </p:txBody>
       </p:sp>
       <p:sp>
         <p:nvSpPr>
@@ -33099,6 +33455,10 @@
             </a:solidFill>
           </a:ln>
         </p:spPr>
+        <p:txBody>
+          <a:bodyPr/>
+          <a:p/>
+        </p:txBody>
       </p:sp>
       <p:grpSp>
         <p:nvGrpSpPr>
@@ -33772,7 +34132,7 @@
                 <a:ea typeface="+mn-ea"/>
                 <a:cs typeface="+mn-cs"/>
               </a:rPr>
-              <a:t>帮扶管理信息系统 v1.18.8</a:t>
+              <a:t>帮扶管理信息系统 v1.18.12</a:t>
             </a:r>
           </a:p>
         </p:txBody>
@@ -33874,6 +34234,10 @@
             <a:noFill/>
           </a:ln>
         </p:spPr>
+        <p:txBody>
+          <a:bodyPr/>
+          <a:p/>
+        </p:txBody>
       </p:sp>
       <p:sp>
         <p:nvSpPr>
@@ -33896,6 +34260,10 @@
             <a:noFill/>
           </a:ln>
         </p:spPr>
+        <p:txBody>
+          <a:bodyPr/>
+          <a:p/>
+        </p:txBody>
       </p:sp>
       <p:sp>
         <p:nvSpPr>
@@ -34012,6 +34380,10 @@
             </a:solidFill>
           </a:ln>
         </p:spPr>
+        <p:txBody>
+          <a:bodyPr/>
+          <a:p/>
+        </p:txBody>
       </p:sp>
       <p:grpSp>
         <p:nvGrpSpPr>
@@ -34951,7 +35323,7 @@
                 <a:ea typeface="+mn-ea"/>
                 <a:cs typeface="+mn-cs"/>
               </a:rPr>
-              <a:t>帮扶管理信息系统 v1.18.8</a:t>
+              <a:t>帮扶管理信息系统 v1.18.12</a:t>
             </a:r>
           </a:p>
         </p:txBody>
@@ -35053,6 +35425,10 @@
             <a:noFill/>
           </a:ln>
         </p:spPr>
+        <p:txBody>
+          <a:bodyPr/>
+          <a:p/>
+        </p:txBody>
       </p:sp>
       <p:sp>
         <p:nvSpPr>
@@ -35075,6 +35451,10 @@
             <a:noFill/>
           </a:ln>
         </p:spPr>
+        <p:txBody>
+          <a:bodyPr/>
+          <a:p/>
+        </p:txBody>
       </p:sp>
       <p:sp>
         <p:nvSpPr>
@@ -35231,6 +35611,10 @@
             </a:solidFill>
           </a:ln>
         </p:spPr>
+        <p:txBody>
+          <a:bodyPr/>
+          <a:p/>
+        </p:txBody>
       </p:sp>
       <p:grpSp>
         <p:nvGrpSpPr>
@@ -36104,7 +36488,7 @@
                 <a:ea typeface="+mn-ea"/>
                 <a:cs typeface="+mn-cs"/>
               </a:rPr>
-              <a:t>帮扶管理信息系统 v1.18.8</a:t>
+              <a:t>帮扶管理信息系统 v1.18.12</a:t>
             </a:r>
           </a:p>
         </p:txBody>
@@ -36206,6 +36590,10 @@
             <a:noFill/>
           </a:ln>
         </p:spPr>
+        <p:txBody>
+          <a:bodyPr/>
+          <a:p/>
+        </p:txBody>
       </p:sp>
       <p:sp>
         <p:nvSpPr>
@@ -36228,6 +36616,10 @@
             <a:noFill/>
           </a:ln>
         </p:spPr>
+        <p:txBody>
+          <a:bodyPr/>
+          <a:p/>
+        </p:txBody>
       </p:sp>
       <p:sp>
         <p:nvSpPr>
@@ -36344,6 +36736,10 @@
             </a:solidFill>
           </a:ln>
         </p:spPr>
+        <p:txBody>
+          <a:bodyPr/>
+          <a:p/>
+        </p:txBody>
       </p:sp>
       <p:grpSp>
         <p:nvGrpSpPr>
@@ -37403,7 +37799,7 @@
                 <a:ea typeface="+mn-ea"/>
                 <a:cs typeface="+mn-cs"/>
               </a:rPr>
-              <a:t>帮扶管理信息系统 v1.18.8</a:t>
+              <a:t>帮扶管理信息系统 v1.18.12</a:t>
             </a:r>
           </a:p>
         </p:txBody>
@@ -37505,6 +37901,10 @@
             <a:noFill/>
           </a:ln>
         </p:spPr>
+        <p:txBody>
+          <a:bodyPr/>
+          <a:p/>
+        </p:txBody>
       </p:sp>
       <p:sp>
         <p:nvSpPr>
@@ -37527,6 +37927,10 @@
             <a:noFill/>
           </a:ln>
         </p:spPr>
+        <p:txBody>
+          <a:bodyPr/>
+          <a:p/>
+        </p:txBody>
       </p:sp>
       <p:sp>
         <p:nvSpPr>
@@ -37643,6 +38047,10 @@
             </a:solidFill>
           </a:ln>
         </p:spPr>
+        <p:txBody>
+          <a:bodyPr/>
+          <a:p/>
+        </p:txBody>
       </p:sp>
       <p:grpSp>
         <p:nvGrpSpPr>
@@ -39014,7 +39422,7 @@
                 <a:ea typeface="+mn-ea"/>
                 <a:cs typeface="+mn-cs"/>
               </a:rPr>
-              <a:t>帮扶管理信息系统 v1.18.8</a:t>
+              <a:t>帮扶管理信息系统 v1.18.12</a:t>
             </a:r>
           </a:p>
         </p:txBody>
@@ -39116,6 +39524,10 @@
             <a:noFill/>
           </a:ln>
         </p:spPr>
+        <p:txBody>
+          <a:bodyPr/>
+          <a:p/>
+        </p:txBody>
       </p:sp>
       <p:sp>
         <p:nvSpPr>
@@ -39138,6 +39550,10 @@
             <a:noFill/>
           </a:ln>
         </p:spPr>
+        <p:txBody>
+          <a:bodyPr/>
+          <a:p/>
+        </p:txBody>
       </p:sp>
       <p:sp>
         <p:nvSpPr>
@@ -39254,6 +39670,10 @@
             </a:solidFill>
           </a:ln>
         </p:spPr>
+        <p:txBody>
+          <a:bodyPr/>
+          <a:p/>
+        </p:txBody>
       </p:sp>
       <p:grpSp>
         <p:nvGrpSpPr>
@@ -40433,7 +40853,7 @@
                 <a:ea typeface="+mn-ea"/>
                 <a:cs typeface="+mn-cs"/>
               </a:rPr>
-              <a:t>帮扶管理信息系统 v1.18.8</a:t>
+              <a:t>帮扶管理信息系统 v1.18.12</a:t>
             </a:r>
           </a:p>
         </p:txBody>
@@ -40535,6 +40955,10 @@
             <a:noFill/>
           </a:ln>
         </p:spPr>
+        <p:txBody>
+          <a:bodyPr/>
+          <a:p/>
+        </p:txBody>
       </p:sp>
       <p:sp>
         <p:nvSpPr>
@@ -40557,6 +40981,10 @@
             <a:noFill/>
           </a:ln>
         </p:spPr>
+        <p:txBody>
+          <a:bodyPr/>
+          <a:p/>
+        </p:txBody>
       </p:sp>
       <p:sp>
         <p:nvSpPr>
@@ -40673,6 +41101,10 @@
             </a:solidFill>
           </a:ln>
         </p:spPr>
+        <p:txBody>
+          <a:bodyPr/>
+          <a:p/>
+        </p:txBody>
       </p:sp>
       <p:grpSp>
         <p:nvGrpSpPr>
@@ -40910,7 +41342,7 @@
                 <a:ea typeface="+mn-ea"/>
                 <a:cs typeface="+mn-cs"/>
               </a:rPr>
-              <a:t>帮扶管理信息系统 v1.18.8</a:t>
+              <a:t>帮扶管理信息系统 v1.18.12</a:t>
             </a:r>
           </a:p>
         </p:txBody>
@@ -41025,6 +41457,10 @@
             </a:solidFill>
           </a:ln>
         </p:spPr>
+        <p:txBody>
+          <a:bodyPr/>
+          <a:p/>
+        </p:txBody>
       </p:sp>
       <p:sp>
         <p:nvSpPr>
@@ -41049,6 +41485,10 @@
             </a:solidFill>
           </a:ln>
         </p:spPr>
+        <p:txBody>
+          <a:bodyPr/>
+          <a:p/>
+        </p:txBody>
       </p:sp>
       <p:sp>
         <p:nvSpPr>
@@ -41071,6 +41511,10 @@
             <a:noFill/>
           </a:ln>
         </p:spPr>
+        <p:txBody>
+          <a:bodyPr/>
+          <a:p/>
+        </p:txBody>
       </p:sp>
       <p:sp>
         <p:nvSpPr>
@@ -41175,6 +41619,10 @@
             <a:noFill/>
           </a:ln>
         </p:spPr>
+        <p:txBody>
+          <a:bodyPr/>
+          <a:p/>
+        </p:txBody>
       </p:sp>
       <p:sp>
         <p:nvSpPr>
@@ -41211,7 +41659,7 @@
                 <a:ea typeface="+mn-ea"/>
                 <a:cs typeface="+mn-cs"/>
               </a:rPr>
-              <a:t>帮扶管理信息系统 v1.18.8 · 仓库：github.com/lzh745200/MRRS · 完整文档见 docs/ 目录</a:t>
+              <a:t>帮扶管理信息系统 v1.18.12 · 仓库：github.com/lzh745200/MRRS · 完整文档见 docs/ 目录</a:t>
             </a:r>
           </a:p>
         </p:txBody>
@@ -41353,6 +41801,10 @@
             <a:noFill/>
           </a:ln>
         </p:spPr>
+        <p:txBody>
+          <a:bodyPr/>
+          <a:p/>
+        </p:txBody>
       </p:sp>
       <p:sp>
         <p:nvSpPr>
@@ -41375,6 +41827,10 @@
             <a:noFill/>
           </a:ln>
         </p:spPr>
+        <p:txBody>
+          <a:bodyPr/>
+          <a:p/>
+        </p:txBody>
       </p:sp>
       <p:sp>
         <p:nvSpPr>
@@ -41491,6 +41947,10 @@
             </a:solidFill>
           </a:ln>
         </p:spPr>
+        <p:txBody>
+          <a:bodyPr/>
+          <a:p/>
+        </p:txBody>
       </p:sp>
       <p:grpSp>
         <p:nvGrpSpPr>
@@ -41990,7 +42450,7 @@
                 <a:ea typeface="+mn-ea"/>
                 <a:cs typeface="+mn-cs"/>
               </a:rPr>
-              <a:t>帮扶管理信息系统 v1.18.8</a:t>
+              <a:t>帮扶管理信息系统 v1.18.12</a:t>
             </a:r>
           </a:p>
         </p:txBody>
@@ -42092,6 +42552,10 @@
             <a:noFill/>
           </a:ln>
         </p:spPr>
+        <p:txBody>
+          <a:bodyPr/>
+          <a:p/>
+        </p:txBody>
       </p:sp>
       <p:sp>
         <p:nvSpPr>
@@ -42114,6 +42578,10 @@
             <a:noFill/>
           </a:ln>
         </p:spPr>
+        <p:txBody>
+          <a:bodyPr/>
+          <a:p/>
+        </p:txBody>
       </p:sp>
       <p:sp>
         <p:nvSpPr>
@@ -42270,6 +42738,10 @@
             </a:solidFill>
           </a:ln>
         </p:spPr>
+        <p:txBody>
+          <a:bodyPr/>
+          <a:p/>
+        </p:txBody>
       </p:sp>
       <p:grpSp>
         <p:nvGrpSpPr>
@@ -43453,7 +43925,7 @@
                 <a:ea typeface="+mn-ea"/>
                 <a:cs typeface="+mn-cs"/>
               </a:rPr>
-              <a:t>帮扶管理信息系统 v1.18.8</a:t>
+              <a:t>帮扶管理信息系统 v1.18.12</a:t>
             </a:r>
           </a:p>
         </p:txBody>
@@ -43555,6 +44027,10 @@
             <a:noFill/>
           </a:ln>
         </p:spPr>
+        <p:txBody>
+          <a:bodyPr/>
+          <a:p/>
+        </p:txBody>
       </p:sp>
       <p:sp>
         <p:nvSpPr>
@@ -43577,6 +44053,10 @@
             <a:noFill/>
           </a:ln>
         </p:spPr>
+        <p:txBody>
+          <a:bodyPr/>
+          <a:p/>
+        </p:txBody>
       </p:sp>
       <p:sp>
         <p:nvSpPr>
@@ -43693,6 +44173,10 @@
             </a:solidFill>
           </a:ln>
         </p:spPr>
+        <p:txBody>
+          <a:bodyPr/>
+          <a:p/>
+        </p:txBody>
       </p:sp>
       <p:grpSp>
         <p:nvGrpSpPr>
@@ -44534,7 +45018,7 @@
                 <a:ea typeface="+mn-ea"/>
                 <a:cs typeface="+mn-cs"/>
               </a:rPr>
-              <a:t>帮扶管理信息系统 v1.18.8</a:t>
+              <a:t>帮扶管理信息系统 v1.18.12</a:t>
             </a:r>
           </a:p>
         </p:txBody>
@@ -44636,6 +45120,10 @@
             <a:noFill/>
           </a:ln>
         </p:spPr>
+        <p:txBody>
+          <a:bodyPr/>
+          <a:p/>
+        </p:txBody>
       </p:sp>
       <p:sp>
         <p:nvSpPr>
@@ -44658,6 +45146,10 @@
             <a:noFill/>
           </a:ln>
         </p:spPr>
+        <p:txBody>
+          <a:bodyPr/>
+          <a:p/>
+        </p:txBody>
       </p:sp>
       <p:sp>
         <p:nvSpPr>
@@ -44774,6 +45266,10 @@
             </a:solidFill>
           </a:ln>
         </p:spPr>
+        <p:txBody>
+          <a:bodyPr/>
+          <a:p/>
+        </p:txBody>
       </p:sp>
       <p:grpSp>
         <p:nvGrpSpPr>
@@ -45615,7 +46111,7 @@
                 <a:ea typeface="+mn-ea"/>
                 <a:cs typeface="+mn-cs"/>
               </a:rPr>
-              <a:t>帮扶管理信息系统 v1.18.8</a:t>
+              <a:t>帮扶管理信息系统 v1.18.12</a:t>
             </a:r>
           </a:p>
         </p:txBody>
@@ -45717,6 +46213,10 @@
             <a:noFill/>
           </a:ln>
         </p:spPr>
+        <p:txBody>
+          <a:bodyPr/>
+          <a:p/>
+        </p:txBody>
       </p:sp>
       <p:sp>
         <p:nvSpPr>
@@ -45739,6 +46239,10 @@
             <a:noFill/>
           </a:ln>
         </p:spPr>
+        <p:txBody>
+          <a:bodyPr/>
+          <a:p/>
+        </p:txBody>
       </p:sp>
       <p:sp>
         <p:nvSpPr>
@@ -45855,6 +46359,10 @@
             </a:solidFill>
           </a:ln>
         </p:spPr>
+        <p:txBody>
+          <a:bodyPr/>
+          <a:p/>
+        </p:txBody>
       </p:sp>
       <p:grpSp>
         <p:nvGrpSpPr>
@@ -46912,7 +47420,7 @@
                 <a:ea typeface="+mn-ea"/>
                 <a:cs typeface="+mn-cs"/>
               </a:rPr>
-              <a:t>帮扶管理信息系统 v1.18.8</a:t>
+              <a:t>帮扶管理信息系统 v1.18.12</a:t>
             </a:r>
           </a:p>
         </p:txBody>

--- a/docs/帮扶管理信息系统介绍-零基础版.pptx
+++ b/docs/帮扶管理信息系统介绍-零基础版.pptx
@@ -3881,7 +3881,7 @@
                 <a:ea typeface="+mn-ea"/>
                 <a:cs typeface="+mn-cs"/>
               </a:rPr>
-              <a:t>V1.18.12 | 2026-10-26 | FastAPI + Vue 3 + Electron + SQLite</a:t>
+              <a:t>V1.18.13 | 2026-10-26 | FastAPI + Vue 3 + Electron + SQLite</a:t>
             </a:r>
           </a:p>
         </p:txBody>
@@ -4806,7 +4806,7 @@
                 <a:ea typeface="+mn-ea"/>
                 <a:cs typeface="+mn-cs"/>
               </a:rPr>
-              <a:t>帮扶管理信息系统 v1.18.12</a:t>
+              <a:t>帮扶管理信息系统 v1.18.13</a:t>
             </a:r>
           </a:p>
         </p:txBody>
@@ -6471,7 +6471,7 @@
                 <a:ea typeface="+mn-ea"/>
                 <a:cs typeface="+mn-cs"/>
               </a:rPr>
-              <a:t>帮扶管理信息系统 v1.18.12</a:t>
+              <a:t>帮扶管理信息系统 v1.18.13</a:t>
             </a:r>
           </a:p>
         </p:txBody>
@@ -7334,7 +7334,7 @@
                 <a:ea typeface="+mn-ea"/>
                 <a:cs typeface="+mn-cs"/>
               </a:rPr>
-              <a:t>帮扶管理信息系统 v1.18.12</a:t>
+              <a:t>帮扶管理信息系统 v1.18.13</a:t>
             </a:r>
           </a:p>
         </p:txBody>
@@ -8533,7 +8533,7 @@
                 <a:ea typeface="+mn-ea"/>
                 <a:cs typeface="+mn-cs"/>
               </a:rPr>
-              <a:t>帮扶管理信息系统 v1.18.12</a:t>
+              <a:t>帮扶管理信息系统 v1.18.13</a:t>
             </a:r>
           </a:p>
         </p:txBody>
@@ -10056,7 +10056,7 @@
                 <a:ea typeface="+mn-ea"/>
                 <a:cs typeface="+mn-cs"/>
               </a:rPr>
-              <a:t>帮扶管理信息系统 v1.18.12</a:t>
+              <a:t>帮扶管理信息系统 v1.18.13</a:t>
             </a:r>
           </a:p>
         </p:txBody>
@@ -11215,7 +11215,7 @@
                 <a:ea typeface="+mn-ea"/>
                 <a:cs typeface="+mn-cs"/>
               </a:rPr>
-              <a:t>帮扶管理信息系统 v1.18.12</a:t>
+              <a:t>帮扶管理信息系统 v1.18.13</a:t>
             </a:r>
           </a:p>
         </p:txBody>
@@ -12352,7 +12352,7 @@
                 <a:ea typeface="+mn-ea"/>
                 <a:cs typeface="+mn-cs"/>
               </a:rPr>
-              <a:t>帮扶管理信息系统 v1.18.12</a:t>
+              <a:t>帮扶管理信息系统 v1.18.13</a:t>
             </a:r>
           </a:p>
         </p:txBody>
@@ -13541,7 +13541,7 @@
                 <a:ea typeface="+mn-ea"/>
                 <a:cs typeface="+mn-cs"/>
               </a:rPr>
-              <a:t>帮扶管理信息系统 v1.18.12</a:t>
+              <a:t>帮扶管理信息系统 v1.18.13</a:t>
             </a:r>
           </a:p>
         </p:txBody>
@@ -14154,7 +14154,7 @@
                 <a:ea typeface="+mn-ea"/>
                 <a:cs typeface="+mn-cs"/>
               </a:rPr>
-              <a:t>帮扶管理信息系统 v1.18.12</a:t>
+              <a:t>帮扶管理信息系统 v1.18.13</a:t>
             </a:r>
           </a:p>
         </p:txBody>
@@ -15343,7 +15343,7 @@
                 <a:ea typeface="+mn-ea"/>
                 <a:cs typeface="+mn-cs"/>
               </a:rPr>
-              <a:t>帮扶管理信息系统 v1.18.12</a:t>
+              <a:t>帮扶管理信息系统 v1.18.13</a:t>
             </a:r>
           </a:p>
         </p:txBody>
@@ -16206,7 +16206,7 @@
                 <a:ea typeface="+mn-ea"/>
                 <a:cs typeface="+mn-cs"/>
               </a:rPr>
-              <a:t>帮扶管理信息系统 v1.18.12</a:t>
+              <a:t>帮扶管理信息系统 v1.18.13</a:t>
             </a:r>
           </a:p>
         </p:txBody>
@@ -17671,7 +17671,7 @@
                 <a:ea typeface="+mn-ea"/>
                 <a:cs typeface="+mn-cs"/>
               </a:rPr>
-              <a:t>帮扶管理信息系统 v1.18.12</a:t>
+              <a:t>帮扶管理信息系统 v1.18.13</a:t>
             </a:r>
           </a:p>
         </p:txBody>
@@ -18730,7 +18730,7 @@
                 <a:ea typeface="+mn-ea"/>
                 <a:cs typeface="+mn-cs"/>
               </a:rPr>
-              <a:t>帮扶管理信息系统 v1.18.12</a:t>
+              <a:t>帮扶管理信息系统 v1.18.13</a:t>
             </a:r>
           </a:p>
         </p:txBody>
@@ -19481,7 +19481,7 @@
                 <a:ea typeface="+mn-ea"/>
                 <a:cs typeface="+mn-cs"/>
               </a:rPr>
-              <a:t>帮扶管理信息系统 v1.18.12</a:t>
+              <a:t>帮扶管理信息系统 v1.18.13</a:t>
             </a:r>
           </a:p>
         </p:txBody>
@@ -20360,7 +20360,7 @@
                 <a:ea typeface="+mn-ea"/>
                 <a:cs typeface="+mn-cs"/>
               </a:rPr>
-              <a:t>帮扶管理信息系统 v1.18.12</a:t>
+              <a:t>帮扶管理信息系统 v1.18.13</a:t>
             </a:r>
           </a:p>
         </p:txBody>
@@ -21253,7 +21253,7 @@
                 <a:ea typeface="+mn-ea"/>
                 <a:cs typeface="+mn-cs"/>
               </a:rPr>
-              <a:t>帮扶管理信息系统 v1.18.12</a:t>
+              <a:t>帮扶管理信息系统 v1.18.13</a:t>
             </a:r>
           </a:p>
         </p:txBody>
@@ -22256,7 +22256,7 @@
                 <a:ea typeface="+mn-ea"/>
                 <a:cs typeface="+mn-cs"/>
               </a:rPr>
-              <a:t>帮扶管理信息系统 v1.18.12</a:t>
+              <a:t>帮扶管理信息系统 v1.18.13</a:t>
             </a:r>
           </a:p>
         </p:txBody>
@@ -23353,7 +23353,7 @@
                 <a:ea typeface="+mn-ea"/>
                 <a:cs typeface="+mn-cs"/>
               </a:rPr>
-              <a:t>帮扶管理信息系统 v1.18.12</a:t>
+              <a:t>帮扶管理信息系统 v1.18.13</a:t>
             </a:r>
           </a:p>
         </p:txBody>
@@ -24428,7 +24428,7 @@
                 <a:ea typeface="+mn-ea"/>
                 <a:cs typeface="+mn-cs"/>
               </a:rPr>
-              <a:t>帮扶管理信息系统 v1.18.12</a:t>
+              <a:t>帮扶管理信息系统 v1.18.13</a:t>
             </a:r>
           </a:p>
         </p:txBody>
@@ -25989,7 +25989,7 @@
                 <a:ea typeface="+mn-ea"/>
                 <a:cs typeface="+mn-cs"/>
               </a:rPr>
-              <a:t>帮扶管理信息系统 v1.18.12</a:t>
+              <a:t>帮扶管理信息系统 v1.18.13</a:t>
             </a:r>
           </a:p>
         </p:txBody>
@@ -27420,7 +27420,7 @@
                 <a:ea typeface="+mn-ea"/>
                 <a:cs typeface="+mn-cs"/>
               </a:rPr>
-              <a:t>帮扶管理信息系统 v1.18.12</a:t>
+              <a:t>帮扶管理信息系统 v1.18.13</a:t>
             </a:r>
           </a:p>
         </p:txBody>
@@ -28415,7 +28415,7 @@
                 <a:ea typeface="+mn-ea"/>
                 <a:cs typeface="+mn-cs"/>
               </a:rPr>
-              <a:t>帮扶管理信息系统 v1.18.12</a:t>
+              <a:t>帮扶管理信息系统 v1.18.13</a:t>
             </a:r>
           </a:p>
         </p:txBody>
@@ -29854,7 +29854,7 @@
                 <a:ea typeface="+mn-ea"/>
                 <a:cs typeface="+mn-cs"/>
               </a:rPr>
-              <a:t>帮扶管理信息系统 v1.18.12</a:t>
+              <a:t>帮扶管理信息系统 v1.18.13</a:t>
             </a:r>
           </a:p>
         </p:txBody>
@@ -30733,7 +30733,7 @@
                 <a:ea typeface="+mn-ea"/>
                 <a:cs typeface="+mn-cs"/>
               </a:rPr>
-              <a:t>帮扶管理信息系统 v1.18.12</a:t>
+              <a:t>帮扶管理信息系统 v1.18.13</a:t>
             </a:r>
           </a:p>
         </p:txBody>
@@ -32314,7 +32314,7 @@
                 <a:ea typeface="+mn-ea"/>
                 <a:cs typeface="+mn-cs"/>
               </a:rPr>
-              <a:t>帮扶管理信息系统 v1.18.12</a:t>
+              <a:t>帮扶管理信息系统 v1.18.13</a:t>
             </a:r>
           </a:p>
         </p:txBody>
@@ -33207,7 +33207,7 @@
                 <a:ea typeface="+mn-ea"/>
                 <a:cs typeface="+mn-cs"/>
               </a:rPr>
-              <a:t>帮扶管理信息系统 v1.18.12</a:t>
+              <a:t>帮扶管理信息系统 v1.18.13</a:t>
             </a:r>
           </a:p>
         </p:txBody>
@@ -34132,7 +34132,7 @@
                 <a:ea typeface="+mn-ea"/>
                 <a:cs typeface="+mn-cs"/>
               </a:rPr>
-              <a:t>帮扶管理信息系统 v1.18.12</a:t>
+              <a:t>帮扶管理信息系统 v1.18.13</a:t>
             </a:r>
           </a:p>
         </p:txBody>
@@ -35323,7 +35323,7 @@
                 <a:ea typeface="+mn-ea"/>
                 <a:cs typeface="+mn-cs"/>
               </a:rPr>
-              <a:t>帮扶管理信息系统 v1.18.12</a:t>
+              <a:t>帮扶管理信息系统 v1.18.13</a:t>
             </a:r>
           </a:p>
         </p:txBody>
@@ -36488,7 +36488,7 @@
                 <a:ea typeface="+mn-ea"/>
                 <a:cs typeface="+mn-cs"/>
               </a:rPr>
-              <a:t>帮扶管理信息系统 v1.18.12</a:t>
+              <a:t>帮扶管理信息系统 v1.18.13</a:t>
             </a:r>
           </a:p>
         </p:txBody>
@@ -37799,7 +37799,7 @@
                 <a:ea typeface="+mn-ea"/>
                 <a:cs typeface="+mn-cs"/>
               </a:rPr>
-              <a:t>帮扶管理信息系统 v1.18.12</a:t>
+              <a:t>帮扶管理信息系统 v1.18.13</a:t>
             </a:r>
           </a:p>
         </p:txBody>
@@ -39422,7 +39422,7 @@
                 <a:ea typeface="+mn-ea"/>
                 <a:cs typeface="+mn-cs"/>
               </a:rPr>
-              <a:t>帮扶管理信息系统 v1.18.12</a:t>
+              <a:t>帮扶管理信息系统 v1.18.13</a:t>
             </a:r>
           </a:p>
         </p:txBody>
@@ -40853,7 +40853,7 @@
                 <a:ea typeface="+mn-ea"/>
                 <a:cs typeface="+mn-cs"/>
               </a:rPr>
-              <a:t>帮扶管理信息系统 v1.18.12</a:t>
+              <a:t>帮扶管理信息系统 v1.18.13</a:t>
             </a:r>
           </a:p>
         </p:txBody>
@@ -41342,7 +41342,7 @@
                 <a:ea typeface="+mn-ea"/>
                 <a:cs typeface="+mn-cs"/>
               </a:rPr>
-              <a:t>帮扶管理信息系统 v1.18.12</a:t>
+              <a:t>帮扶管理信息系统 v1.18.13</a:t>
             </a:r>
           </a:p>
         </p:txBody>
@@ -41659,7 +41659,7 @@
                 <a:ea typeface="+mn-ea"/>
                 <a:cs typeface="+mn-cs"/>
               </a:rPr>
-              <a:t>帮扶管理信息系统 v1.18.12 · 仓库：github.com/lzh745200/MRRS · 完整文档见 docs/ 目录</a:t>
+              <a:t>帮扶管理信息系统 v1.18.13 · 仓库：github.com/lzh745200/MRRS · 完整文档见 docs/ 目录</a:t>
             </a:r>
           </a:p>
         </p:txBody>
@@ -42450,7 +42450,7 @@
                 <a:ea typeface="+mn-ea"/>
                 <a:cs typeface="+mn-cs"/>
               </a:rPr>
-              <a:t>帮扶管理信息系统 v1.18.12</a:t>
+              <a:t>帮扶管理信息系统 v1.18.13</a:t>
             </a:r>
           </a:p>
         </p:txBody>
@@ -43925,7 +43925,7 @@
                 <a:ea typeface="+mn-ea"/>
                 <a:cs typeface="+mn-cs"/>
               </a:rPr>
-              <a:t>帮扶管理信息系统 v1.18.12</a:t>
+              <a:t>帮扶管理信息系统 v1.18.13</a:t>
             </a:r>
           </a:p>
         </p:txBody>
@@ -45018,7 +45018,7 @@
                 <a:ea typeface="+mn-ea"/>
                 <a:cs typeface="+mn-cs"/>
               </a:rPr>
-              <a:t>帮扶管理信息系统 v1.18.12</a:t>
+              <a:t>帮扶管理信息系统 v1.18.13</a:t>
             </a:r>
           </a:p>
         </p:txBody>
@@ -46111,7 +46111,7 @@
                 <a:ea typeface="+mn-ea"/>
                 <a:cs typeface="+mn-cs"/>
               </a:rPr>
-              <a:t>帮扶管理信息系统 v1.18.12</a:t>
+              <a:t>帮扶管理信息系统 v1.18.13</a:t>
             </a:r>
           </a:p>
         </p:txBody>
@@ -47420,7 +47420,7 @@
                 <a:ea typeface="+mn-ea"/>
                 <a:cs typeface="+mn-cs"/>
               </a:rPr>
-              <a:t>帮扶管理信息系统 v1.18.12</a:t>
+              <a:t>帮扶管理信息系统 v1.18.13</a:t>
             </a:r>
           </a:p>
         </p:txBody>

--- a/docs/帮扶管理信息系统介绍-零基础版.pptx
+++ b/docs/帮扶管理信息系统介绍-零基础版.pptx
@@ -3881,7 +3881,7 @@
                 <a:ea typeface="+mn-ea"/>
                 <a:cs typeface="+mn-cs"/>
               </a:rPr>
-              <a:t>V1.18.13 | 2026-10-26 | FastAPI + Vue 3 + Electron + SQLite</a:t>
+              <a:t>V1.18.14 | 2026-10-26 | FastAPI + Vue 3 + Electron + SQLite</a:t>
             </a:r>
           </a:p>
         </p:txBody>
@@ -4806,7 +4806,7 @@
                 <a:ea typeface="+mn-ea"/>
                 <a:cs typeface="+mn-cs"/>
               </a:rPr>
-              <a:t>帮扶管理信息系统 v1.18.13</a:t>
+              <a:t>帮扶管理信息系统 v1.18.14</a:t>
             </a:r>
           </a:p>
         </p:txBody>
@@ -6471,7 +6471,7 @@
                 <a:ea typeface="+mn-ea"/>
                 <a:cs typeface="+mn-cs"/>
               </a:rPr>
-              <a:t>帮扶管理信息系统 v1.18.13</a:t>
+              <a:t>帮扶管理信息系统 v1.18.14</a:t>
             </a:r>
           </a:p>
         </p:txBody>
@@ -7334,7 +7334,7 @@
                 <a:ea typeface="+mn-ea"/>
                 <a:cs typeface="+mn-cs"/>
               </a:rPr>
-              <a:t>帮扶管理信息系统 v1.18.13</a:t>
+              <a:t>帮扶管理信息系统 v1.18.14</a:t>
             </a:r>
           </a:p>
         </p:txBody>
@@ -8533,7 +8533,7 @@
                 <a:ea typeface="+mn-ea"/>
                 <a:cs typeface="+mn-cs"/>
               </a:rPr>
-              <a:t>帮扶管理信息系统 v1.18.13</a:t>
+              <a:t>帮扶管理信息系统 v1.18.14</a:t>
             </a:r>
           </a:p>
         </p:txBody>
@@ -10056,7 +10056,7 @@
                 <a:ea typeface="+mn-ea"/>
                 <a:cs typeface="+mn-cs"/>
               </a:rPr>
-              <a:t>帮扶管理信息系统 v1.18.13</a:t>
+              <a:t>帮扶管理信息系统 v1.18.14</a:t>
             </a:r>
           </a:p>
         </p:txBody>
@@ -11215,7 +11215,7 @@
                 <a:ea typeface="+mn-ea"/>
                 <a:cs typeface="+mn-cs"/>
               </a:rPr>
-              <a:t>帮扶管理信息系统 v1.18.13</a:t>
+              <a:t>帮扶管理信息系统 v1.18.14</a:t>
             </a:r>
           </a:p>
         </p:txBody>
@@ -12352,7 +12352,7 @@
                 <a:ea typeface="+mn-ea"/>
                 <a:cs typeface="+mn-cs"/>
               </a:rPr>
-              <a:t>帮扶管理信息系统 v1.18.13</a:t>
+              <a:t>帮扶管理信息系统 v1.18.14</a:t>
             </a:r>
           </a:p>
         </p:txBody>
@@ -13541,7 +13541,7 @@
                 <a:ea typeface="+mn-ea"/>
                 <a:cs typeface="+mn-cs"/>
               </a:rPr>
-              <a:t>帮扶管理信息系统 v1.18.13</a:t>
+              <a:t>帮扶管理信息系统 v1.18.14</a:t>
             </a:r>
           </a:p>
         </p:txBody>
@@ -14154,7 +14154,7 @@
                 <a:ea typeface="+mn-ea"/>
                 <a:cs typeface="+mn-cs"/>
               </a:rPr>
-              <a:t>帮扶管理信息系统 v1.18.13</a:t>
+              <a:t>帮扶管理信息系统 v1.18.14</a:t>
             </a:r>
           </a:p>
         </p:txBody>
@@ -15343,7 +15343,7 @@
                 <a:ea typeface="+mn-ea"/>
                 <a:cs typeface="+mn-cs"/>
               </a:rPr>
-              <a:t>帮扶管理信息系统 v1.18.13</a:t>
+              <a:t>帮扶管理信息系统 v1.18.14</a:t>
             </a:r>
           </a:p>
         </p:txBody>
@@ -16206,7 +16206,7 @@
                 <a:ea typeface="+mn-ea"/>
                 <a:cs typeface="+mn-cs"/>
               </a:rPr>
-              <a:t>帮扶管理信息系统 v1.18.13</a:t>
+              <a:t>帮扶管理信息系统 v1.18.14</a:t>
             </a:r>
           </a:p>
         </p:txBody>
@@ -17671,7 +17671,7 @@
                 <a:ea typeface="+mn-ea"/>
                 <a:cs typeface="+mn-cs"/>
               </a:rPr>
-              <a:t>帮扶管理信息系统 v1.18.13</a:t>
+              <a:t>帮扶管理信息系统 v1.18.14</a:t>
             </a:r>
           </a:p>
         </p:txBody>
@@ -18730,7 +18730,7 @@
                 <a:ea typeface="+mn-ea"/>
                 <a:cs typeface="+mn-cs"/>
               </a:rPr>
-              <a:t>帮扶管理信息系统 v1.18.13</a:t>
+              <a:t>帮扶管理信息系统 v1.18.14</a:t>
             </a:r>
           </a:p>
         </p:txBody>
@@ -19481,7 +19481,7 @@
                 <a:ea typeface="+mn-ea"/>
                 <a:cs typeface="+mn-cs"/>
               </a:rPr>
-              <a:t>帮扶管理信息系统 v1.18.13</a:t>
+              <a:t>帮扶管理信息系统 v1.18.14</a:t>
             </a:r>
           </a:p>
         </p:txBody>
@@ -20360,7 +20360,7 @@
                 <a:ea typeface="+mn-ea"/>
                 <a:cs typeface="+mn-cs"/>
               </a:rPr>
-              <a:t>帮扶管理信息系统 v1.18.13</a:t>
+              <a:t>帮扶管理信息系统 v1.18.14</a:t>
             </a:r>
           </a:p>
         </p:txBody>
@@ -21253,7 +21253,7 @@
                 <a:ea typeface="+mn-ea"/>
                 <a:cs typeface="+mn-cs"/>
               </a:rPr>
-              <a:t>帮扶管理信息系统 v1.18.13</a:t>
+              <a:t>帮扶管理信息系统 v1.18.14</a:t>
             </a:r>
           </a:p>
         </p:txBody>
@@ -22256,7 +22256,7 @@
                 <a:ea typeface="+mn-ea"/>
                 <a:cs typeface="+mn-cs"/>
               </a:rPr>
-              <a:t>帮扶管理信息系统 v1.18.13</a:t>
+              <a:t>帮扶管理信息系统 v1.18.14</a:t>
             </a:r>
           </a:p>
         </p:txBody>
@@ -23353,7 +23353,7 @@
                 <a:ea typeface="+mn-ea"/>
                 <a:cs typeface="+mn-cs"/>
               </a:rPr>
-              <a:t>帮扶管理信息系统 v1.18.13</a:t>
+              <a:t>帮扶管理信息系统 v1.18.14</a:t>
             </a:r>
           </a:p>
         </p:txBody>
@@ -24428,7 +24428,7 @@
                 <a:ea typeface="+mn-ea"/>
                 <a:cs typeface="+mn-cs"/>
               </a:rPr>
-              <a:t>帮扶管理信息系统 v1.18.13</a:t>
+              <a:t>帮扶管理信息系统 v1.18.14</a:t>
             </a:r>
           </a:p>
         </p:txBody>
@@ -25989,7 +25989,7 @@
                 <a:ea typeface="+mn-ea"/>
                 <a:cs typeface="+mn-cs"/>
               </a:rPr>
-              <a:t>帮扶管理信息系统 v1.18.13</a:t>
+              <a:t>帮扶管理信息系统 v1.18.14</a:t>
             </a:r>
           </a:p>
         </p:txBody>
@@ -27420,7 +27420,7 @@
                 <a:ea typeface="+mn-ea"/>
                 <a:cs typeface="+mn-cs"/>
               </a:rPr>
-              <a:t>帮扶管理信息系统 v1.18.13</a:t>
+              <a:t>帮扶管理信息系统 v1.18.14</a:t>
             </a:r>
           </a:p>
         </p:txBody>
@@ -28415,7 +28415,7 @@
                 <a:ea typeface="+mn-ea"/>
                 <a:cs typeface="+mn-cs"/>
               </a:rPr>
-              <a:t>帮扶管理信息系统 v1.18.13</a:t>
+              <a:t>帮扶管理信息系统 v1.18.14</a:t>
             </a:r>
           </a:p>
         </p:txBody>
@@ -29854,7 +29854,7 @@
                 <a:ea typeface="+mn-ea"/>
                 <a:cs typeface="+mn-cs"/>
               </a:rPr>
-              <a:t>帮扶管理信息系统 v1.18.13</a:t>
+              <a:t>帮扶管理信息系统 v1.18.14</a:t>
             </a:r>
           </a:p>
         </p:txBody>
@@ -30733,7 +30733,7 @@
                 <a:ea typeface="+mn-ea"/>
                 <a:cs typeface="+mn-cs"/>
               </a:rPr>
-              <a:t>帮扶管理信息系统 v1.18.13</a:t>
+              <a:t>帮扶管理信息系统 v1.18.14</a:t>
             </a:r>
           </a:p>
         </p:txBody>
@@ -32314,7 +32314,7 @@
                 <a:ea typeface="+mn-ea"/>
                 <a:cs typeface="+mn-cs"/>
               </a:rPr>
-              <a:t>帮扶管理信息系统 v1.18.13</a:t>
+              <a:t>帮扶管理信息系统 v1.18.14</a:t>
             </a:r>
           </a:p>
         </p:txBody>
@@ -33207,7 +33207,7 @@
                 <a:ea typeface="+mn-ea"/>
                 <a:cs typeface="+mn-cs"/>
               </a:rPr>
-              <a:t>帮扶管理信息系统 v1.18.13</a:t>
+              <a:t>帮扶管理信息系统 v1.18.14</a:t>
             </a:r>
           </a:p>
         </p:txBody>
@@ -34132,7 +34132,7 @@
                 <a:ea typeface="+mn-ea"/>
                 <a:cs typeface="+mn-cs"/>
               </a:rPr>
-              <a:t>帮扶管理信息系统 v1.18.13</a:t>
+              <a:t>帮扶管理信息系统 v1.18.14</a:t>
             </a:r>
           </a:p>
         </p:txBody>
@@ -35323,7 +35323,7 @@
                 <a:ea typeface="+mn-ea"/>
                 <a:cs typeface="+mn-cs"/>
               </a:rPr>
-              <a:t>帮扶管理信息系统 v1.18.13</a:t>
+              <a:t>帮扶管理信息系统 v1.18.14</a:t>
             </a:r>
           </a:p>
         </p:txBody>
@@ -36488,7 +36488,7 @@
                 <a:ea typeface="+mn-ea"/>
                 <a:cs typeface="+mn-cs"/>
               </a:rPr>
-              <a:t>帮扶管理信息系统 v1.18.13</a:t>
+              <a:t>帮扶管理信息系统 v1.18.14</a:t>
             </a:r>
           </a:p>
         </p:txBody>
@@ -37799,7 +37799,7 @@
                 <a:ea typeface="+mn-ea"/>
                 <a:cs typeface="+mn-cs"/>
               </a:rPr>
-              <a:t>帮扶管理信息系统 v1.18.13</a:t>
+              <a:t>帮扶管理信息系统 v1.18.14</a:t>
             </a:r>
           </a:p>
         </p:txBody>
@@ -39422,7 +39422,7 @@
                 <a:ea typeface="+mn-ea"/>
                 <a:cs typeface="+mn-cs"/>
               </a:rPr>
-              <a:t>帮扶管理信息系统 v1.18.13</a:t>
+              <a:t>帮扶管理信息系统 v1.18.14</a:t>
             </a:r>
           </a:p>
         </p:txBody>
@@ -40853,7 +40853,7 @@
                 <a:ea typeface="+mn-ea"/>
                 <a:cs typeface="+mn-cs"/>
               </a:rPr>
-              <a:t>帮扶管理信息系统 v1.18.13</a:t>
+              <a:t>帮扶管理信息系统 v1.18.14</a:t>
             </a:r>
           </a:p>
         </p:txBody>
@@ -41342,7 +41342,7 @@
                 <a:ea typeface="+mn-ea"/>
                 <a:cs typeface="+mn-cs"/>
               </a:rPr>
-              <a:t>帮扶管理信息系统 v1.18.13</a:t>
+              <a:t>帮扶管理信息系统 v1.18.14</a:t>
             </a:r>
           </a:p>
         </p:txBody>
@@ -41659,7 +41659,7 @@
                 <a:ea typeface="+mn-ea"/>
                 <a:cs typeface="+mn-cs"/>
               </a:rPr>
-              <a:t>帮扶管理信息系统 v1.18.13 · 仓库：github.com/lzh745200/MRRS · 完整文档见 docs/ 目录</a:t>
+              <a:t>帮扶管理信息系统 v1.18.14 · 仓库：github.com/lzh745200/MRRS · 完整文档见 docs/ 目录</a:t>
             </a:r>
           </a:p>
         </p:txBody>
@@ -42450,7 +42450,7 @@
                 <a:ea typeface="+mn-ea"/>
                 <a:cs typeface="+mn-cs"/>
               </a:rPr>
-              <a:t>帮扶管理信息系统 v1.18.13</a:t>
+              <a:t>帮扶管理信息系统 v1.18.14</a:t>
             </a:r>
           </a:p>
         </p:txBody>
@@ -43925,7 +43925,7 @@
                 <a:ea typeface="+mn-ea"/>
                 <a:cs typeface="+mn-cs"/>
               </a:rPr>
-              <a:t>帮扶管理信息系统 v1.18.13</a:t>
+              <a:t>帮扶管理信息系统 v1.18.14</a:t>
             </a:r>
           </a:p>
         </p:txBody>
@@ -45018,7 +45018,7 @@
                 <a:ea typeface="+mn-ea"/>
                 <a:cs typeface="+mn-cs"/>
               </a:rPr>
-              <a:t>帮扶管理信息系统 v1.18.13</a:t>
+              <a:t>帮扶管理信息系统 v1.18.14</a:t>
             </a:r>
           </a:p>
         </p:txBody>
@@ -46111,7 +46111,7 @@
                 <a:ea typeface="+mn-ea"/>
                 <a:cs typeface="+mn-cs"/>
               </a:rPr>
-              <a:t>帮扶管理信息系统 v1.18.13</a:t>
+              <a:t>帮扶管理信息系统 v1.18.14</a:t>
             </a:r>
           </a:p>
         </p:txBody>
@@ -47420,7 +47420,7 @@
                 <a:ea typeface="+mn-ea"/>
                 <a:cs typeface="+mn-cs"/>
               </a:rPr>
-              <a:t>帮扶管理信息系统 v1.18.13</a:t>
+              <a:t>帮扶管理信息系统 v1.18.14</a:t>
             </a:r>
           </a:p>
         </p:txBody>

--- a/docs/帮扶管理信息系统介绍-零基础版.pptx
+++ b/docs/帮扶管理信息系统介绍-零基础版.pptx
@@ -3881,7 +3881,7 @@
                 <a:ea typeface="+mn-ea"/>
                 <a:cs typeface="+mn-cs"/>
               </a:rPr>
-              <a:t>V1.18.14 | 2026-10-26 | FastAPI + Vue 3 + Electron + SQLite</a:t>
+              <a:t>V1.18.14 | 2026-10-27 | FastAPI + Vue 3 + Electron + SQLite</a:t>
             </a:r>
           </a:p>
         </p:txBody>
@@ -4209,6 +4209,10 @@
               <a:noFill/>
             </a:ln>
           </p:spPr>
+          <p:txBody>
+            <a:bodyPr/>
+            <a:p/>
+          </p:txBody>
         </p:sp>
         <p:sp>
           <p:nvSpPr>
@@ -4231,6 +4235,10 @@
               <a:noFill/>
             </a:ln>
           </p:spPr>
+          <p:txBody>
+            <a:bodyPr/>
+            <a:p/>
+          </p:txBody>
         </p:sp>
         <p:sp>
           <p:nvSpPr>
@@ -4293,6 +4301,10 @@
               <a:noFill/>
             </a:ln>
           </p:spPr>
+          <p:txBody>
+            <a:bodyPr/>
+            <a:p/>
+          </p:txBody>
         </p:sp>
         <p:sp>
           <p:nvSpPr>
@@ -4355,6 +4367,10 @@
               <a:noFill/>
             </a:ln>
           </p:spPr>
+          <p:txBody>
+            <a:bodyPr/>
+            <a:p/>
+          </p:txBody>
         </p:sp>
         <p:sp>
           <p:nvSpPr>
@@ -4417,6 +4433,10 @@
               <a:noFill/>
             </a:ln>
           </p:spPr>
+          <p:txBody>
+            <a:bodyPr/>
+            <a:p/>
+          </p:txBody>
         </p:sp>
         <p:sp>
           <p:nvSpPr>
@@ -4519,6 +4539,10 @@
               <a:noFill/>
             </a:ln>
           </p:spPr>
+          <p:txBody>
+            <a:bodyPr/>
+            <a:p/>
+          </p:txBody>
         </p:sp>
         <p:sp>
           <p:nvSpPr>
@@ -4541,6 +4565,10 @@
               <a:noFill/>
             </a:ln>
           </p:spPr>
+          <p:txBody>
+            <a:bodyPr/>
+            <a:p/>
+          </p:txBody>
         </p:sp>
         <p:sp>
           <p:nvSpPr>
@@ -4603,6 +4631,10 @@
               <a:noFill/>
             </a:ln>
           </p:spPr>
+          <p:txBody>
+            <a:bodyPr/>
+            <a:p/>
+          </p:txBody>
         </p:sp>
         <p:sp>
           <p:nvSpPr>
@@ -4665,6 +4697,10 @@
               <a:noFill/>
             </a:ln>
           </p:spPr>
+          <p:txBody>
+            <a:bodyPr/>
+            <a:p/>
+          </p:txBody>
         </p:sp>
         <p:sp>
           <p:nvSpPr>
@@ -4729,6 +4765,10 @@
               <a:noFill/>
             </a:ln>
           </p:spPr>
+          <p:txBody>
+            <a:bodyPr/>
+            <a:p/>
+          </p:txBody>
         </p:sp>
         <p:sp>
           <p:nvSpPr>
@@ -5093,6 +5133,10 @@
               <a:noFill/>
             </a:ln>
           </p:spPr>
+          <p:txBody>
+            <a:bodyPr/>
+            <a:p/>
+          </p:txBody>
         </p:sp>
         <p:sp>
           <p:nvSpPr>
@@ -5155,6 +5199,10 @@
               <a:noFill/>
             </a:ln>
           </p:spPr>
+          <p:txBody>
+            <a:bodyPr/>
+            <a:p/>
+          </p:txBody>
         </p:sp>
         <p:sp>
           <p:nvSpPr>
@@ -5217,6 +5265,10 @@
               <a:noFill/>
             </a:ln>
           </p:spPr>
+          <p:txBody>
+            <a:bodyPr/>
+            <a:p/>
+          </p:txBody>
         </p:sp>
         <p:sp>
           <p:nvSpPr>
@@ -5279,6 +5331,10 @@
               <a:noFill/>
             </a:ln>
           </p:spPr>
+          <p:txBody>
+            <a:bodyPr/>
+            <a:p/>
+          </p:txBody>
         </p:sp>
         <p:sp>
           <p:nvSpPr>
@@ -5355,6 +5411,10 @@
               </a:solidFill>
             </a:ln>
           </p:spPr>
+          <p:txBody>
+            <a:bodyPr/>
+            <a:p/>
+          </p:txBody>
         </p:sp>
       </p:grpSp>
       <p:sp>
@@ -5684,6 +5744,10 @@
               </a:solidFill>
             </a:ln>
           </p:spPr>
+          <p:txBody>
+            <a:bodyPr/>
+            <a:p/>
+          </p:txBody>
         </p:sp>
         <p:sp>
           <p:nvSpPr>
@@ -5750,6 +5814,10 @@
               </a:solidFill>
             </a:ln>
           </p:spPr>
+          <p:txBody>
+            <a:bodyPr/>
+            <a:p/>
+          </p:txBody>
         </p:sp>
         <p:sp>
           <p:nvSpPr>
@@ -5816,6 +5884,10 @@
               </a:solidFill>
             </a:ln>
           </p:spPr>
+          <p:txBody>
+            <a:bodyPr/>
+            <a:p/>
+          </p:txBody>
         </p:sp>
         <p:sp>
           <p:nvSpPr>
@@ -5882,6 +5954,10 @@
               </a:solidFill>
             </a:ln>
           </p:spPr>
+          <p:txBody>
+            <a:bodyPr/>
+            <a:p/>
+          </p:txBody>
         </p:sp>
         <p:sp>
           <p:nvSpPr>
@@ -5948,6 +6024,10 @@
               </a:solidFill>
             </a:ln>
           </p:spPr>
+          <p:txBody>
+            <a:bodyPr/>
+            <a:p/>
+          </p:txBody>
         </p:sp>
         <p:sp>
           <p:nvSpPr>
@@ -6014,6 +6094,10 @@
               </a:solidFill>
             </a:ln>
           </p:spPr>
+          <p:txBody>
+            <a:bodyPr/>
+            <a:p/>
+          </p:txBody>
         </p:sp>
         <p:sp>
           <p:nvSpPr>
@@ -6080,6 +6164,10 @@
               </a:solidFill>
             </a:ln>
           </p:spPr>
+          <p:txBody>
+            <a:bodyPr/>
+            <a:p/>
+          </p:txBody>
         </p:sp>
         <p:sp>
           <p:nvSpPr>
@@ -6146,6 +6234,10 @@
               </a:solidFill>
             </a:ln>
           </p:spPr>
+          <p:txBody>
+            <a:bodyPr/>
+            <a:p/>
+          </p:txBody>
         </p:sp>
         <p:sp>
           <p:nvSpPr>
@@ -6208,6 +6300,10 @@
               <a:noFill/>
             </a:ln>
           </p:spPr>
+          <p:txBody>
+            <a:bodyPr/>
+            <a:p/>
+          </p:txBody>
         </p:sp>
         <p:sp>
           <p:nvSpPr>
@@ -6270,6 +6366,10 @@
               <a:noFill/>
             </a:ln>
           </p:spPr>
+          <p:txBody>
+            <a:bodyPr/>
+            <a:p/>
+          </p:txBody>
         </p:sp>
         <p:sp>
           <p:nvSpPr>
@@ -6332,6 +6432,10 @@
               <a:noFill/>
             </a:ln>
           </p:spPr>
+          <p:txBody>
+            <a:bodyPr/>
+            <a:p/>
+          </p:txBody>
         </p:sp>
         <p:sp>
           <p:nvSpPr>
@@ -6394,6 +6498,10 @@
               <a:noFill/>
             </a:ln>
           </p:spPr>
+          <p:txBody>
+            <a:bodyPr/>
+            <a:p/>
+          </p:txBody>
         </p:sp>
         <p:sp>
           <p:nvSpPr>
@@ -6799,6 +6907,10 @@
               <a:noFill/>
             </a:ln>
           </p:spPr>
+          <p:txBody>
+            <a:bodyPr/>
+            <a:p/>
+          </p:txBody>
         </p:sp>
         <p:sp>
           <p:nvSpPr>
@@ -6821,6 +6933,10 @@
               <a:noFill/>
             </a:ln>
           </p:spPr>
+          <p:txBody>
+            <a:bodyPr/>
+            <a:p/>
+          </p:txBody>
         </p:sp>
         <p:sp>
           <p:nvSpPr>
@@ -6883,6 +6999,10 @@
               <a:noFill/>
             </a:ln>
           </p:spPr>
+          <p:txBody>
+            <a:bodyPr/>
+            <a:p/>
+          </p:txBody>
         </p:sp>
         <p:sp>
           <p:nvSpPr>
@@ -6945,6 +7065,10 @@
               <a:noFill/>
             </a:ln>
           </p:spPr>
+          <p:txBody>
+            <a:bodyPr/>
+            <a:p/>
+          </p:txBody>
         </p:sp>
         <p:sp>
           <p:nvSpPr>
@@ -7047,6 +7171,10 @@
               <a:noFill/>
             </a:ln>
           </p:spPr>
+          <p:txBody>
+            <a:bodyPr/>
+            <a:p/>
+          </p:txBody>
         </p:sp>
         <p:sp>
           <p:nvSpPr>
@@ -7069,6 +7197,10 @@
               <a:noFill/>
             </a:ln>
           </p:spPr>
+          <p:txBody>
+            <a:bodyPr/>
+            <a:p/>
+          </p:txBody>
         </p:sp>
         <p:sp>
           <p:nvSpPr>
@@ -7131,6 +7263,10 @@
               <a:noFill/>
             </a:ln>
           </p:spPr>
+          <p:txBody>
+            <a:bodyPr/>
+            <a:p/>
+          </p:txBody>
         </p:sp>
         <p:sp>
           <p:nvSpPr>
@@ -7193,6 +7329,10 @@
               <a:noFill/>
             </a:ln>
           </p:spPr>
+          <p:txBody>
+            <a:bodyPr/>
+            <a:p/>
+          </p:txBody>
         </p:sp>
         <p:sp>
           <p:nvSpPr>
@@ -7257,6 +7397,10 @@
               <a:noFill/>
             </a:ln>
           </p:spPr>
+          <p:txBody>
+            <a:bodyPr/>
+            <a:p/>
+          </p:txBody>
         </p:sp>
         <p:sp>
           <p:nvSpPr>
@@ -7636,6 +7780,10 @@
               </a:solidFill>
             </a:ln>
           </p:spPr>
+          <p:txBody>
+            <a:bodyPr/>
+            <a:p/>
+          </p:txBody>
         </p:sp>
         <p:sp>
           <p:nvSpPr>
@@ -7658,6 +7806,10 @@
               <a:noFill/>
             </a:ln>
           </p:spPr>
+          <p:txBody>
+            <a:bodyPr/>
+            <a:p/>
+          </p:txBody>
         </p:sp>
         <p:sp>
           <p:nvSpPr>
@@ -7760,6 +7912,10 @@
               <a:noFill/>
             </a:ln>
           </p:spPr>
+          <p:txBody>
+            <a:bodyPr/>
+            <a:p/>
+          </p:txBody>
         </p:sp>
         <p:sp>
           <p:nvSpPr>
@@ -7862,6 +8018,10 @@
               <a:noFill/>
             </a:ln>
           </p:spPr>
+          <p:txBody>
+            <a:bodyPr/>
+            <a:p/>
+          </p:txBody>
         </p:sp>
         <p:sp>
           <p:nvSpPr>
@@ -7964,6 +8124,10 @@
               <a:noFill/>
             </a:ln>
           </p:spPr>
+          <p:txBody>
+            <a:bodyPr/>
+            <a:p/>
+          </p:txBody>
         </p:sp>
         <p:sp>
           <p:nvSpPr>
@@ -8066,6 +8230,10 @@
               <a:noFill/>
             </a:ln>
           </p:spPr>
+          <p:txBody>
+            <a:bodyPr/>
+            <a:p/>
+          </p:txBody>
         </p:sp>
         <p:sp>
           <p:nvSpPr>
@@ -8168,6 +8336,10 @@
               <a:noFill/>
             </a:ln>
           </p:spPr>
+          <p:txBody>
+            <a:bodyPr/>
+            <a:p/>
+          </p:txBody>
         </p:sp>
         <p:sp>
           <p:nvSpPr>
@@ -8270,6 +8442,10 @@
               <a:noFill/>
             </a:ln>
           </p:spPr>
+          <p:txBody>
+            <a:bodyPr/>
+            <a:p/>
+          </p:txBody>
         </p:sp>
         <p:sp>
           <p:nvSpPr>
@@ -8332,6 +8508,10 @@
               <a:noFill/>
             </a:ln>
           </p:spPr>
+          <p:txBody>
+            <a:bodyPr/>
+            <a:p/>
+          </p:txBody>
         </p:sp>
         <p:sp>
           <p:nvSpPr>
@@ -8394,6 +8574,10 @@
               <a:noFill/>
             </a:ln>
           </p:spPr>
+          <p:txBody>
+            <a:bodyPr/>
+            <a:p/>
+          </p:txBody>
         </p:sp>
         <p:sp>
           <p:nvSpPr>
@@ -8456,6 +8640,10 @@
               <a:noFill/>
             </a:ln>
           </p:spPr>
+          <p:txBody>
+            <a:bodyPr/>
+            <a:p/>
+          </p:txBody>
         </p:sp>
         <p:sp>
           <p:nvSpPr>
@@ -8825,6 +9013,10 @@
               </a:solidFill>
             </a:ln>
           </p:spPr>
+          <p:txBody>
+            <a:bodyPr/>
+            <a:p/>
+          </p:txBody>
         </p:sp>
         <p:sp>
           <p:nvSpPr>
@@ -8931,6 +9123,10 @@
               </a:solidFill>
             </a:ln>
           </p:spPr>
+          <p:txBody>
+            <a:bodyPr/>
+            <a:p/>
+          </p:txBody>
         </p:sp>
         <p:sp>
           <p:nvSpPr>
@@ -9037,6 +9233,10 @@
               </a:solidFill>
             </a:ln>
           </p:spPr>
+          <p:txBody>
+            <a:bodyPr/>
+            <a:p/>
+          </p:txBody>
         </p:sp>
         <p:sp>
           <p:nvSpPr>
@@ -9143,6 +9343,10 @@
               </a:solidFill>
             </a:ln>
           </p:spPr>
+          <p:txBody>
+            <a:bodyPr/>
+            <a:p/>
+          </p:txBody>
         </p:sp>
         <p:sp>
           <p:nvSpPr>
@@ -9249,6 +9453,10 @@
               </a:solidFill>
             </a:ln>
           </p:spPr>
+          <p:txBody>
+            <a:bodyPr/>
+            <a:p/>
+          </p:txBody>
         </p:sp>
         <p:sp>
           <p:nvSpPr>
@@ -9355,6 +9563,10 @@
               </a:solidFill>
             </a:ln>
           </p:spPr>
+          <p:txBody>
+            <a:bodyPr/>
+            <a:p/>
+          </p:txBody>
         </p:sp>
         <p:sp>
           <p:nvSpPr>
@@ -9461,6 +9673,10 @@
               </a:solidFill>
             </a:ln>
           </p:spPr>
+          <p:txBody>
+            <a:bodyPr/>
+            <a:p/>
+          </p:txBody>
         </p:sp>
         <p:sp>
           <p:nvSpPr>
@@ -9567,6 +9783,10 @@
               </a:solidFill>
             </a:ln>
           </p:spPr>
+          <p:txBody>
+            <a:bodyPr/>
+            <a:p/>
+          </p:txBody>
         </p:sp>
         <p:sp>
           <p:nvSpPr>
@@ -9709,6 +9929,10 @@
               <a:noFill/>
             </a:ln>
           </p:spPr>
+          <p:txBody>
+            <a:bodyPr/>
+            <a:p/>
+          </p:txBody>
         </p:sp>
         <p:sp>
           <p:nvSpPr>
@@ -9731,6 +9955,10 @@
               <a:noFill/>
             </a:ln>
           </p:spPr>
+          <p:txBody>
+            <a:bodyPr/>
+            <a:p/>
+          </p:txBody>
         </p:sp>
         <p:sp>
           <p:nvSpPr>
@@ -9793,6 +10021,10 @@
               <a:noFill/>
             </a:ln>
           </p:spPr>
+          <p:txBody>
+            <a:bodyPr/>
+            <a:p/>
+          </p:txBody>
         </p:sp>
         <p:sp>
           <p:nvSpPr>
@@ -9895,6 +10127,10 @@
               <a:noFill/>
             </a:ln>
           </p:spPr>
+          <p:txBody>
+            <a:bodyPr/>
+            <a:p/>
+          </p:txBody>
         </p:sp>
         <p:sp>
           <p:nvSpPr>
@@ -9917,6 +10153,10 @@
               <a:noFill/>
             </a:ln>
           </p:spPr>
+          <p:txBody>
+            <a:bodyPr/>
+            <a:p/>
+          </p:txBody>
         </p:sp>
         <p:sp>
           <p:nvSpPr>
@@ -9979,6 +10219,10 @@
               <a:noFill/>
             </a:ln>
           </p:spPr>
+          <p:txBody>
+            <a:bodyPr/>
+            <a:p/>
+          </p:txBody>
         </p:sp>
         <p:sp>
           <p:nvSpPr>
@@ -10358,6 +10602,10 @@
               </a:solidFill>
             </a:ln>
           </p:spPr>
+          <p:txBody>
+            <a:bodyPr/>
+            <a:p/>
+          </p:txBody>
         </p:sp>
         <p:sp>
           <p:nvSpPr>
@@ -10380,6 +10628,10 @@
               <a:noFill/>
             </a:ln>
           </p:spPr>
+          <p:txBody>
+            <a:bodyPr/>
+            <a:p/>
+          </p:txBody>
         </p:sp>
         <p:sp>
           <p:nvSpPr>
@@ -10482,6 +10734,10 @@
               <a:noFill/>
             </a:ln>
           </p:spPr>
+          <p:txBody>
+            <a:bodyPr/>
+            <a:p/>
+          </p:txBody>
         </p:sp>
         <p:sp>
           <p:nvSpPr>
@@ -10584,6 +10840,10 @@
               <a:noFill/>
             </a:ln>
           </p:spPr>
+          <p:txBody>
+            <a:bodyPr/>
+            <a:p/>
+          </p:txBody>
         </p:sp>
         <p:sp>
           <p:nvSpPr>
@@ -10686,6 +10946,10 @@
               <a:noFill/>
             </a:ln>
           </p:spPr>
+          <p:txBody>
+            <a:bodyPr/>
+            <a:p/>
+          </p:txBody>
         </p:sp>
         <p:sp>
           <p:nvSpPr>
@@ -10788,6 +11052,10 @@
               <a:noFill/>
             </a:ln>
           </p:spPr>
+          <p:txBody>
+            <a:bodyPr/>
+            <a:p/>
+          </p:txBody>
         </p:sp>
         <p:sp>
           <p:nvSpPr>
@@ -10890,6 +11158,10 @@
               <a:noFill/>
             </a:ln>
           </p:spPr>
+          <p:txBody>
+            <a:bodyPr/>
+            <a:p/>
+          </p:txBody>
         </p:sp>
         <p:sp>
           <p:nvSpPr>
@@ -10952,6 +11224,10 @@
               <a:noFill/>
             </a:ln>
           </p:spPr>
+          <p:txBody>
+            <a:bodyPr/>
+            <a:p/>
+          </p:txBody>
         </p:sp>
         <p:sp>
           <p:nvSpPr>
@@ -11014,6 +11290,10 @@
               <a:noFill/>
             </a:ln>
           </p:spPr>
+          <p:txBody>
+            <a:bodyPr/>
+            <a:p/>
+          </p:txBody>
         </p:sp>
         <p:sp>
           <p:nvSpPr>
@@ -11076,6 +11356,10 @@
               <a:noFill/>
             </a:ln>
           </p:spPr>
+          <p:txBody>
+            <a:bodyPr/>
+            <a:p/>
+          </p:txBody>
         </p:sp>
         <p:sp>
           <p:nvSpPr>
@@ -11138,6 +11422,10 @@
               <a:noFill/>
             </a:ln>
           </p:spPr>
+          <p:txBody>
+            <a:bodyPr/>
+            <a:p/>
+          </p:txBody>
         </p:sp>
         <p:sp>
           <p:nvSpPr>
@@ -11517,6 +11805,10 @@
               </a:solidFill>
             </a:ln>
           </p:spPr>
+          <p:txBody>
+            <a:bodyPr/>
+            <a:p/>
+          </p:txBody>
         </p:sp>
         <p:sp>
           <p:nvSpPr>
@@ -11539,6 +11831,10 @@
               <a:noFill/>
             </a:ln>
           </p:spPr>
+          <p:txBody>
+            <a:bodyPr/>
+            <a:p/>
+          </p:txBody>
         </p:sp>
         <p:sp>
           <p:nvSpPr>
@@ -11641,6 +11937,10 @@
               <a:noFill/>
             </a:ln>
           </p:spPr>
+          <p:txBody>
+            <a:bodyPr/>
+            <a:p/>
+          </p:txBody>
         </p:sp>
         <p:sp>
           <p:nvSpPr>
@@ -11743,6 +12043,10 @@
               <a:noFill/>
             </a:ln>
           </p:spPr>
+          <p:txBody>
+            <a:bodyPr/>
+            <a:p/>
+          </p:txBody>
         </p:sp>
         <p:sp>
           <p:nvSpPr>
@@ -11845,6 +12149,10 @@
               <a:noFill/>
             </a:ln>
           </p:spPr>
+          <p:txBody>
+            <a:bodyPr/>
+            <a:p/>
+          </p:txBody>
         </p:sp>
         <p:sp>
           <p:nvSpPr>
@@ -11947,6 +12255,10 @@
               <a:noFill/>
             </a:ln>
           </p:spPr>
+          <p:txBody>
+            <a:bodyPr/>
+            <a:p/>
+          </p:txBody>
         </p:sp>
         <p:sp>
           <p:nvSpPr>
@@ -12049,6 +12361,10 @@
               <a:noFill/>
             </a:ln>
           </p:spPr>
+          <p:txBody>
+            <a:bodyPr/>
+            <a:p/>
+          </p:txBody>
         </p:sp>
         <p:sp>
           <p:nvSpPr>
@@ -12151,6 +12467,10 @@
               <a:noFill/>
             </a:ln>
           </p:spPr>
+          <p:txBody>
+            <a:bodyPr/>
+            <a:p/>
+          </p:txBody>
         </p:sp>
         <p:sp>
           <p:nvSpPr>
@@ -12213,6 +12533,10 @@
               <a:noFill/>
             </a:ln>
           </p:spPr>
+          <p:txBody>
+            <a:bodyPr/>
+            <a:p/>
+          </p:txBody>
         </p:sp>
         <p:sp>
           <p:nvSpPr>
@@ -12275,6 +12599,10 @@
               <a:noFill/>
             </a:ln>
           </p:spPr>
+          <p:txBody>
+            <a:bodyPr/>
+            <a:p/>
+          </p:txBody>
         </p:sp>
         <p:sp>
           <p:nvSpPr>
@@ -12644,6 +12972,10 @@
               </a:solidFill>
             </a:ln>
           </p:spPr>
+          <p:txBody>
+            <a:bodyPr/>
+            <a:p/>
+          </p:txBody>
         </p:sp>
         <p:sp>
           <p:nvSpPr>
@@ -12666,6 +12998,10 @@
               <a:noFill/>
             </a:ln>
           </p:spPr>
+          <p:txBody>
+            <a:bodyPr/>
+            <a:p/>
+          </p:txBody>
         </p:sp>
         <p:sp>
           <p:nvSpPr>
@@ -12728,6 +13064,10 @@
               <a:noFill/>
             </a:ln>
           </p:spPr>
+          <p:txBody>
+            <a:bodyPr/>
+            <a:p/>
+          </p:txBody>
         </p:sp>
         <p:sp>
           <p:nvSpPr>
@@ -12790,6 +13130,10 @@
               <a:noFill/>
             </a:ln>
           </p:spPr>
+          <p:txBody>
+            <a:bodyPr/>
+            <a:p/>
+          </p:txBody>
         </p:sp>
         <p:sp>
           <p:nvSpPr>
@@ -12852,6 +13196,10 @@
               <a:noFill/>
             </a:ln>
           </p:spPr>
+          <p:txBody>
+            <a:bodyPr/>
+            <a:p/>
+          </p:txBody>
         </p:sp>
         <p:sp>
           <p:nvSpPr>
@@ -12918,6 +13266,10 @@
               </a:solidFill>
             </a:ln>
           </p:spPr>
+          <p:txBody>
+            <a:bodyPr/>
+            <a:p/>
+          </p:txBody>
         </p:sp>
         <p:sp>
           <p:nvSpPr>
@@ -12940,6 +13292,10 @@
               <a:noFill/>
             </a:ln>
           </p:spPr>
+          <p:txBody>
+            <a:bodyPr/>
+            <a:p/>
+          </p:txBody>
         </p:sp>
         <p:sp>
           <p:nvSpPr>
@@ -13002,6 +13358,10 @@
               <a:noFill/>
             </a:ln>
           </p:spPr>
+          <p:txBody>
+            <a:bodyPr/>
+            <a:p/>
+          </p:txBody>
         </p:sp>
         <p:sp>
           <p:nvSpPr>
@@ -13064,6 +13424,10 @@
               <a:noFill/>
             </a:ln>
           </p:spPr>
+          <p:txBody>
+            <a:bodyPr/>
+            <a:p/>
+          </p:txBody>
         </p:sp>
         <p:sp>
           <p:nvSpPr>
@@ -13126,6 +13490,10 @@
               <a:noFill/>
             </a:ln>
           </p:spPr>
+          <p:txBody>
+            <a:bodyPr/>
+            <a:p/>
+          </p:txBody>
         </p:sp>
         <p:sp>
           <p:nvSpPr>
@@ -13192,6 +13560,10 @@
               </a:solidFill>
             </a:ln>
           </p:spPr>
+          <p:txBody>
+            <a:bodyPr/>
+            <a:p/>
+          </p:txBody>
         </p:sp>
         <p:sp>
           <p:nvSpPr>
@@ -13214,6 +13586,10 @@
               <a:noFill/>
             </a:ln>
           </p:spPr>
+          <p:txBody>
+            <a:bodyPr/>
+            <a:p/>
+          </p:txBody>
         </p:sp>
         <p:sp>
           <p:nvSpPr>
@@ -13276,6 +13652,10 @@
               <a:noFill/>
             </a:ln>
           </p:spPr>
+          <p:txBody>
+            <a:bodyPr/>
+            <a:p/>
+          </p:txBody>
         </p:sp>
         <p:sp>
           <p:nvSpPr>
@@ -13338,6 +13718,10 @@
               <a:noFill/>
             </a:ln>
           </p:spPr>
+          <p:txBody>
+            <a:bodyPr/>
+            <a:p/>
+          </p:txBody>
         </p:sp>
         <p:sp>
           <p:nvSpPr>
@@ -13400,6 +13784,10 @@
               <a:noFill/>
             </a:ln>
           </p:spPr>
+          <p:txBody>
+            <a:bodyPr/>
+            <a:p/>
+          </p:txBody>
         </p:sp>
         <p:sp>
           <p:nvSpPr>
@@ -13464,6 +13852,10 @@
               <a:noFill/>
             </a:ln>
           </p:spPr>
+          <p:txBody>
+            <a:bodyPr/>
+            <a:p/>
+          </p:txBody>
         </p:sp>
         <p:sp>
           <p:nvSpPr>
@@ -13829,6 +14221,10 @@
               <a:noFill/>
             </a:ln>
           </p:spPr>
+          <p:txBody>
+            <a:bodyPr/>
+            <a:p/>
+          </p:txBody>
         </p:sp>
         <p:sp>
           <p:nvSpPr>
@@ -13891,6 +14287,10 @@
               <a:noFill/>
             </a:ln>
           </p:spPr>
+          <p:txBody>
+            <a:bodyPr/>
+            <a:p/>
+          </p:txBody>
         </p:sp>
         <p:sp>
           <p:nvSpPr>
@@ -13953,6 +14353,10 @@
               <a:noFill/>
             </a:ln>
           </p:spPr>
+          <p:txBody>
+            <a:bodyPr/>
+            <a:p/>
+          </p:txBody>
         </p:sp>
         <p:sp>
           <p:nvSpPr>
@@ -14015,6 +14419,10 @@
               <a:noFill/>
             </a:ln>
           </p:spPr>
+          <p:txBody>
+            <a:bodyPr/>
+            <a:p/>
+          </p:txBody>
         </p:sp>
         <p:sp>
           <p:nvSpPr>
@@ -14077,6 +14485,10 @@
               <a:noFill/>
             </a:ln>
           </p:spPr>
+          <p:txBody>
+            <a:bodyPr/>
+            <a:p/>
+          </p:txBody>
         </p:sp>
         <p:sp>
           <p:nvSpPr>
@@ -14562,6 +14974,10 @@
               </a:solidFill>
             </a:ln>
           </p:spPr>
+          <p:txBody>
+            <a:bodyPr/>
+            <a:p/>
+          </p:txBody>
         </p:sp>
         <p:sp>
           <p:nvSpPr>
@@ -14718,6 +15134,10 @@
               </a:solidFill>
             </a:ln>
           </p:spPr>
+          <p:txBody>
+            <a:bodyPr/>
+            <a:p/>
+          </p:txBody>
         </p:sp>
         <p:sp>
           <p:nvSpPr>
@@ -14874,6 +15294,10 @@
               </a:solidFill>
             </a:ln>
           </p:spPr>
+          <p:txBody>
+            <a:bodyPr/>
+            <a:p/>
+          </p:txBody>
         </p:sp>
         <p:sp>
           <p:nvSpPr>
@@ -15030,6 +15454,10 @@
               </a:solidFill>
             </a:ln>
           </p:spPr>
+          <p:txBody>
+            <a:bodyPr/>
+            <a:p/>
+          </p:txBody>
         </p:sp>
         <p:sp>
           <p:nvSpPr>
@@ -15186,6 +15614,10 @@
               </a:solidFill>
             </a:ln>
           </p:spPr>
+          <p:txBody>
+            <a:bodyPr/>
+            <a:p/>
+          </p:txBody>
         </p:sp>
         <p:sp>
           <p:nvSpPr>
@@ -15671,6 +16103,10 @@
               <a:noFill/>
             </a:ln>
           </p:spPr>
+          <p:txBody>
+            <a:bodyPr/>
+            <a:p/>
+          </p:txBody>
         </p:sp>
         <p:sp>
           <p:nvSpPr>
@@ -15693,6 +16129,10 @@
               <a:noFill/>
             </a:ln>
           </p:spPr>
+          <p:txBody>
+            <a:bodyPr/>
+            <a:p/>
+          </p:txBody>
         </p:sp>
         <p:sp>
           <p:nvSpPr>
@@ -15755,6 +16195,10 @@
               <a:noFill/>
             </a:ln>
           </p:spPr>
+          <p:txBody>
+            <a:bodyPr/>
+            <a:p/>
+          </p:txBody>
         </p:sp>
         <p:sp>
           <p:nvSpPr>
@@ -15817,6 +16261,10 @@
               <a:noFill/>
             </a:ln>
           </p:spPr>
+          <p:txBody>
+            <a:bodyPr/>
+            <a:p/>
+          </p:txBody>
         </p:sp>
         <p:sp>
           <p:nvSpPr>
@@ -15919,6 +16367,10 @@
               <a:noFill/>
             </a:ln>
           </p:spPr>
+          <p:txBody>
+            <a:bodyPr/>
+            <a:p/>
+          </p:txBody>
         </p:sp>
         <p:sp>
           <p:nvSpPr>
@@ -15941,6 +16393,10 @@
               <a:noFill/>
             </a:ln>
           </p:spPr>
+          <p:txBody>
+            <a:bodyPr/>
+            <a:p/>
+          </p:txBody>
         </p:sp>
         <p:sp>
           <p:nvSpPr>
@@ -16003,6 +16459,10 @@
               <a:noFill/>
             </a:ln>
           </p:spPr>
+          <p:txBody>
+            <a:bodyPr/>
+            <a:p/>
+          </p:txBody>
         </p:sp>
         <p:sp>
           <p:nvSpPr>
@@ -16065,6 +16525,10 @@
               <a:noFill/>
             </a:ln>
           </p:spPr>
+          <p:txBody>
+            <a:bodyPr/>
+            <a:p/>
+          </p:txBody>
         </p:sp>
         <p:sp>
           <p:nvSpPr>
@@ -16129,6 +16593,10 @@
               <a:noFill/>
             </a:ln>
           </p:spPr>
+          <p:txBody>
+            <a:bodyPr/>
+            <a:p/>
+          </p:txBody>
         </p:sp>
         <p:sp>
           <p:nvSpPr>
@@ -16493,6 +16961,10 @@
               <a:noFill/>
             </a:ln>
           </p:spPr>
+          <p:txBody>
+            <a:bodyPr/>
+            <a:p/>
+          </p:txBody>
         </p:sp>
         <p:sp>
           <p:nvSpPr>
@@ -16555,6 +17027,10 @@
               <a:noFill/>
             </a:ln>
           </p:spPr>
+          <p:txBody>
+            <a:bodyPr/>
+            <a:p/>
+          </p:txBody>
         </p:sp>
         <p:sp>
           <p:nvSpPr>
@@ -16617,6 +17093,10 @@
               <a:noFill/>
             </a:ln>
           </p:spPr>
+          <p:txBody>
+            <a:bodyPr/>
+            <a:p/>
+          </p:txBody>
         </p:sp>
         <p:sp>
           <p:nvSpPr>
@@ -16679,6 +17159,10 @@
               <a:noFill/>
             </a:ln>
           </p:spPr>
+          <p:txBody>
+            <a:bodyPr/>
+            <a:p/>
+          </p:txBody>
         </p:sp>
         <p:sp>
           <p:nvSpPr>
@@ -16755,6 +17239,10 @@
               </a:solidFill>
             </a:ln>
           </p:spPr>
+          <p:txBody>
+            <a:bodyPr/>
+            <a:p/>
+          </p:txBody>
         </p:sp>
       </p:grpSp>
       <p:sp>
@@ -17084,6 +17572,10 @@
               </a:solidFill>
             </a:ln>
           </p:spPr>
+          <p:txBody>
+            <a:bodyPr/>
+            <a:p/>
+          </p:txBody>
         </p:sp>
         <p:sp>
           <p:nvSpPr>
@@ -17106,6 +17598,10 @@
               <a:noFill/>
             </a:ln>
           </p:spPr>
+          <p:txBody>
+            <a:bodyPr/>
+            <a:p/>
+          </p:txBody>
         </p:sp>
         <p:sp>
           <p:nvSpPr>
@@ -17212,6 +17708,10 @@
               </a:solidFill>
             </a:ln>
           </p:spPr>
+          <p:txBody>
+            <a:bodyPr/>
+            <a:p/>
+          </p:txBody>
         </p:sp>
         <p:sp>
           <p:nvSpPr>
@@ -17234,6 +17734,10 @@
               <a:noFill/>
             </a:ln>
           </p:spPr>
+          <p:txBody>
+            <a:bodyPr/>
+            <a:p/>
+          </p:txBody>
         </p:sp>
         <p:sp>
           <p:nvSpPr>
@@ -17340,6 +17844,10 @@
               </a:solidFill>
             </a:ln>
           </p:spPr>
+          <p:txBody>
+            <a:bodyPr/>
+            <a:p/>
+          </p:txBody>
         </p:sp>
         <p:sp>
           <p:nvSpPr>
@@ -17362,6 +17870,10 @@
               <a:noFill/>
             </a:ln>
           </p:spPr>
+          <p:txBody>
+            <a:bodyPr/>
+            <a:p/>
+          </p:txBody>
         </p:sp>
         <p:sp>
           <p:nvSpPr>
@@ -17468,6 +17980,10 @@
               </a:solidFill>
             </a:ln>
           </p:spPr>
+          <p:txBody>
+            <a:bodyPr/>
+            <a:p/>
+          </p:txBody>
         </p:sp>
         <p:sp>
           <p:nvSpPr>
@@ -17490,6 +18006,10 @@
               <a:noFill/>
             </a:ln>
           </p:spPr>
+          <p:txBody>
+            <a:bodyPr/>
+            <a:p/>
+          </p:txBody>
         </p:sp>
         <p:sp>
           <p:nvSpPr>
@@ -17594,6 +18114,10 @@
               <a:noFill/>
             </a:ln>
           </p:spPr>
+          <p:txBody>
+            <a:bodyPr/>
+            <a:p/>
+          </p:txBody>
         </p:sp>
         <p:sp>
           <p:nvSpPr>
@@ -17963,6 +18487,10 @@
               </a:solidFill>
             </a:ln>
           </p:spPr>
+          <p:txBody>
+            <a:bodyPr/>
+            <a:p/>
+          </p:txBody>
         </p:sp>
         <p:sp>
           <p:nvSpPr>
@@ -17985,6 +18513,10 @@
               <a:noFill/>
             </a:ln>
           </p:spPr>
+          <p:txBody>
+            <a:bodyPr/>
+            <a:p/>
+          </p:txBody>
         </p:sp>
         <p:sp>
           <p:nvSpPr>
@@ -18087,6 +18619,10 @@
               <a:noFill/>
             </a:ln>
           </p:spPr>
+          <p:txBody>
+            <a:bodyPr/>
+            <a:p/>
+          </p:txBody>
         </p:sp>
         <p:sp>
           <p:nvSpPr>
@@ -18153,6 +18689,10 @@
               </a:solidFill>
             </a:ln>
           </p:spPr>
+          <p:txBody>
+            <a:bodyPr/>
+            <a:p/>
+          </p:txBody>
         </p:sp>
         <p:sp>
           <p:nvSpPr>
@@ -18175,6 +18715,10 @@
               <a:noFill/>
             </a:ln>
           </p:spPr>
+          <p:txBody>
+            <a:bodyPr/>
+            <a:p/>
+          </p:txBody>
         </p:sp>
         <p:sp>
           <p:nvSpPr>
@@ -18277,6 +18821,10 @@
               <a:noFill/>
             </a:ln>
           </p:spPr>
+          <p:txBody>
+            <a:bodyPr/>
+            <a:p/>
+          </p:txBody>
         </p:sp>
         <p:sp>
           <p:nvSpPr>
@@ -18343,6 +18891,10 @@
               </a:solidFill>
             </a:ln>
           </p:spPr>
+          <p:txBody>
+            <a:bodyPr/>
+            <a:p/>
+          </p:txBody>
         </p:sp>
         <p:sp>
           <p:nvSpPr>
@@ -18365,6 +18917,10 @@
               <a:noFill/>
             </a:ln>
           </p:spPr>
+          <p:txBody>
+            <a:bodyPr/>
+            <a:p/>
+          </p:txBody>
         </p:sp>
         <p:sp>
           <p:nvSpPr>
@@ -18467,6 +19023,10 @@
               <a:noFill/>
             </a:ln>
           </p:spPr>
+          <p:txBody>
+            <a:bodyPr/>
+            <a:p/>
+          </p:txBody>
         </p:sp>
         <p:sp>
           <p:nvSpPr>
@@ -18529,6 +19089,10 @@
               <a:noFill/>
             </a:ln>
           </p:spPr>
+          <p:txBody>
+            <a:bodyPr/>
+            <a:p/>
+          </p:txBody>
         </p:sp>
         <p:sp>
           <p:nvSpPr>
@@ -18591,6 +19155,10 @@
               <a:noFill/>
             </a:ln>
           </p:spPr>
+          <p:txBody>
+            <a:bodyPr/>
+            <a:p/>
+          </p:txBody>
         </p:sp>
         <p:sp>
           <p:nvSpPr>
@@ -18653,6 +19221,10 @@
               <a:noFill/>
             </a:ln>
           </p:spPr>
+          <p:txBody>
+            <a:bodyPr/>
+            <a:p/>
+          </p:txBody>
         </p:sp>
         <p:sp>
           <p:nvSpPr>
@@ -19022,6 +19594,10 @@
               </a:solidFill>
             </a:ln>
           </p:spPr>
+          <p:txBody>
+            <a:bodyPr/>
+            <a:p/>
+          </p:txBody>
         </p:sp>
         <p:sp>
           <p:nvSpPr>
@@ -19044,6 +19620,10 @@
               <a:noFill/>
             </a:ln>
           </p:spPr>
+          <p:txBody>
+            <a:bodyPr/>
+            <a:p/>
+          </p:txBody>
         </p:sp>
         <p:sp>
           <p:nvSpPr>
@@ -19150,6 +19730,10 @@
               </a:solidFill>
             </a:ln>
           </p:spPr>
+          <p:txBody>
+            <a:bodyPr/>
+            <a:p/>
+          </p:txBody>
         </p:sp>
         <p:sp>
           <p:nvSpPr>
@@ -19172,6 +19756,10 @@
               <a:noFill/>
             </a:ln>
           </p:spPr>
+          <p:txBody>
+            <a:bodyPr/>
+            <a:p/>
+          </p:txBody>
         </p:sp>
         <p:sp>
           <p:nvSpPr>
@@ -19278,6 +19866,10 @@
               </a:solidFill>
             </a:ln>
           </p:spPr>
+          <p:txBody>
+            <a:bodyPr/>
+            <a:p/>
+          </p:txBody>
         </p:sp>
         <p:sp>
           <p:nvSpPr>
@@ -19300,6 +19892,10 @@
               <a:noFill/>
             </a:ln>
           </p:spPr>
+          <p:txBody>
+            <a:bodyPr/>
+            <a:p/>
+          </p:txBody>
         </p:sp>
         <p:sp>
           <p:nvSpPr>
@@ -19404,6 +20000,10 @@
               <a:noFill/>
             </a:ln>
           </p:spPr>
+          <p:txBody>
+            <a:bodyPr/>
+            <a:p/>
+          </p:txBody>
         </p:sp>
         <p:sp>
           <p:nvSpPr>
@@ -19773,6 +20373,10 @@
               </a:solidFill>
             </a:ln>
           </p:spPr>
+          <p:txBody>
+            <a:bodyPr/>
+            <a:p/>
+          </p:txBody>
         </p:sp>
         <p:sp>
           <p:nvSpPr>
@@ -19795,6 +20399,10 @@
               <a:noFill/>
             </a:ln>
           </p:spPr>
+          <p:txBody>
+            <a:bodyPr/>
+            <a:p/>
+          </p:txBody>
         </p:sp>
         <p:sp>
           <p:nvSpPr>
@@ -19901,6 +20509,10 @@
               </a:solidFill>
             </a:ln>
           </p:spPr>
+          <p:txBody>
+            <a:bodyPr/>
+            <a:p/>
+          </p:txBody>
         </p:sp>
         <p:sp>
           <p:nvSpPr>
@@ -19923,6 +20535,10 @@
               <a:noFill/>
             </a:ln>
           </p:spPr>
+          <p:txBody>
+            <a:bodyPr/>
+            <a:p/>
+          </p:txBody>
         </p:sp>
         <p:sp>
           <p:nvSpPr>
@@ -20029,6 +20645,10 @@
               </a:solidFill>
             </a:ln>
           </p:spPr>
+          <p:txBody>
+            <a:bodyPr/>
+            <a:p/>
+          </p:txBody>
         </p:sp>
         <p:sp>
           <p:nvSpPr>
@@ -20051,6 +20671,10 @@
               <a:noFill/>
             </a:ln>
           </p:spPr>
+          <p:txBody>
+            <a:bodyPr/>
+            <a:p/>
+          </p:txBody>
         </p:sp>
         <p:sp>
           <p:nvSpPr>
@@ -20157,6 +20781,10 @@
               </a:solidFill>
             </a:ln>
           </p:spPr>
+          <p:txBody>
+            <a:bodyPr/>
+            <a:p/>
+          </p:txBody>
         </p:sp>
         <p:sp>
           <p:nvSpPr>
@@ -20179,6 +20807,10 @@
               <a:noFill/>
             </a:ln>
           </p:spPr>
+          <p:txBody>
+            <a:bodyPr/>
+            <a:p/>
+          </p:txBody>
         </p:sp>
         <p:sp>
           <p:nvSpPr>
@@ -20283,6 +20915,10 @@
               <a:noFill/>
             </a:ln>
           </p:spPr>
+          <p:txBody>
+            <a:bodyPr/>
+            <a:p/>
+          </p:txBody>
         </p:sp>
         <p:sp>
           <p:nvSpPr>
@@ -20662,6 +21298,10 @@
               </a:solidFill>
             </a:ln>
           </p:spPr>
+          <p:txBody>
+            <a:bodyPr/>
+            <a:p/>
+          </p:txBody>
         </p:sp>
         <p:sp>
           <p:nvSpPr>
@@ -20684,6 +21324,10 @@
               <a:noFill/>
             </a:ln>
           </p:spPr>
+          <p:txBody>
+            <a:bodyPr/>
+            <a:p/>
+          </p:txBody>
         </p:sp>
         <p:sp>
           <p:nvSpPr>
@@ -20786,6 +21430,10 @@
               <a:noFill/>
             </a:ln>
           </p:spPr>
+          <p:txBody>
+            <a:bodyPr/>
+            <a:p/>
+          </p:txBody>
         </p:sp>
         <p:sp>
           <p:nvSpPr>
@@ -20888,6 +21536,10 @@
               <a:noFill/>
             </a:ln>
           </p:spPr>
+          <p:txBody>
+            <a:bodyPr/>
+            <a:p/>
+          </p:txBody>
         </p:sp>
         <p:sp>
           <p:nvSpPr>
@@ -20990,6 +21642,10 @@
               <a:noFill/>
             </a:ln>
           </p:spPr>
+          <p:txBody>
+            <a:bodyPr/>
+            <a:p/>
+          </p:txBody>
         </p:sp>
         <p:sp>
           <p:nvSpPr>
@@ -21052,6 +21708,10 @@
               <a:noFill/>
             </a:ln>
           </p:spPr>
+          <p:txBody>
+            <a:bodyPr/>
+            <a:p/>
+          </p:txBody>
         </p:sp>
         <p:sp>
           <p:nvSpPr>
@@ -21114,6 +21774,10 @@
               <a:noFill/>
             </a:ln>
           </p:spPr>
+          <p:txBody>
+            <a:bodyPr/>
+            <a:p/>
+          </p:txBody>
         </p:sp>
         <p:sp>
           <p:nvSpPr>
@@ -21176,6 +21840,10 @@
               <a:noFill/>
             </a:ln>
           </p:spPr>
+          <p:txBody>
+            <a:bodyPr/>
+            <a:p/>
+          </p:txBody>
         </p:sp>
         <p:sp>
           <p:nvSpPr>
@@ -21545,6 +22213,10 @@
               </a:solidFill>
             </a:ln>
           </p:spPr>
+          <p:txBody>
+            <a:bodyPr/>
+            <a:p/>
+          </p:txBody>
         </p:sp>
         <p:sp>
           <p:nvSpPr>
@@ -21567,6 +22239,10 @@
               <a:noFill/>
             </a:ln>
           </p:spPr>
+          <p:txBody>
+            <a:bodyPr/>
+            <a:p/>
+          </p:txBody>
         </p:sp>
         <p:sp>
           <p:nvSpPr>
@@ -21629,6 +22305,10 @@
               <a:noFill/>
             </a:ln>
           </p:spPr>
+          <p:txBody>
+            <a:bodyPr/>
+            <a:p/>
+          </p:txBody>
         </p:sp>
         <p:sp>
           <p:nvSpPr>
@@ -21691,6 +22371,10 @@
               <a:noFill/>
             </a:ln>
           </p:spPr>
+          <p:txBody>
+            <a:bodyPr/>
+            <a:p/>
+          </p:txBody>
         </p:sp>
         <p:sp>
           <p:nvSpPr>
@@ -21757,6 +22441,10 @@
               </a:solidFill>
             </a:ln>
           </p:spPr>
+          <p:txBody>
+            <a:bodyPr/>
+            <a:p/>
+          </p:txBody>
         </p:sp>
         <p:sp>
           <p:nvSpPr>
@@ -21779,6 +22467,10 @@
               <a:noFill/>
             </a:ln>
           </p:spPr>
+          <p:txBody>
+            <a:bodyPr/>
+            <a:p/>
+          </p:txBody>
         </p:sp>
         <p:sp>
           <p:nvSpPr>
@@ -21841,6 +22533,10 @@
               <a:noFill/>
             </a:ln>
           </p:spPr>
+          <p:txBody>
+            <a:bodyPr/>
+            <a:p/>
+          </p:txBody>
         </p:sp>
         <p:sp>
           <p:nvSpPr>
@@ -21903,6 +22599,10 @@
               <a:noFill/>
             </a:ln>
           </p:spPr>
+          <p:txBody>
+            <a:bodyPr/>
+            <a:p/>
+          </p:txBody>
         </p:sp>
         <p:sp>
           <p:nvSpPr>
@@ -21969,6 +22669,10 @@
               </a:solidFill>
             </a:ln>
           </p:spPr>
+          <p:txBody>
+            <a:bodyPr/>
+            <a:p/>
+          </p:txBody>
         </p:sp>
         <p:sp>
           <p:nvSpPr>
@@ -21991,6 +22695,10 @@
               <a:noFill/>
             </a:ln>
           </p:spPr>
+          <p:txBody>
+            <a:bodyPr/>
+            <a:p/>
+          </p:txBody>
         </p:sp>
         <p:sp>
           <p:nvSpPr>
@@ -22053,6 +22761,10 @@
               <a:noFill/>
             </a:ln>
           </p:spPr>
+          <p:txBody>
+            <a:bodyPr/>
+            <a:p/>
+          </p:txBody>
         </p:sp>
         <p:sp>
           <p:nvSpPr>
@@ -22115,6 +22827,10 @@
               <a:noFill/>
             </a:ln>
           </p:spPr>
+          <p:txBody>
+            <a:bodyPr/>
+            <a:p/>
+          </p:txBody>
         </p:sp>
         <p:sp>
           <p:nvSpPr>
@@ -22179,6 +22895,10 @@
               <a:noFill/>
             </a:ln>
           </p:spPr>
+          <p:txBody>
+            <a:bodyPr/>
+            <a:p/>
+          </p:txBody>
         </p:sp>
         <p:sp>
           <p:nvSpPr>
@@ -22558,6 +23278,10 @@
               </a:solidFill>
             </a:ln>
           </p:spPr>
+          <p:txBody>
+            <a:bodyPr/>
+            <a:p/>
+          </p:txBody>
         </p:sp>
         <p:sp>
           <p:nvSpPr>
@@ -22580,6 +23304,10 @@
               <a:noFill/>
             </a:ln>
           </p:spPr>
+          <p:txBody>
+            <a:bodyPr/>
+            <a:p/>
+          </p:txBody>
         </p:sp>
         <p:sp>
           <p:nvSpPr>
@@ -22682,6 +23410,10 @@
               <a:noFill/>
             </a:ln>
           </p:spPr>
+          <p:txBody>
+            <a:bodyPr/>
+            <a:p/>
+          </p:txBody>
         </p:sp>
         <p:sp>
           <p:nvSpPr>
@@ -22784,6 +23516,10 @@
               <a:noFill/>
             </a:ln>
           </p:spPr>
+          <p:txBody>
+            <a:bodyPr/>
+            <a:p/>
+          </p:txBody>
         </p:sp>
         <p:sp>
           <p:nvSpPr>
@@ -22886,6 +23622,10 @@
               <a:noFill/>
             </a:ln>
           </p:spPr>
+          <p:txBody>
+            <a:bodyPr/>
+            <a:p/>
+          </p:txBody>
         </p:sp>
         <p:sp>
           <p:nvSpPr>
@@ -22988,6 +23728,10 @@
               <a:noFill/>
             </a:ln>
           </p:spPr>
+          <p:txBody>
+            <a:bodyPr/>
+            <a:p/>
+          </p:txBody>
         </p:sp>
         <p:sp>
           <p:nvSpPr>
@@ -23090,6 +23834,10 @@
               <a:noFill/>
             </a:ln>
           </p:spPr>
+          <p:txBody>
+            <a:bodyPr/>
+            <a:p/>
+          </p:txBody>
         </p:sp>
         <p:sp>
           <p:nvSpPr>
@@ -23152,6 +23900,10 @@
               <a:noFill/>
             </a:ln>
           </p:spPr>
+          <p:txBody>
+            <a:bodyPr/>
+            <a:p/>
+          </p:txBody>
         </p:sp>
         <p:sp>
           <p:nvSpPr>
@@ -23214,6 +23966,10 @@
               <a:noFill/>
             </a:ln>
           </p:spPr>
+          <p:txBody>
+            <a:bodyPr/>
+            <a:p/>
+          </p:txBody>
         </p:sp>
         <p:sp>
           <p:nvSpPr>
@@ -23276,6 +24032,10 @@
               <a:noFill/>
             </a:ln>
           </p:spPr>
+          <p:txBody>
+            <a:bodyPr/>
+            <a:p/>
+          </p:txBody>
         </p:sp>
         <p:sp>
           <p:nvSpPr>
@@ -23640,6 +24400,10 @@
               <a:noFill/>
             </a:ln>
           </p:spPr>
+          <p:txBody>
+            <a:bodyPr/>
+            <a:p/>
+          </p:txBody>
         </p:sp>
         <p:sp>
           <p:nvSpPr>
@@ -23702,6 +24466,10 @@
               <a:noFill/>
             </a:ln>
           </p:spPr>
+          <p:txBody>
+            <a:bodyPr/>
+            <a:p/>
+          </p:txBody>
         </p:sp>
         <p:sp>
           <p:nvSpPr>
@@ -23764,6 +24532,10 @@
               <a:noFill/>
             </a:ln>
           </p:spPr>
+          <p:txBody>
+            <a:bodyPr/>
+            <a:p/>
+          </p:txBody>
         </p:sp>
         <p:sp>
           <p:nvSpPr>
@@ -23840,6 +24612,10 @@
               </a:solidFill>
             </a:ln>
           </p:spPr>
+          <p:txBody>
+            <a:bodyPr/>
+            <a:p/>
+          </p:txBody>
         </p:sp>
       </p:grpSp>
       <p:sp>
@@ -24165,6 +24941,10 @@
               <a:noFill/>
             </a:ln>
           </p:spPr>
+          <p:txBody>
+            <a:bodyPr/>
+            <a:p/>
+          </p:txBody>
         </p:sp>
         <p:sp>
           <p:nvSpPr>
@@ -24227,6 +25007,10 @@
               <a:noFill/>
             </a:ln>
           </p:spPr>
+          <p:txBody>
+            <a:bodyPr/>
+            <a:p/>
+          </p:txBody>
         </p:sp>
         <p:sp>
           <p:nvSpPr>
@@ -24289,6 +25073,10 @@
               <a:noFill/>
             </a:ln>
           </p:spPr>
+          <p:txBody>
+            <a:bodyPr/>
+            <a:p/>
+          </p:txBody>
         </p:sp>
         <p:sp>
           <p:nvSpPr>
@@ -24351,6 +25139,10 @@
               <a:noFill/>
             </a:ln>
           </p:spPr>
+          <p:txBody>
+            <a:bodyPr/>
+            <a:p/>
+          </p:txBody>
         </p:sp>
         <p:sp>
           <p:nvSpPr>
@@ -24720,6 +25512,10 @@
               </a:solidFill>
             </a:ln>
           </p:spPr>
+          <p:txBody>
+            <a:bodyPr/>
+            <a:p/>
+          </p:txBody>
         </p:sp>
         <p:sp>
           <p:nvSpPr>
@@ -24742,6 +25538,10 @@
               <a:noFill/>
             </a:ln>
           </p:spPr>
+          <p:txBody>
+            <a:bodyPr/>
+            <a:p/>
+          </p:txBody>
         </p:sp>
         <p:sp>
           <p:nvSpPr>
@@ -24844,6 +25644,10 @@
               <a:noFill/>
             </a:ln>
           </p:spPr>
+          <p:txBody>
+            <a:bodyPr/>
+            <a:p/>
+          </p:txBody>
         </p:sp>
         <p:sp>
           <p:nvSpPr>
@@ -24906,6 +25710,10 @@
               <a:noFill/>
             </a:ln>
           </p:spPr>
+          <p:txBody>
+            <a:bodyPr/>
+            <a:p/>
+          </p:txBody>
         </p:sp>
         <p:sp>
           <p:nvSpPr>
@@ -24968,6 +25776,10 @@
               <a:noFill/>
             </a:ln>
           </p:spPr>
+          <p:txBody>
+            <a:bodyPr/>
+            <a:p/>
+          </p:txBody>
         </p:sp>
         <p:sp>
           <p:nvSpPr>
@@ -25034,6 +25846,10 @@
               </a:solidFill>
             </a:ln>
           </p:spPr>
+          <p:txBody>
+            <a:bodyPr/>
+            <a:p/>
+          </p:txBody>
         </p:sp>
         <p:sp>
           <p:nvSpPr>
@@ -25056,6 +25872,10 @@
               <a:noFill/>
             </a:ln>
           </p:spPr>
+          <p:txBody>
+            <a:bodyPr/>
+            <a:p/>
+          </p:txBody>
         </p:sp>
         <p:sp>
           <p:nvSpPr>
@@ -25158,6 +25978,10 @@
               <a:noFill/>
             </a:ln>
           </p:spPr>
+          <p:txBody>
+            <a:bodyPr/>
+            <a:p/>
+          </p:txBody>
         </p:sp>
         <p:sp>
           <p:nvSpPr>
@@ -25220,6 +26044,10 @@
               <a:noFill/>
             </a:ln>
           </p:spPr>
+          <p:txBody>
+            <a:bodyPr/>
+            <a:p/>
+          </p:txBody>
         </p:sp>
         <p:sp>
           <p:nvSpPr>
@@ -25282,6 +26110,10 @@
               <a:noFill/>
             </a:ln>
           </p:spPr>
+          <p:txBody>
+            <a:bodyPr/>
+            <a:p/>
+          </p:txBody>
         </p:sp>
         <p:sp>
           <p:nvSpPr>
@@ -25348,6 +26180,10 @@
               </a:solidFill>
             </a:ln>
           </p:spPr>
+          <p:txBody>
+            <a:bodyPr/>
+            <a:p/>
+          </p:txBody>
         </p:sp>
         <p:sp>
           <p:nvSpPr>
@@ -25370,6 +26206,10 @@
               <a:noFill/>
             </a:ln>
           </p:spPr>
+          <p:txBody>
+            <a:bodyPr/>
+            <a:p/>
+          </p:txBody>
         </p:sp>
         <p:sp>
           <p:nvSpPr>
@@ -25472,6 +26312,10 @@
               <a:noFill/>
             </a:ln>
           </p:spPr>
+          <p:txBody>
+            <a:bodyPr/>
+            <a:p/>
+          </p:txBody>
         </p:sp>
         <p:sp>
           <p:nvSpPr>
@@ -25534,6 +26378,10 @@
               <a:noFill/>
             </a:ln>
           </p:spPr>
+          <p:txBody>
+            <a:bodyPr/>
+            <a:p/>
+          </p:txBody>
         </p:sp>
         <p:sp>
           <p:nvSpPr>
@@ -25596,6 +26444,10 @@
               <a:noFill/>
             </a:ln>
           </p:spPr>
+          <p:txBody>
+            <a:bodyPr/>
+            <a:p/>
+          </p:txBody>
         </p:sp>
         <p:sp>
           <p:nvSpPr>
@@ -25662,6 +26514,10 @@
               </a:solidFill>
             </a:ln>
           </p:spPr>
+          <p:txBody>
+            <a:bodyPr/>
+            <a:p/>
+          </p:txBody>
         </p:sp>
         <p:sp>
           <p:nvSpPr>
@@ -25684,6 +26540,10 @@
               <a:noFill/>
             </a:ln>
           </p:spPr>
+          <p:txBody>
+            <a:bodyPr/>
+            <a:p/>
+          </p:txBody>
         </p:sp>
         <p:sp>
           <p:nvSpPr>
@@ -25786,6 +26646,10 @@
               <a:noFill/>
             </a:ln>
           </p:spPr>
+          <p:txBody>
+            <a:bodyPr/>
+            <a:p/>
+          </p:txBody>
         </p:sp>
         <p:sp>
           <p:nvSpPr>
@@ -25848,6 +26712,10 @@
               <a:noFill/>
             </a:ln>
           </p:spPr>
+          <p:txBody>
+            <a:bodyPr/>
+            <a:p/>
+          </p:txBody>
         </p:sp>
         <p:sp>
           <p:nvSpPr>
@@ -25912,6 +26780,10 @@
               <a:noFill/>
             </a:ln>
           </p:spPr>
+          <p:txBody>
+            <a:bodyPr/>
+            <a:p/>
+          </p:txBody>
         </p:sp>
         <p:sp>
           <p:nvSpPr>
@@ -26321,6 +27193,10 @@
               </a:solidFill>
             </a:ln>
           </p:spPr>
+          <p:txBody>
+            <a:bodyPr/>
+            <a:p/>
+          </p:txBody>
         </p:sp>
         <p:sp>
           <p:nvSpPr>
@@ -26343,6 +27219,10 @@
               <a:noFill/>
             </a:ln>
           </p:spPr>
+          <p:txBody>
+            <a:bodyPr/>
+            <a:p/>
+          </p:txBody>
         </p:sp>
         <p:sp>
           <p:nvSpPr>
@@ -26449,6 +27329,10 @@
               </a:solidFill>
             </a:ln>
           </p:spPr>
+          <p:txBody>
+            <a:bodyPr/>
+            <a:p/>
+          </p:txBody>
         </p:sp>
         <p:sp>
           <p:nvSpPr>
@@ -26471,6 +27355,10 @@
               <a:noFill/>
             </a:ln>
           </p:spPr>
+          <p:txBody>
+            <a:bodyPr/>
+            <a:p/>
+          </p:txBody>
         </p:sp>
         <p:sp>
           <p:nvSpPr>
@@ -26577,6 +27465,10 @@
               </a:solidFill>
             </a:ln>
           </p:spPr>
+          <p:txBody>
+            <a:bodyPr/>
+            <a:p/>
+          </p:txBody>
         </p:sp>
         <p:sp>
           <p:nvSpPr>
@@ -26599,6 +27491,10 @@
               <a:noFill/>
             </a:ln>
           </p:spPr>
+          <p:txBody>
+            <a:bodyPr/>
+            <a:p/>
+          </p:txBody>
         </p:sp>
         <p:sp>
           <p:nvSpPr>
@@ -26705,6 +27601,10 @@
               </a:solidFill>
             </a:ln>
           </p:spPr>
+          <p:txBody>
+            <a:bodyPr/>
+            <a:p/>
+          </p:txBody>
         </p:sp>
         <p:sp>
           <p:nvSpPr>
@@ -26727,6 +27627,10 @@
               <a:noFill/>
             </a:ln>
           </p:spPr>
+          <p:txBody>
+            <a:bodyPr/>
+            <a:p/>
+          </p:txBody>
         </p:sp>
         <p:sp>
           <p:nvSpPr>
@@ -26833,6 +27737,10 @@
               </a:solidFill>
             </a:ln>
           </p:spPr>
+          <p:txBody>
+            <a:bodyPr/>
+            <a:p/>
+          </p:txBody>
         </p:sp>
         <p:sp>
           <p:nvSpPr>
@@ -26855,6 +27763,10 @@
               <a:noFill/>
             </a:ln>
           </p:spPr>
+          <p:txBody>
+            <a:bodyPr/>
+            <a:p/>
+          </p:txBody>
         </p:sp>
         <p:sp>
           <p:nvSpPr>
@@ -26961,6 +27873,10 @@
               </a:solidFill>
             </a:ln>
           </p:spPr>
+          <p:txBody>
+            <a:bodyPr/>
+            <a:p/>
+          </p:txBody>
         </p:sp>
         <p:sp>
           <p:nvSpPr>
@@ -26983,6 +27899,10 @@
               <a:noFill/>
             </a:ln>
           </p:spPr>
+          <p:txBody>
+            <a:bodyPr/>
+            <a:p/>
+          </p:txBody>
         </p:sp>
         <p:sp>
           <p:nvSpPr>
@@ -27019,7 +27939,7 @@
                   <a:ea typeface="+mn-ea"/>
                   <a:cs typeface="+mn-cs"/>
                 </a:rPr>
-                <a:t>22,078</a:t>
+                <a:t>22,244</a:t>
               </a:r>
             </a:p>
           </p:txBody>
@@ -27089,6 +28009,10 @@
               </a:solidFill>
             </a:ln>
           </p:spPr>
+          <p:txBody>
+            <a:bodyPr/>
+            <a:p/>
+          </p:txBody>
         </p:sp>
         <p:sp>
           <p:nvSpPr>
@@ -27111,6 +28035,10 @@
               <a:noFill/>
             </a:ln>
           </p:spPr>
+          <p:txBody>
+            <a:bodyPr/>
+            <a:p/>
+          </p:txBody>
         </p:sp>
         <p:sp>
           <p:nvSpPr>
@@ -27217,6 +28145,10 @@
               </a:solidFill>
             </a:ln>
           </p:spPr>
+          <p:txBody>
+            <a:bodyPr/>
+            <a:p/>
+          </p:txBody>
         </p:sp>
         <p:sp>
           <p:nvSpPr>
@@ -27239,6 +28171,10 @@
               <a:noFill/>
             </a:ln>
           </p:spPr>
+          <p:txBody>
+            <a:bodyPr/>
+            <a:p/>
+          </p:txBody>
         </p:sp>
         <p:sp>
           <p:nvSpPr>
@@ -27343,6 +28279,10 @@
               <a:noFill/>
             </a:ln>
           </p:spPr>
+          <p:txBody>
+            <a:bodyPr/>
+            <a:p/>
+          </p:txBody>
         </p:sp>
         <p:sp>
           <p:nvSpPr>
@@ -27379,7 +28319,7 @@
                   <a:ea typeface="+mn-ea"/>
                   <a:cs typeface="+mn-cs"/>
                 </a:rPr>
-                <a:t>数据来源：2026-10-26 实测（v1.18.8）—— 后端 14,722 用例 + 前端 7,356 用例</a:t>
+                <a:t>数据来源：2026-10-27 实测（v1.18.14）—— 后端 14,870 用例 + 前端 7,374 用例</a:t>
               </a:r>
             </a:p>
           </p:txBody>
@@ -27722,6 +28662,10 @@
               </a:solidFill>
             </a:ln>
           </p:spPr>
+          <p:txBody>
+            <a:bodyPr/>
+            <a:p/>
+          </p:txBody>
         </p:sp>
         <p:sp>
           <p:nvSpPr>
@@ -27744,6 +28688,10 @@
               <a:noFill/>
             </a:ln>
           </p:spPr>
+          <p:txBody>
+            <a:bodyPr/>
+            <a:p/>
+          </p:txBody>
         </p:sp>
         <p:sp>
           <p:nvSpPr>
@@ -27846,6 +28794,10 @@
               <a:noFill/>
             </a:ln>
           </p:spPr>
+          <p:txBody>
+            <a:bodyPr/>
+            <a:p/>
+          </p:txBody>
         </p:sp>
         <p:sp>
           <p:nvSpPr>
@@ -27948,6 +28900,10 @@
               <a:noFill/>
             </a:ln>
           </p:spPr>
+          <p:txBody>
+            <a:bodyPr/>
+            <a:p/>
+          </p:txBody>
         </p:sp>
         <p:sp>
           <p:nvSpPr>
@@ -28050,6 +29006,10 @@
               <a:noFill/>
             </a:ln>
           </p:spPr>
+          <p:txBody>
+            <a:bodyPr/>
+            <a:p/>
+          </p:txBody>
         </p:sp>
         <p:sp>
           <p:nvSpPr>
@@ -28152,6 +29112,10 @@
               <a:noFill/>
             </a:ln>
           </p:spPr>
+          <p:txBody>
+            <a:bodyPr/>
+            <a:p/>
+          </p:txBody>
         </p:sp>
         <p:sp>
           <p:nvSpPr>
@@ -28188,7 +29152,7 @@
                   <a:ea typeface="+mn-ea"/>
                   <a:cs typeface="+mn-cs"/>
                 </a:rPr>
-                <a:t>后端 14,722 个自动化用例，前端 7,356 个用例，每次改动全部重跑。</a:t>
+                <a:t>后端 14,870 个自动化用例，前端 7,374 个用例，每次改动全部重跑。</a:t>
               </a:r>
             </a:p>
           </p:txBody>
@@ -28214,6 +29178,10 @@
               <a:noFill/>
             </a:ln>
           </p:spPr>
+          <p:txBody>
+            <a:bodyPr/>
+            <a:p/>
+          </p:txBody>
         </p:sp>
         <p:sp>
           <p:nvSpPr>
@@ -28276,6 +29244,10 @@
               <a:noFill/>
             </a:ln>
           </p:spPr>
+          <p:txBody>
+            <a:bodyPr/>
+            <a:p/>
+          </p:txBody>
         </p:sp>
         <p:sp>
           <p:nvSpPr>
@@ -28338,6 +29310,10 @@
               <a:noFill/>
             </a:ln>
           </p:spPr>
+          <p:txBody>
+            <a:bodyPr/>
+            <a:p/>
+          </p:txBody>
         </p:sp>
         <p:sp>
           <p:nvSpPr>
@@ -28717,6 +29693,10 @@
               </a:solidFill>
             </a:ln>
           </p:spPr>
+          <p:txBody>
+            <a:bodyPr/>
+            <a:p/>
+          </p:txBody>
         </p:sp>
         <p:sp>
           <p:nvSpPr>
@@ -28739,6 +29719,10 @@
               <a:noFill/>
             </a:ln>
           </p:spPr>
+          <p:txBody>
+            <a:bodyPr/>
+            <a:p/>
+          </p:txBody>
         </p:sp>
         <p:sp>
           <p:nvSpPr>
@@ -28881,6 +29865,10 @@
               <a:noFill/>
             </a:ln>
           </p:spPr>
+          <p:txBody>
+            <a:bodyPr/>
+            <a:p/>
+          </p:txBody>
         </p:sp>
         <p:sp>
           <p:nvSpPr>
@@ -29023,6 +30011,10 @@
               <a:noFill/>
             </a:ln>
           </p:spPr>
+          <p:txBody>
+            <a:bodyPr/>
+            <a:p/>
+          </p:txBody>
         </p:sp>
         <p:sp>
           <p:nvSpPr>
@@ -29165,6 +30157,10 @@
               <a:noFill/>
             </a:ln>
           </p:spPr>
+          <p:txBody>
+            <a:bodyPr/>
+            <a:p/>
+          </p:txBody>
         </p:sp>
         <p:sp>
           <p:nvSpPr>
@@ -29307,6 +30303,10 @@
               <a:noFill/>
             </a:ln>
           </p:spPr>
+          <p:txBody>
+            <a:bodyPr/>
+            <a:p/>
+          </p:txBody>
         </p:sp>
         <p:sp>
           <p:nvSpPr>
@@ -29449,6 +30449,10 @@
               <a:noFill/>
             </a:ln>
           </p:spPr>
+          <p:txBody>
+            <a:bodyPr/>
+            <a:p/>
+          </p:txBody>
         </p:sp>
         <p:sp>
           <p:nvSpPr>
@@ -29591,6 +30595,10 @@
               <a:noFill/>
             </a:ln>
           </p:spPr>
+          <p:txBody>
+            <a:bodyPr/>
+            <a:p/>
+          </p:txBody>
         </p:sp>
         <p:sp>
           <p:nvSpPr>
@@ -29653,6 +30661,10 @@
               <a:noFill/>
             </a:ln>
           </p:spPr>
+          <p:txBody>
+            <a:bodyPr/>
+            <a:p/>
+          </p:txBody>
         </p:sp>
         <p:sp>
           <p:nvSpPr>
@@ -29715,6 +30727,10 @@
               <a:noFill/>
             </a:ln>
           </p:spPr>
+          <p:txBody>
+            <a:bodyPr/>
+            <a:p/>
+          </p:txBody>
         </p:sp>
         <p:sp>
           <p:nvSpPr>
@@ -29777,6 +30793,10 @@
               <a:noFill/>
             </a:ln>
           </p:spPr>
+          <p:txBody>
+            <a:bodyPr/>
+            <a:p/>
+          </p:txBody>
         </p:sp>
         <p:sp>
           <p:nvSpPr>
@@ -30146,6 +31166,10 @@
               </a:solidFill>
             </a:ln>
           </p:spPr>
+          <p:txBody>
+            <a:bodyPr/>
+            <a:p/>
+          </p:txBody>
         </p:sp>
         <p:sp>
           <p:nvSpPr>
@@ -30168,6 +31192,10 @@
               <a:noFill/>
             </a:ln>
           </p:spPr>
+          <p:txBody>
+            <a:bodyPr/>
+            <a:p/>
+          </p:txBody>
         </p:sp>
         <p:sp>
           <p:nvSpPr>
@@ -30274,6 +31302,10 @@
               </a:solidFill>
             </a:ln>
           </p:spPr>
+          <p:txBody>
+            <a:bodyPr/>
+            <a:p/>
+          </p:txBody>
         </p:sp>
         <p:sp>
           <p:nvSpPr>
@@ -30296,6 +31328,10 @@
               <a:noFill/>
             </a:ln>
           </p:spPr>
+          <p:txBody>
+            <a:bodyPr/>
+            <a:p/>
+          </p:txBody>
         </p:sp>
         <p:sp>
           <p:nvSpPr>
@@ -30402,6 +31438,10 @@
               </a:solidFill>
             </a:ln>
           </p:spPr>
+          <p:txBody>
+            <a:bodyPr/>
+            <a:p/>
+          </p:txBody>
         </p:sp>
         <p:sp>
           <p:nvSpPr>
@@ -30424,6 +31464,10 @@
               <a:noFill/>
             </a:ln>
           </p:spPr>
+          <p:txBody>
+            <a:bodyPr/>
+            <a:p/>
+          </p:txBody>
         </p:sp>
         <p:sp>
           <p:nvSpPr>
@@ -30530,6 +31574,10 @@
               </a:solidFill>
             </a:ln>
           </p:spPr>
+          <p:txBody>
+            <a:bodyPr/>
+            <a:p/>
+          </p:txBody>
         </p:sp>
         <p:sp>
           <p:nvSpPr>
@@ -30552,6 +31600,10 @@
               <a:noFill/>
             </a:ln>
           </p:spPr>
+          <p:txBody>
+            <a:bodyPr/>
+            <a:p/>
+          </p:txBody>
         </p:sp>
         <p:sp>
           <p:nvSpPr>
@@ -30656,6 +31708,10 @@
               <a:noFill/>
             </a:ln>
           </p:spPr>
+          <p:txBody>
+            <a:bodyPr/>
+            <a:p/>
+          </p:txBody>
         </p:sp>
         <p:sp>
           <p:nvSpPr>
@@ -31020,6 +32076,10 @@
               <a:noFill/>
             </a:ln>
           </p:spPr>
+          <p:txBody>
+            <a:bodyPr/>
+            <a:p/>
+          </p:txBody>
         </p:sp>
         <p:sp>
           <p:nvSpPr>
@@ -31082,6 +32142,10 @@
               <a:noFill/>
             </a:ln>
           </p:spPr>
+          <p:txBody>
+            <a:bodyPr/>
+            <a:p/>
+          </p:txBody>
         </p:sp>
         <p:sp>
           <p:nvSpPr>
@@ -31144,6 +32208,10 @@
               <a:noFill/>
             </a:ln>
           </p:spPr>
+          <p:txBody>
+            <a:bodyPr/>
+            <a:p/>
+          </p:txBody>
         </p:sp>
         <p:sp>
           <p:nvSpPr>
@@ -31206,6 +32274,10 @@
               <a:noFill/>
             </a:ln>
           </p:spPr>
+          <p:txBody>
+            <a:bodyPr/>
+            <a:p/>
+          </p:txBody>
         </p:sp>
         <p:sp>
           <p:nvSpPr>
@@ -31282,6 +32354,10 @@
               </a:solidFill>
             </a:ln>
           </p:spPr>
+          <p:txBody>
+            <a:bodyPr/>
+            <a:p/>
+          </p:txBody>
         </p:sp>
       </p:grpSp>
       <p:sp>
@@ -31621,6 +32697,10 @@
               </a:solidFill>
             </a:ln>
           </p:spPr>
+          <p:txBody>
+            <a:bodyPr/>
+            <a:p/>
+          </p:txBody>
         </p:sp>
         <p:sp>
           <p:nvSpPr>
@@ -31643,6 +32723,10 @@
               <a:noFill/>
             </a:ln>
           </p:spPr>
+          <p:txBody>
+            <a:bodyPr/>
+            <a:p/>
+          </p:txBody>
         </p:sp>
         <p:sp>
           <p:nvSpPr>
@@ -31745,6 +32829,10 @@
               <a:noFill/>
             </a:ln>
           </p:spPr>
+          <p:txBody>
+            <a:bodyPr/>
+            <a:p/>
+          </p:txBody>
         </p:sp>
         <p:sp>
           <p:nvSpPr>
@@ -31847,6 +32935,10 @@
               <a:noFill/>
             </a:ln>
           </p:spPr>
+          <p:txBody>
+            <a:bodyPr/>
+            <a:p/>
+          </p:txBody>
         </p:sp>
         <p:sp>
           <p:nvSpPr>
@@ -31949,6 +33041,10 @@
               <a:noFill/>
             </a:ln>
           </p:spPr>
+          <p:txBody>
+            <a:bodyPr/>
+            <a:p/>
+          </p:txBody>
         </p:sp>
         <p:sp>
           <p:nvSpPr>
@@ -32051,6 +33147,10 @@
               <a:noFill/>
             </a:ln>
           </p:spPr>
+          <p:txBody>
+            <a:bodyPr/>
+            <a:p/>
+          </p:txBody>
         </p:sp>
         <p:sp>
           <p:nvSpPr>
@@ -32113,6 +33213,10 @@
               <a:noFill/>
             </a:ln>
           </p:spPr>
+          <p:txBody>
+            <a:bodyPr/>
+            <a:p/>
+          </p:txBody>
         </p:sp>
         <p:sp>
           <p:nvSpPr>
@@ -32175,6 +33279,10 @@
               <a:noFill/>
             </a:ln>
           </p:spPr>
+          <p:txBody>
+            <a:bodyPr/>
+            <a:p/>
+          </p:txBody>
         </p:sp>
         <p:sp>
           <p:nvSpPr>
@@ -32237,6 +33345,10 @@
               <a:noFill/>
             </a:ln>
           </p:spPr>
+          <p:txBody>
+            <a:bodyPr/>
+            <a:p/>
+          </p:txBody>
         </p:sp>
         <p:sp>
           <p:nvSpPr>
@@ -32616,6 +33728,10 @@
               </a:solidFill>
             </a:ln>
           </p:spPr>
+          <p:txBody>
+            <a:bodyPr/>
+            <a:p/>
+          </p:txBody>
         </p:sp>
         <p:sp>
           <p:nvSpPr>
@@ -32638,6 +33754,10 @@
               <a:noFill/>
             </a:ln>
           </p:spPr>
+          <p:txBody>
+            <a:bodyPr/>
+            <a:p/>
+          </p:txBody>
         </p:sp>
         <p:sp>
           <p:nvSpPr>
@@ -32740,6 +33860,10 @@
               <a:noFill/>
             </a:ln>
           </p:spPr>
+          <p:txBody>
+            <a:bodyPr/>
+            <a:p/>
+          </p:txBody>
         </p:sp>
         <p:sp>
           <p:nvSpPr>
@@ -32842,6 +33966,10 @@
               <a:noFill/>
             </a:ln>
           </p:spPr>
+          <p:txBody>
+            <a:bodyPr/>
+            <a:p/>
+          </p:txBody>
         </p:sp>
         <p:sp>
           <p:nvSpPr>
@@ -32944,6 +34072,10 @@
               <a:noFill/>
             </a:ln>
           </p:spPr>
+          <p:txBody>
+            <a:bodyPr/>
+            <a:p/>
+          </p:txBody>
         </p:sp>
         <p:sp>
           <p:nvSpPr>
@@ -33006,6 +34138,10 @@
               <a:noFill/>
             </a:ln>
           </p:spPr>
+          <p:txBody>
+            <a:bodyPr/>
+            <a:p/>
+          </p:txBody>
         </p:sp>
         <p:sp>
           <p:nvSpPr>
@@ -33068,6 +34204,10 @@
               <a:noFill/>
             </a:ln>
           </p:spPr>
+          <p:txBody>
+            <a:bodyPr/>
+            <a:p/>
+          </p:txBody>
         </p:sp>
         <p:sp>
           <p:nvSpPr>
@@ -33130,6 +34270,10 @@
               <a:noFill/>
             </a:ln>
           </p:spPr>
+          <p:txBody>
+            <a:bodyPr/>
+            <a:p/>
+          </p:txBody>
         </p:sp>
         <p:sp>
           <p:nvSpPr>
@@ -33535,6 +34679,10 @@
               <a:noFill/>
             </a:ln>
           </p:spPr>
+          <p:txBody>
+            <a:bodyPr/>
+            <a:p/>
+          </p:txBody>
         </p:sp>
         <p:sp>
           <p:nvSpPr>
@@ -33557,6 +34705,10 @@
               <a:noFill/>
             </a:ln>
           </p:spPr>
+          <p:txBody>
+            <a:bodyPr/>
+            <a:p/>
+          </p:txBody>
         </p:sp>
         <p:sp>
           <p:nvSpPr>
@@ -33619,6 +34771,10 @@
               <a:noFill/>
             </a:ln>
           </p:spPr>
+          <p:txBody>
+            <a:bodyPr/>
+            <a:p/>
+          </p:txBody>
         </p:sp>
         <p:sp>
           <p:nvSpPr>
@@ -33681,6 +34837,10 @@
               <a:noFill/>
             </a:ln>
           </p:spPr>
+          <p:txBody>
+            <a:bodyPr/>
+            <a:p/>
+          </p:txBody>
         </p:sp>
         <p:sp>
           <p:nvSpPr>
@@ -33743,6 +34903,10 @@
               <a:noFill/>
             </a:ln>
           </p:spPr>
+          <p:txBody>
+            <a:bodyPr/>
+            <a:p/>
+          </p:txBody>
         </p:sp>
         <p:sp>
           <p:nvSpPr>
@@ -33845,6 +35009,10 @@
               <a:noFill/>
             </a:ln>
           </p:spPr>
+          <p:txBody>
+            <a:bodyPr/>
+            <a:p/>
+          </p:txBody>
         </p:sp>
         <p:sp>
           <p:nvSpPr>
@@ -33867,6 +35035,10 @@
               <a:noFill/>
             </a:ln>
           </p:spPr>
+          <p:txBody>
+            <a:bodyPr/>
+            <a:p/>
+          </p:txBody>
         </p:sp>
         <p:sp>
           <p:nvSpPr>
@@ -33929,6 +35101,10 @@
               <a:noFill/>
             </a:ln>
           </p:spPr>
+          <p:txBody>
+            <a:bodyPr/>
+            <a:p/>
+          </p:txBody>
         </p:sp>
         <p:sp>
           <p:nvSpPr>
@@ -33991,6 +35167,10 @@
               <a:noFill/>
             </a:ln>
           </p:spPr>
+          <p:txBody>
+            <a:bodyPr/>
+            <a:p/>
+          </p:txBody>
         </p:sp>
         <p:sp>
           <p:nvSpPr>
@@ -34055,6 +35235,10 @@
               <a:noFill/>
             </a:ln>
           </p:spPr>
+          <p:txBody>
+            <a:bodyPr/>
+            <a:p/>
+          </p:txBody>
         </p:sp>
         <p:sp>
           <p:nvSpPr>
@@ -34424,6 +35608,10 @@
               </a:solidFill>
             </a:ln>
           </p:spPr>
+          <p:txBody>
+            <a:bodyPr/>
+            <a:p/>
+          </p:txBody>
         </p:sp>
         <p:sp>
           <p:nvSpPr>
@@ -34530,6 +35718,10 @@
               </a:solidFill>
             </a:ln>
           </p:spPr>
+          <p:txBody>
+            <a:bodyPr/>
+            <a:p/>
+          </p:txBody>
         </p:sp>
         <p:sp>
           <p:nvSpPr>
@@ -34636,6 +35828,10 @@
               </a:solidFill>
             </a:ln>
           </p:spPr>
+          <p:txBody>
+            <a:bodyPr/>
+            <a:p/>
+          </p:txBody>
         </p:sp>
         <p:sp>
           <p:nvSpPr>
@@ -34742,6 +35938,10 @@
               </a:solidFill>
             </a:ln>
           </p:spPr>
+          <p:txBody>
+            <a:bodyPr/>
+            <a:p/>
+          </p:txBody>
         </p:sp>
         <p:sp>
           <p:nvSpPr>
@@ -34848,6 +36048,10 @@
               </a:solidFill>
             </a:ln>
           </p:spPr>
+          <p:txBody>
+            <a:bodyPr/>
+            <a:p/>
+          </p:txBody>
         </p:sp>
         <p:sp>
           <p:nvSpPr>
@@ -34954,6 +36158,10 @@
               </a:solidFill>
             </a:ln>
           </p:spPr>
+          <p:txBody>
+            <a:bodyPr/>
+            <a:p/>
+          </p:txBody>
         </p:sp>
         <p:sp>
           <p:nvSpPr>
@@ -35100,6 +36308,10 @@
               </a:solidFill>
             </a:ln>
           </p:spPr>
+          <p:txBody>
+            <a:bodyPr/>
+            <a:p/>
+          </p:txBody>
         </p:sp>
         <p:sp>
           <p:nvSpPr>
@@ -35206,6 +36418,10 @@
               </a:solidFill>
             </a:ln>
           </p:spPr>
+          <p:txBody>
+            <a:bodyPr/>
+            <a:p/>
+          </p:txBody>
         </p:sp>
         <p:sp>
           <p:nvSpPr>
@@ -35655,6 +36871,10 @@
               </a:solidFill>
             </a:ln>
           </p:spPr>
+          <p:txBody>
+            <a:bodyPr/>
+            <a:p/>
+          </p:txBody>
         </p:sp>
         <p:sp>
           <p:nvSpPr>
@@ -35677,6 +36897,10 @@
               <a:noFill/>
             </a:ln>
           </p:spPr>
+          <p:txBody>
+            <a:bodyPr/>
+            <a:p/>
+          </p:txBody>
         </p:sp>
         <p:sp>
           <p:nvSpPr>
@@ -35739,6 +36963,10 @@
               <a:noFill/>
             </a:ln>
           </p:spPr>
+          <p:txBody>
+            <a:bodyPr/>
+            <a:p/>
+          </p:txBody>
         </p:sp>
         <p:sp>
           <p:nvSpPr>
@@ -35801,6 +37029,10 @@
               <a:noFill/>
             </a:ln>
           </p:spPr>
+          <p:txBody>
+            <a:bodyPr/>
+            <a:p/>
+          </p:txBody>
         </p:sp>
         <p:sp>
           <p:nvSpPr>
@@ -35863,6 +37095,10 @@
               <a:noFill/>
             </a:ln>
           </p:spPr>
+          <p:txBody>
+            <a:bodyPr/>
+            <a:p/>
+          </p:txBody>
         </p:sp>
         <p:sp>
           <p:nvSpPr>
@@ -35929,6 +37165,10 @@
               </a:solidFill>
             </a:ln>
           </p:spPr>
+          <p:txBody>
+            <a:bodyPr/>
+            <a:p/>
+          </p:txBody>
         </p:sp>
         <p:sp>
           <p:nvSpPr>
@@ -35951,6 +37191,10 @@
               <a:noFill/>
             </a:ln>
           </p:spPr>
+          <p:txBody>
+            <a:bodyPr/>
+            <a:p/>
+          </p:txBody>
         </p:sp>
         <p:sp>
           <p:nvSpPr>
@@ -36013,6 +37257,10 @@
               <a:noFill/>
             </a:ln>
           </p:spPr>
+          <p:txBody>
+            <a:bodyPr/>
+            <a:p/>
+          </p:txBody>
         </p:sp>
         <p:sp>
           <p:nvSpPr>
@@ -36075,6 +37323,10 @@
               <a:noFill/>
             </a:ln>
           </p:spPr>
+          <p:txBody>
+            <a:bodyPr/>
+            <a:p/>
+          </p:txBody>
         </p:sp>
         <p:sp>
           <p:nvSpPr>
@@ -36137,6 +37389,10 @@
               <a:noFill/>
             </a:ln>
           </p:spPr>
+          <p:txBody>
+            <a:bodyPr/>
+            <a:p/>
+          </p:txBody>
         </p:sp>
         <p:sp>
           <p:nvSpPr>
@@ -36203,6 +37459,10 @@
               </a:solidFill>
             </a:ln>
           </p:spPr>
+          <p:txBody>
+            <a:bodyPr/>
+            <a:p/>
+          </p:txBody>
         </p:sp>
         <p:sp>
           <p:nvSpPr>
@@ -36225,6 +37485,10 @@
               <a:noFill/>
             </a:ln>
           </p:spPr>
+          <p:txBody>
+            <a:bodyPr/>
+            <a:p/>
+          </p:txBody>
         </p:sp>
         <p:sp>
           <p:nvSpPr>
@@ -36287,6 +37551,10 @@
               <a:noFill/>
             </a:ln>
           </p:spPr>
+          <p:txBody>
+            <a:bodyPr/>
+            <a:p/>
+          </p:txBody>
         </p:sp>
         <p:sp>
           <p:nvSpPr>
@@ -36349,6 +37617,10 @@
               <a:noFill/>
             </a:ln>
           </p:spPr>
+          <p:txBody>
+            <a:bodyPr/>
+            <a:p/>
+          </p:txBody>
         </p:sp>
         <p:sp>
           <p:nvSpPr>
@@ -36411,6 +37683,10 @@
               <a:noFill/>
             </a:ln>
           </p:spPr>
+          <p:txBody>
+            <a:bodyPr/>
+            <a:p/>
+          </p:txBody>
         </p:sp>
         <p:sp>
           <p:nvSpPr>
@@ -36780,6 +38056,10 @@
               </a:solidFill>
             </a:ln>
           </p:spPr>
+          <p:txBody>
+            <a:bodyPr/>
+            <a:p/>
+          </p:txBody>
         </p:sp>
         <p:sp>
           <p:nvSpPr>
@@ -36802,6 +38082,10 @@
               <a:noFill/>
             </a:ln>
           </p:spPr>
+          <p:txBody>
+            <a:bodyPr/>
+            <a:p/>
+          </p:txBody>
         </p:sp>
         <p:sp>
           <p:nvSpPr>
@@ -36948,6 +38232,10 @@
               </a:solidFill>
             </a:ln>
           </p:spPr>
+          <p:txBody>
+            <a:bodyPr/>
+            <a:p/>
+          </p:txBody>
         </p:sp>
         <p:sp>
           <p:nvSpPr>
@@ -36970,6 +38258,10 @@
               <a:noFill/>
             </a:ln>
           </p:spPr>
+          <p:txBody>
+            <a:bodyPr/>
+            <a:p/>
+          </p:txBody>
         </p:sp>
         <p:sp>
           <p:nvSpPr>
@@ -37116,6 +38408,10 @@
               </a:solidFill>
             </a:ln>
           </p:spPr>
+          <p:txBody>
+            <a:bodyPr/>
+            <a:p/>
+          </p:txBody>
         </p:sp>
         <p:sp>
           <p:nvSpPr>
@@ -37138,6 +38434,10 @@
               <a:noFill/>
             </a:ln>
           </p:spPr>
+          <p:txBody>
+            <a:bodyPr/>
+            <a:p/>
+          </p:txBody>
         </p:sp>
         <p:sp>
           <p:nvSpPr>
@@ -37284,6 +38584,10 @@
               </a:solidFill>
             </a:ln>
           </p:spPr>
+          <p:txBody>
+            <a:bodyPr/>
+            <a:p/>
+          </p:txBody>
         </p:sp>
         <p:sp>
           <p:nvSpPr>
@@ -37306,6 +38610,10 @@
               <a:noFill/>
             </a:ln>
           </p:spPr>
+          <p:txBody>
+            <a:bodyPr/>
+            <a:p/>
+          </p:txBody>
         </p:sp>
         <p:sp>
           <p:nvSpPr>
@@ -37452,6 +38760,10 @@
               </a:solidFill>
             </a:ln>
           </p:spPr>
+          <p:txBody>
+            <a:bodyPr/>
+            <a:p/>
+          </p:txBody>
         </p:sp>
         <p:sp>
           <p:nvSpPr>
@@ -37474,6 +38786,10 @@
               <a:noFill/>
             </a:ln>
           </p:spPr>
+          <p:txBody>
+            <a:bodyPr/>
+            <a:p/>
+          </p:txBody>
         </p:sp>
         <p:sp>
           <p:nvSpPr>
@@ -37620,6 +38936,10 @@
               </a:solidFill>
             </a:ln>
           </p:spPr>
+          <p:txBody>
+            <a:bodyPr/>
+            <a:p/>
+          </p:txBody>
         </p:sp>
         <p:sp>
           <p:nvSpPr>
@@ -37642,6 +38962,10 @@
               <a:noFill/>
             </a:ln>
           </p:spPr>
+          <p:txBody>
+            <a:bodyPr/>
+            <a:p/>
+          </p:txBody>
         </p:sp>
         <p:sp>
           <p:nvSpPr>
@@ -38091,6 +39415,10 @@
               </a:solidFill>
             </a:ln>
           </p:spPr>
+          <p:txBody>
+            <a:bodyPr/>
+            <a:p/>
+          </p:txBody>
         </p:sp>
         <p:sp>
           <p:nvSpPr>
@@ -38113,6 +39441,10 @@
               <a:noFill/>
             </a:ln>
           </p:spPr>
+          <p:txBody>
+            <a:bodyPr/>
+            <a:p/>
+          </p:txBody>
         </p:sp>
         <p:sp>
           <p:nvSpPr>
@@ -38215,6 +39547,10 @@
               <a:noFill/>
             </a:ln>
           </p:spPr>
+          <p:txBody>
+            <a:bodyPr/>
+            <a:p/>
+          </p:txBody>
         </p:sp>
         <p:sp>
           <p:nvSpPr>
@@ -38277,6 +39613,10 @@
               <a:noFill/>
             </a:ln>
           </p:spPr>
+          <p:txBody>
+            <a:bodyPr/>
+            <a:p/>
+          </p:txBody>
         </p:sp>
         <p:sp>
           <p:nvSpPr>
@@ -38339,6 +39679,10 @@
               <a:noFill/>
             </a:ln>
           </p:spPr>
+          <p:txBody>
+            <a:bodyPr/>
+            <a:p/>
+          </p:txBody>
         </p:sp>
         <p:sp>
           <p:nvSpPr>
@@ -38405,6 +39749,10 @@
               </a:solidFill>
             </a:ln>
           </p:spPr>
+          <p:txBody>
+            <a:bodyPr/>
+            <a:p/>
+          </p:txBody>
         </p:sp>
         <p:sp>
           <p:nvSpPr>
@@ -38427,6 +39775,10 @@
               <a:noFill/>
             </a:ln>
           </p:spPr>
+          <p:txBody>
+            <a:bodyPr/>
+            <a:p/>
+          </p:txBody>
         </p:sp>
         <p:sp>
           <p:nvSpPr>
@@ -38529,6 +39881,10 @@
               <a:noFill/>
             </a:ln>
           </p:spPr>
+          <p:txBody>
+            <a:bodyPr/>
+            <a:p/>
+          </p:txBody>
         </p:sp>
         <p:sp>
           <p:nvSpPr>
@@ -38591,6 +39947,10 @@
               <a:noFill/>
             </a:ln>
           </p:spPr>
+          <p:txBody>
+            <a:bodyPr/>
+            <a:p/>
+          </p:txBody>
         </p:sp>
         <p:sp>
           <p:nvSpPr>
@@ -38653,6 +40013,10 @@
               <a:noFill/>
             </a:ln>
           </p:spPr>
+          <p:txBody>
+            <a:bodyPr/>
+            <a:p/>
+          </p:txBody>
         </p:sp>
         <p:sp>
           <p:nvSpPr>
@@ -38719,6 +40083,10 @@
               </a:solidFill>
             </a:ln>
           </p:spPr>
+          <p:txBody>
+            <a:bodyPr/>
+            <a:p/>
+          </p:txBody>
         </p:sp>
         <p:sp>
           <p:nvSpPr>
@@ -38741,6 +40109,10 @@
               <a:noFill/>
             </a:ln>
           </p:spPr>
+          <p:txBody>
+            <a:bodyPr/>
+            <a:p/>
+          </p:txBody>
         </p:sp>
         <p:sp>
           <p:nvSpPr>
@@ -38843,6 +40215,10 @@
               <a:noFill/>
             </a:ln>
           </p:spPr>
+          <p:txBody>
+            <a:bodyPr/>
+            <a:p/>
+          </p:txBody>
         </p:sp>
         <p:sp>
           <p:nvSpPr>
@@ -38905,6 +40281,10 @@
               <a:noFill/>
             </a:ln>
           </p:spPr>
+          <p:txBody>
+            <a:bodyPr/>
+            <a:p/>
+          </p:txBody>
         </p:sp>
         <p:sp>
           <p:nvSpPr>
@@ -38967,6 +40347,10 @@
               <a:noFill/>
             </a:ln>
           </p:spPr>
+          <p:txBody>
+            <a:bodyPr/>
+            <a:p/>
+          </p:txBody>
         </p:sp>
         <p:sp>
           <p:nvSpPr>
@@ -39033,6 +40417,10 @@
               </a:solidFill>
             </a:ln>
           </p:spPr>
+          <p:txBody>
+            <a:bodyPr/>
+            <a:p/>
+          </p:txBody>
         </p:sp>
         <p:sp>
           <p:nvSpPr>
@@ -39055,6 +40443,10 @@
               <a:noFill/>
             </a:ln>
           </p:spPr>
+          <p:txBody>
+            <a:bodyPr/>
+            <a:p/>
+          </p:txBody>
         </p:sp>
         <p:sp>
           <p:nvSpPr>
@@ -39157,6 +40549,10 @@
               <a:noFill/>
             </a:ln>
           </p:spPr>
+          <p:txBody>
+            <a:bodyPr/>
+            <a:p/>
+          </p:txBody>
         </p:sp>
         <p:sp>
           <p:nvSpPr>
@@ -39219,6 +40615,10 @@
               <a:noFill/>
             </a:ln>
           </p:spPr>
+          <p:txBody>
+            <a:bodyPr/>
+            <a:p/>
+          </p:txBody>
         </p:sp>
         <p:sp>
           <p:nvSpPr>
@@ -39281,6 +40681,10 @@
               <a:noFill/>
             </a:ln>
           </p:spPr>
+          <p:txBody>
+            <a:bodyPr/>
+            <a:p/>
+          </p:txBody>
         </p:sp>
         <p:sp>
           <p:nvSpPr>
@@ -39345,6 +40749,10 @@
               <a:noFill/>
             </a:ln>
           </p:spPr>
+          <p:txBody>
+            <a:bodyPr/>
+            <a:p/>
+          </p:txBody>
         </p:sp>
         <p:sp>
           <p:nvSpPr>
@@ -39714,6 +41122,10 @@
               </a:solidFill>
             </a:ln>
           </p:spPr>
+          <p:txBody>
+            <a:bodyPr/>
+            <a:p/>
+          </p:txBody>
         </p:sp>
         <p:sp>
           <p:nvSpPr>
@@ -39910,6 +41322,10 @@
               </a:solidFill>
             </a:ln>
           </p:spPr>
+          <p:txBody>
+            <a:bodyPr/>
+            <a:p/>
+          </p:txBody>
         </p:sp>
         <p:sp>
           <p:nvSpPr>
@@ -40016,6 +41432,10 @@
               </a:solidFill>
             </a:ln>
           </p:spPr>
+          <p:txBody>
+            <a:bodyPr/>
+            <a:p/>
+          </p:txBody>
         </p:sp>
         <p:sp>
           <p:nvSpPr>
@@ -40212,6 +41632,10 @@
               </a:solidFill>
             </a:ln>
           </p:spPr>
+          <p:txBody>
+            <a:bodyPr/>
+            <a:p/>
+          </p:txBody>
         </p:sp>
         <p:sp>
           <p:nvSpPr>
@@ -40318,6 +41742,10 @@
               </a:solidFill>
             </a:ln>
           </p:spPr>
+          <p:txBody>
+            <a:bodyPr/>
+            <a:p/>
+          </p:txBody>
         </p:sp>
         <p:sp>
           <p:nvSpPr>
@@ -40474,6 +41902,10 @@
               </a:solidFill>
             </a:ln>
           </p:spPr>
+          <p:txBody>
+            <a:bodyPr/>
+            <a:p/>
+          </p:txBody>
         </p:sp>
         <p:sp>
           <p:nvSpPr>
@@ -40580,6 +42012,10 @@
               </a:solidFill>
             </a:ln>
           </p:spPr>
+          <p:txBody>
+            <a:bodyPr/>
+            <a:p/>
+          </p:txBody>
         </p:sp>
         <p:sp>
           <p:nvSpPr>
@@ -40736,6 +42172,10 @@
               </a:solidFill>
             </a:ln>
           </p:spPr>
+          <p:txBody>
+            <a:bodyPr/>
+            <a:p/>
+          </p:txBody>
         </p:sp>
         <p:sp>
           <p:nvSpPr>
@@ -41141,6 +42581,10 @@
               <a:noFill/>
             </a:ln>
           </p:spPr>
+          <p:txBody>
+            <a:bodyPr/>
+            <a:p/>
+          </p:txBody>
         </p:sp>
         <p:sp>
           <p:nvSpPr>
@@ -41203,6 +42647,10 @@
               <a:noFill/>
             </a:ln>
           </p:spPr>
+          <p:txBody>
+            <a:bodyPr/>
+            <a:p/>
+          </p:txBody>
         </p:sp>
         <p:sp>
           <p:nvSpPr>
@@ -41265,6 +42713,10 @@
               <a:noFill/>
             </a:ln>
           </p:spPr>
+          <p:txBody>
+            <a:bodyPr/>
+            <a:p/>
+          </p:txBody>
         </p:sp>
         <p:sp>
           <p:nvSpPr>
@@ -41699,7 +43151,7 @@
                 <a:ea typeface="+mn-ea"/>
                 <a:cs typeface="+mn-cs"/>
               </a:rPr>
-              <a:t>22,078 项自动化测试守护 · 双平台离线交付 · 数据不出本机</a:t>
+              <a:t>22,244 项自动化测试守护 · 双平台离线交付 · 数据不出本机</a:t>
             </a:r>
           </a:p>
         </p:txBody>
@@ -41991,6 +43443,10 @@
               </a:solidFill>
             </a:ln>
           </p:spPr>
+          <p:txBody>
+            <a:bodyPr/>
+            <a:p/>
+          </p:txBody>
         </p:sp>
         <p:sp>
           <p:nvSpPr>
@@ -42013,6 +43469,10 @@
               <a:noFill/>
             </a:ln>
           </p:spPr>
+          <p:txBody>
+            <a:bodyPr/>
+            <a:p/>
+          </p:txBody>
         </p:sp>
         <p:sp>
           <p:nvSpPr>
@@ -42119,6 +43579,10 @@
               </a:solidFill>
             </a:ln>
           </p:spPr>
+          <p:txBody>
+            <a:bodyPr/>
+            <a:p/>
+          </p:txBody>
         </p:sp>
         <p:sp>
           <p:nvSpPr>
@@ -42141,6 +43605,10 @@
               <a:noFill/>
             </a:ln>
           </p:spPr>
+          <p:txBody>
+            <a:bodyPr/>
+            <a:p/>
+          </p:txBody>
         </p:sp>
         <p:sp>
           <p:nvSpPr>
@@ -42247,6 +43715,10 @@
               </a:solidFill>
             </a:ln>
           </p:spPr>
+          <p:txBody>
+            <a:bodyPr/>
+            <a:p/>
+          </p:txBody>
         </p:sp>
         <p:sp>
           <p:nvSpPr>
@@ -42269,6 +43741,10 @@
               <a:noFill/>
             </a:ln>
           </p:spPr>
+          <p:txBody>
+            <a:bodyPr/>
+            <a:p/>
+          </p:txBody>
         </p:sp>
         <p:sp>
           <p:nvSpPr>
@@ -42373,6 +43849,10 @@
               <a:noFill/>
             </a:ln>
           </p:spPr>
+          <p:txBody>
+            <a:bodyPr/>
+            <a:p/>
+          </p:txBody>
         </p:sp>
         <p:sp>
           <p:nvSpPr>
@@ -42782,6 +44262,10 @@
               </a:solidFill>
             </a:ln>
           </p:spPr>
+          <p:txBody>
+            <a:bodyPr/>
+            <a:p/>
+          </p:txBody>
         </p:sp>
         <p:sp>
           <p:nvSpPr>
@@ -42804,6 +44288,10 @@
               <a:noFill/>
             </a:ln>
           </p:spPr>
+          <p:txBody>
+            <a:bodyPr/>
+            <a:p/>
+          </p:txBody>
         </p:sp>
         <p:sp>
           <p:nvSpPr>
@@ -42906,6 +44394,10 @@
               <a:noFill/>
             </a:ln>
           </p:spPr>
+          <p:txBody>
+            <a:bodyPr/>
+            <a:p/>
+          </p:txBody>
         </p:sp>
         <p:sp>
           <p:nvSpPr>
@@ -42968,6 +44460,10 @@
               <a:noFill/>
             </a:ln>
           </p:spPr>
+          <p:txBody>
+            <a:bodyPr/>
+            <a:p/>
+          </p:txBody>
         </p:sp>
         <p:sp>
           <p:nvSpPr>
@@ -43030,6 +44526,10 @@
               <a:noFill/>
             </a:ln>
           </p:spPr>
+          <p:txBody>
+            <a:bodyPr/>
+            <a:p/>
+          </p:txBody>
         </p:sp>
         <p:sp>
           <p:nvSpPr>
@@ -43096,6 +44596,10 @@
               </a:solidFill>
             </a:ln>
           </p:spPr>
+          <p:txBody>
+            <a:bodyPr/>
+            <a:p/>
+          </p:txBody>
         </p:sp>
         <p:sp>
           <p:nvSpPr>
@@ -43118,6 +44622,10 @@
               <a:noFill/>
             </a:ln>
           </p:spPr>
+          <p:txBody>
+            <a:bodyPr/>
+            <a:p/>
+          </p:txBody>
         </p:sp>
         <p:sp>
           <p:nvSpPr>
@@ -43220,6 +44728,10 @@
               <a:noFill/>
             </a:ln>
           </p:spPr>
+          <p:txBody>
+            <a:bodyPr/>
+            <a:p/>
+          </p:txBody>
         </p:sp>
         <p:sp>
           <p:nvSpPr>
@@ -43282,6 +44794,10 @@
               <a:noFill/>
             </a:ln>
           </p:spPr>
+          <p:txBody>
+            <a:bodyPr/>
+            <a:p/>
+          </p:txBody>
         </p:sp>
         <p:sp>
           <p:nvSpPr>
@@ -43344,6 +44860,10 @@
               <a:noFill/>
             </a:ln>
           </p:spPr>
+          <p:txBody>
+            <a:bodyPr/>
+            <a:p/>
+          </p:txBody>
         </p:sp>
         <p:sp>
           <p:nvSpPr>
@@ -43410,6 +44930,10 @@
               </a:solidFill>
             </a:ln>
           </p:spPr>
+          <p:txBody>
+            <a:bodyPr/>
+            <a:p/>
+          </p:txBody>
         </p:sp>
         <p:sp>
           <p:nvSpPr>
@@ -43432,6 +44956,10 @@
               <a:noFill/>
             </a:ln>
           </p:spPr>
+          <p:txBody>
+            <a:bodyPr/>
+            <a:p/>
+          </p:txBody>
         </p:sp>
         <p:sp>
           <p:nvSpPr>
@@ -43534,6 +45062,10 @@
               <a:noFill/>
             </a:ln>
           </p:spPr>
+          <p:txBody>
+            <a:bodyPr/>
+            <a:p/>
+          </p:txBody>
         </p:sp>
         <p:sp>
           <p:nvSpPr>
@@ -43596,6 +45128,10 @@
               <a:noFill/>
             </a:ln>
           </p:spPr>
+          <p:txBody>
+            <a:bodyPr/>
+            <a:p/>
+          </p:txBody>
         </p:sp>
         <p:sp>
           <p:nvSpPr>
@@ -43662,6 +45198,10 @@
               </a:solidFill>
             </a:ln>
           </p:spPr>
+          <p:txBody>
+            <a:bodyPr/>
+            <a:p/>
+          </p:txBody>
         </p:sp>
         <p:sp>
           <p:nvSpPr>
@@ -43684,6 +45224,10 @@
               <a:noFill/>
             </a:ln>
           </p:spPr>
+          <p:txBody>
+            <a:bodyPr/>
+            <a:p/>
+          </p:txBody>
         </p:sp>
         <p:sp>
           <p:nvSpPr>
@@ -43786,6 +45330,10 @@
               <a:noFill/>
             </a:ln>
           </p:spPr>
+          <p:txBody>
+            <a:bodyPr/>
+            <a:p/>
+          </p:txBody>
         </p:sp>
         <p:sp>
           <p:nvSpPr>
@@ -43848,6 +45396,10 @@
               <a:noFill/>
             </a:ln>
           </p:spPr>
+          <p:txBody>
+            <a:bodyPr/>
+            <a:p/>
+          </p:txBody>
         </p:sp>
         <p:sp>
           <p:nvSpPr>
@@ -44227,6 +45779,10 @@
               </a:solidFill>
             </a:ln>
           </p:spPr>
+          <p:txBody>
+            <a:bodyPr/>
+            <a:p/>
+          </p:txBody>
         </p:sp>
         <p:sp>
           <p:nvSpPr>
@@ -44249,6 +45805,10 @@
               <a:noFill/>
             </a:ln>
           </p:spPr>
+          <p:txBody>
+            <a:bodyPr/>
+            <a:p/>
+          </p:txBody>
         </p:sp>
         <p:sp>
           <p:nvSpPr>
@@ -44391,6 +45951,10 @@
               <a:noFill/>
             </a:ln>
           </p:spPr>
+          <p:txBody>
+            <a:bodyPr/>
+            <a:p/>
+          </p:txBody>
         </p:sp>
         <p:sp>
           <p:nvSpPr>
@@ -44533,6 +46097,10 @@
               <a:noFill/>
             </a:ln>
           </p:spPr>
+          <p:txBody>
+            <a:bodyPr/>
+            <a:p/>
+          </p:txBody>
         </p:sp>
         <p:sp>
           <p:nvSpPr>
@@ -44675,6 +46243,10 @@
               <a:noFill/>
             </a:ln>
           </p:spPr>
+          <p:txBody>
+            <a:bodyPr/>
+            <a:p/>
+          </p:txBody>
         </p:sp>
         <p:sp>
           <p:nvSpPr>
@@ -44817,6 +46389,10 @@
               <a:noFill/>
             </a:ln>
           </p:spPr>
+          <p:txBody>
+            <a:bodyPr/>
+            <a:p/>
+          </p:txBody>
         </p:sp>
         <p:sp>
           <p:nvSpPr>
@@ -44879,6 +46455,10 @@
               <a:noFill/>
             </a:ln>
           </p:spPr>
+          <p:txBody>
+            <a:bodyPr/>
+            <a:p/>
+          </p:txBody>
         </p:sp>
         <p:sp>
           <p:nvSpPr>
@@ -44941,6 +46521,10 @@
               <a:noFill/>
             </a:ln>
           </p:spPr>
+          <p:txBody>
+            <a:bodyPr/>
+            <a:p/>
+          </p:txBody>
         </p:sp>
         <p:sp>
           <p:nvSpPr>
@@ -45320,6 +46904,10 @@
               </a:solidFill>
             </a:ln>
           </p:spPr>
+          <p:txBody>
+            <a:bodyPr/>
+            <a:p/>
+          </p:txBody>
         </p:sp>
         <p:sp>
           <p:nvSpPr>
@@ -45342,6 +46930,10 @@
               <a:noFill/>
             </a:ln>
           </p:spPr>
+          <p:txBody>
+            <a:bodyPr/>
+            <a:p/>
+          </p:txBody>
         </p:sp>
         <p:sp>
           <p:nvSpPr>
@@ -45484,6 +47076,10 @@
               <a:noFill/>
             </a:ln>
           </p:spPr>
+          <p:txBody>
+            <a:bodyPr/>
+            <a:p/>
+          </p:txBody>
         </p:sp>
         <p:sp>
           <p:nvSpPr>
@@ -45626,6 +47222,10 @@
               <a:noFill/>
             </a:ln>
           </p:spPr>
+          <p:txBody>
+            <a:bodyPr/>
+            <a:p/>
+          </p:txBody>
         </p:sp>
         <p:sp>
           <p:nvSpPr>
@@ -45768,6 +47368,10 @@
               <a:noFill/>
             </a:ln>
           </p:spPr>
+          <p:txBody>
+            <a:bodyPr/>
+            <a:p/>
+          </p:txBody>
         </p:sp>
         <p:sp>
           <p:nvSpPr>
@@ -45910,6 +47514,10 @@
               <a:noFill/>
             </a:ln>
           </p:spPr>
+          <p:txBody>
+            <a:bodyPr/>
+            <a:p/>
+          </p:txBody>
         </p:sp>
         <p:sp>
           <p:nvSpPr>
@@ -45972,6 +47580,10 @@
               <a:noFill/>
             </a:ln>
           </p:spPr>
+          <p:txBody>
+            <a:bodyPr/>
+            <a:p/>
+          </p:txBody>
         </p:sp>
         <p:sp>
           <p:nvSpPr>
@@ -46034,6 +47646,10 @@
               <a:noFill/>
             </a:ln>
           </p:spPr>
+          <p:txBody>
+            <a:bodyPr/>
+            <a:p/>
+          </p:txBody>
         </p:sp>
         <p:sp>
           <p:nvSpPr>
@@ -46403,6 +48019,10 @@
               </a:solidFill>
             </a:ln>
           </p:spPr>
+          <p:txBody>
+            <a:bodyPr/>
+            <a:p/>
+          </p:txBody>
         </p:sp>
         <p:sp>
           <p:nvSpPr>
@@ -46425,6 +48045,10 @@
               <a:noFill/>
             </a:ln>
           </p:spPr>
+          <p:txBody>
+            <a:bodyPr/>
+            <a:p/>
+          </p:txBody>
         </p:sp>
         <p:sp>
           <p:nvSpPr>
@@ -46527,6 +48151,10 @@
               <a:noFill/>
             </a:ln>
           </p:spPr>
+          <p:txBody>
+            <a:bodyPr/>
+            <a:p/>
+          </p:txBody>
         </p:sp>
         <p:sp>
           <p:nvSpPr>
@@ -46589,6 +48217,10 @@
               <a:noFill/>
             </a:ln>
           </p:spPr>
+          <p:txBody>
+            <a:bodyPr/>
+            <a:p/>
+          </p:txBody>
         </p:sp>
         <p:sp>
           <p:nvSpPr>
@@ -46651,6 +48283,10 @@
               <a:noFill/>
             </a:ln>
           </p:spPr>
+          <p:txBody>
+            <a:bodyPr/>
+            <a:p/>
+          </p:txBody>
         </p:sp>
         <p:sp>
           <p:nvSpPr>
@@ -46717,6 +48353,10 @@
               </a:solidFill>
             </a:ln>
           </p:spPr>
+          <p:txBody>
+            <a:bodyPr/>
+            <a:p/>
+          </p:txBody>
         </p:sp>
         <p:sp>
           <p:nvSpPr>
@@ -46739,6 +48379,10 @@
               <a:noFill/>
             </a:ln>
           </p:spPr>
+          <p:txBody>
+            <a:bodyPr/>
+            <a:p/>
+          </p:txBody>
         </p:sp>
         <p:sp>
           <p:nvSpPr>
@@ -46841,6 +48485,10 @@
               <a:noFill/>
             </a:ln>
           </p:spPr>
+          <p:txBody>
+            <a:bodyPr/>
+            <a:p/>
+          </p:txBody>
         </p:sp>
         <p:sp>
           <p:nvSpPr>
@@ -46903,6 +48551,10 @@
               <a:noFill/>
             </a:ln>
           </p:spPr>
+          <p:txBody>
+            <a:bodyPr/>
+            <a:p/>
+          </p:txBody>
         </p:sp>
         <p:sp>
           <p:nvSpPr>
@@ -46965,6 +48617,10 @@
               <a:noFill/>
             </a:ln>
           </p:spPr>
+          <p:txBody>
+            <a:bodyPr/>
+            <a:p/>
+          </p:txBody>
         </p:sp>
         <p:sp>
           <p:nvSpPr>
@@ -47031,6 +48687,10 @@
               </a:solidFill>
             </a:ln>
           </p:spPr>
+          <p:txBody>
+            <a:bodyPr/>
+            <a:p/>
+          </p:txBody>
         </p:sp>
         <p:sp>
           <p:nvSpPr>
@@ -47053,6 +48713,10 @@
               <a:noFill/>
             </a:ln>
           </p:spPr>
+          <p:txBody>
+            <a:bodyPr/>
+            <a:p/>
+          </p:txBody>
         </p:sp>
         <p:sp>
           <p:nvSpPr>
@@ -47155,6 +48819,10 @@
               <a:noFill/>
             </a:ln>
           </p:spPr>
+          <p:txBody>
+            <a:bodyPr/>
+            <a:p/>
+          </p:txBody>
         </p:sp>
         <p:sp>
           <p:nvSpPr>
@@ -47217,6 +48885,10 @@
               <a:noFill/>
             </a:ln>
           </p:spPr>
+          <p:txBody>
+            <a:bodyPr/>
+            <a:p/>
+          </p:txBody>
         </p:sp>
         <p:sp>
           <p:nvSpPr>
@@ -47279,6 +48951,10 @@
               <a:noFill/>
             </a:ln>
           </p:spPr>
+          <p:txBody>
+            <a:bodyPr/>
+            <a:p/>
+          </p:txBody>
         </p:sp>
         <p:sp>
           <p:nvSpPr>
@@ -47343,6 +49019,10 @@
               <a:noFill/>
             </a:ln>
           </p:spPr>
+          <p:txBody>
+            <a:bodyPr/>
+            <a:p/>
+          </p:txBody>
         </p:sp>
         <p:sp>
           <p:nvSpPr>

--- a/docs/帮扶管理信息系统介绍-零基础版.pptx
+++ b/docs/帮扶管理信息系统介绍-零基础版.pptx
@@ -3881,7 +3881,7 @@
                 <a:ea typeface="+mn-ea"/>
                 <a:cs typeface="+mn-cs"/>
               </a:rPr>
-              <a:t>V1.18.14 | 2026-10-27 | FastAPI + Vue 3 + Electron + SQLite</a:t>
+              <a:t>V1.18.15 | 2026-10-27 | FastAPI + Vue 3 + Electron + SQLite</a:t>
             </a:r>
           </a:p>
         </p:txBody>
@@ -4846,7 +4846,7 @@
                 <a:ea typeface="+mn-ea"/>
                 <a:cs typeface="+mn-cs"/>
               </a:rPr>
-              <a:t>帮扶管理信息系统 v1.18.14</a:t>
+              <a:t>帮扶管理信息系统 v1.18.15</a:t>
             </a:r>
           </a:p>
         </p:txBody>
@@ -6579,7 +6579,7 @@
                 <a:ea typeface="+mn-ea"/>
                 <a:cs typeface="+mn-cs"/>
               </a:rPr>
-              <a:t>帮扶管理信息系统 v1.18.14</a:t>
+              <a:t>帮扶管理信息系统 v1.18.15</a:t>
             </a:r>
           </a:p>
         </p:txBody>
@@ -7478,7 +7478,7 @@
                 <a:ea typeface="+mn-ea"/>
                 <a:cs typeface="+mn-cs"/>
               </a:rPr>
-              <a:t>帮扶管理信息系统 v1.18.14</a:t>
+              <a:t>帮扶管理信息系统 v1.18.15</a:t>
             </a:r>
           </a:p>
         </p:txBody>
@@ -8721,7 +8721,7 @@
                 <a:ea typeface="+mn-ea"/>
                 <a:cs typeface="+mn-cs"/>
               </a:rPr>
-              <a:t>帮扶管理信息系统 v1.18.14</a:t>
+              <a:t>帮扶管理信息系统 v1.18.15</a:t>
             </a:r>
           </a:p>
         </p:txBody>
@@ -10300,7 +10300,7 @@
                 <a:ea typeface="+mn-ea"/>
                 <a:cs typeface="+mn-cs"/>
               </a:rPr>
-              <a:t>帮扶管理信息系统 v1.18.14</a:t>
+              <a:t>帮扶管理信息系统 v1.18.15</a:t>
             </a:r>
           </a:p>
         </p:txBody>
@@ -11503,7 +11503,7 @@
                 <a:ea typeface="+mn-ea"/>
                 <a:cs typeface="+mn-cs"/>
               </a:rPr>
-              <a:t>帮扶管理信息系统 v1.18.14</a:t>
+              <a:t>帮扶管理信息系统 v1.18.15</a:t>
             </a:r>
           </a:p>
         </p:txBody>
@@ -12680,7 +12680,7 @@
                 <a:ea typeface="+mn-ea"/>
                 <a:cs typeface="+mn-cs"/>
               </a:rPr>
-              <a:t>帮扶管理信息系统 v1.18.14</a:t>
+              <a:t>帮扶管理信息系统 v1.18.15</a:t>
             </a:r>
           </a:p>
         </p:txBody>
@@ -13933,7 +13933,7 @@
                 <a:ea typeface="+mn-ea"/>
                 <a:cs typeface="+mn-cs"/>
               </a:rPr>
-              <a:t>帮扶管理信息系统 v1.18.14</a:t>
+              <a:t>帮扶管理信息系统 v1.18.15</a:t>
             </a:r>
           </a:p>
         </p:txBody>
@@ -14566,7 +14566,7 @@
                 <a:ea typeface="+mn-ea"/>
                 <a:cs typeface="+mn-cs"/>
               </a:rPr>
-              <a:t>帮扶管理信息系统 v1.18.14</a:t>
+              <a:t>帮扶管理信息系统 v1.18.15</a:t>
             </a:r>
           </a:p>
         </p:txBody>
@@ -15775,7 +15775,7 @@
                 <a:ea typeface="+mn-ea"/>
                 <a:cs typeface="+mn-cs"/>
               </a:rPr>
-              <a:t>帮扶管理信息系统 v1.18.14</a:t>
+              <a:t>帮扶管理信息系统 v1.18.15</a:t>
             </a:r>
           </a:p>
         </p:txBody>
@@ -16674,7 +16674,7 @@
                 <a:ea typeface="+mn-ea"/>
                 <a:cs typeface="+mn-cs"/>
               </a:rPr>
-              <a:t>帮扶管理信息系统 v1.18.14</a:t>
+              <a:t>帮扶管理信息系统 v1.18.15</a:t>
             </a:r>
           </a:p>
         </p:txBody>
@@ -18195,7 +18195,7 @@
                 <a:ea typeface="+mn-ea"/>
                 <a:cs typeface="+mn-cs"/>
               </a:rPr>
-              <a:t>帮扶管理信息系统 v1.18.14</a:t>
+              <a:t>帮扶管理信息系统 v1.18.15</a:t>
             </a:r>
           </a:p>
         </p:txBody>
@@ -19302,7 +19302,7 @@
                 <a:ea typeface="+mn-ea"/>
                 <a:cs typeface="+mn-cs"/>
               </a:rPr>
-              <a:t>帮扶管理信息系统 v1.18.14</a:t>
+              <a:t>帮扶管理信息系统 v1.18.15</a:t>
             </a:r>
           </a:p>
         </p:txBody>
@@ -20081,7 +20081,7 @@
                 <a:ea typeface="+mn-ea"/>
                 <a:cs typeface="+mn-cs"/>
               </a:rPr>
-              <a:t>帮扶管理信息系统 v1.18.14</a:t>
+              <a:t>帮扶管理信息系统 v1.18.15</a:t>
             </a:r>
           </a:p>
         </p:txBody>
@@ -20996,7 +20996,7 @@
                 <a:ea typeface="+mn-ea"/>
                 <a:cs typeface="+mn-cs"/>
               </a:rPr>
-              <a:t>帮扶管理信息系统 v1.18.14</a:t>
+              <a:t>帮扶管理信息系统 v1.18.15</a:t>
             </a:r>
           </a:p>
         </p:txBody>
@@ -21921,7 +21921,7 @@
                 <a:ea typeface="+mn-ea"/>
                 <a:cs typeface="+mn-cs"/>
               </a:rPr>
-              <a:t>帮扶管理信息系统 v1.18.14</a:t>
+              <a:t>帮扶管理信息系统 v1.18.15</a:t>
             </a:r>
           </a:p>
         </p:txBody>
@@ -22976,7 +22976,7 @@
                 <a:ea typeface="+mn-ea"/>
                 <a:cs typeface="+mn-cs"/>
               </a:rPr>
-              <a:t>帮扶管理信息系统 v1.18.14</a:t>
+              <a:t>帮扶管理信息系统 v1.18.15</a:t>
             </a:r>
           </a:p>
         </p:txBody>
@@ -24113,7 +24113,7 @@
                 <a:ea typeface="+mn-ea"/>
                 <a:cs typeface="+mn-cs"/>
               </a:rPr>
-              <a:t>帮扶管理信息系统 v1.18.14</a:t>
+              <a:t>帮扶管理信息系统 v1.18.15</a:t>
             </a:r>
           </a:p>
         </p:txBody>
@@ -25220,7 +25220,7 @@
                 <a:ea typeface="+mn-ea"/>
                 <a:cs typeface="+mn-cs"/>
               </a:rPr>
-              <a:t>帮扶管理信息系统 v1.18.14</a:t>
+              <a:t>帮扶管理信息系统 v1.18.15</a:t>
             </a:r>
           </a:p>
         </p:txBody>
@@ -26861,7 +26861,7 @@
                 <a:ea typeface="+mn-ea"/>
                 <a:cs typeface="+mn-cs"/>
               </a:rPr>
-              <a:t>帮扶管理信息系统 v1.18.14</a:t>
+              <a:t>帮扶管理信息系统 v1.18.15</a:t>
             </a:r>
           </a:p>
         </p:txBody>
@@ -28319,7 +28319,7 @@
                   <a:ea typeface="+mn-ea"/>
                   <a:cs typeface="+mn-cs"/>
                 </a:rPr>
-                <a:t>数据来源：2026-10-27 实测（v1.18.14）—— 后端 14,870 用例 + 前端 7,374 用例</a:t>
+                <a:t>数据来源：2026-10-27 实测（v1.18.15）—— 后端 14,870 用例 + 前端 7,374 用例</a:t>
               </a:r>
             </a:p>
           </p:txBody>
@@ -28360,7 +28360,7 @@
                 <a:ea typeface="+mn-ea"/>
                 <a:cs typeface="+mn-cs"/>
               </a:rPr>
-              <a:t>帮扶管理信息系统 v1.18.14</a:t>
+              <a:t>帮扶管理信息系统 v1.18.15</a:t>
             </a:r>
           </a:p>
         </p:txBody>
@@ -29391,7 +29391,7 @@
                 <a:ea typeface="+mn-ea"/>
                 <a:cs typeface="+mn-cs"/>
               </a:rPr>
-              <a:t>帮扶管理信息系统 v1.18.14</a:t>
+              <a:t>帮扶管理信息系统 v1.18.15</a:t>
             </a:r>
           </a:p>
         </p:txBody>
@@ -30874,7 +30874,7 @@
                 <a:ea typeface="+mn-ea"/>
                 <a:cs typeface="+mn-cs"/>
               </a:rPr>
-              <a:t>帮扶管理信息系统 v1.18.14</a:t>
+              <a:t>帮扶管理信息系统 v1.18.15</a:t>
             </a:r>
           </a:p>
         </p:txBody>
@@ -31789,7 +31789,7 @@
                 <a:ea typeface="+mn-ea"/>
                 <a:cs typeface="+mn-cs"/>
               </a:rPr>
-              <a:t>帮扶管理信息系统 v1.18.14</a:t>
+              <a:t>帮扶管理信息系统 v1.18.15</a:t>
             </a:r>
           </a:p>
         </p:txBody>
@@ -33426,7 +33426,7 @@
                 <a:ea typeface="+mn-ea"/>
                 <a:cs typeface="+mn-cs"/>
               </a:rPr>
-              <a:t>帮扶管理信息系统 v1.18.14</a:t>
+              <a:t>帮扶管理信息系统 v1.18.15</a:t>
             </a:r>
           </a:p>
         </p:txBody>
@@ -34351,7 +34351,7 @@
                 <a:ea typeface="+mn-ea"/>
                 <a:cs typeface="+mn-cs"/>
               </a:rPr>
-              <a:t>帮扶管理信息系统 v1.18.14</a:t>
+              <a:t>帮扶管理信息系统 v1.18.15</a:t>
             </a:r>
           </a:p>
         </p:txBody>
@@ -35316,7 +35316,7 @@
                 <a:ea typeface="+mn-ea"/>
                 <a:cs typeface="+mn-cs"/>
               </a:rPr>
-              <a:t>帮扶管理信息系统 v1.18.14</a:t>
+              <a:t>帮扶管理信息系统 v1.18.15</a:t>
             </a:r>
           </a:p>
         </p:txBody>
@@ -36539,7 +36539,7 @@
                 <a:ea typeface="+mn-ea"/>
                 <a:cs typeface="+mn-cs"/>
               </a:rPr>
-              <a:t>帮扶管理信息系统 v1.18.14</a:t>
+              <a:t>帮扶管理信息系统 v1.18.15</a:t>
             </a:r>
           </a:p>
         </p:txBody>
@@ -37764,7 +37764,7 @@
                 <a:ea typeface="+mn-ea"/>
                 <a:cs typeface="+mn-cs"/>
               </a:rPr>
-              <a:t>帮扶管理信息系统 v1.18.14</a:t>
+              <a:t>帮扶管理信息系统 v1.18.15</a:t>
             </a:r>
           </a:p>
         </p:txBody>
@@ -39123,7 +39123,7 @@
                 <a:ea typeface="+mn-ea"/>
                 <a:cs typeface="+mn-cs"/>
               </a:rPr>
-              <a:t>帮扶管理信息系统 v1.18.14</a:t>
+              <a:t>帮扶管理信息系统 v1.18.15</a:t>
             </a:r>
           </a:p>
         </p:txBody>
@@ -40830,7 +40830,7 @@
                 <a:ea typeface="+mn-ea"/>
                 <a:cs typeface="+mn-cs"/>
               </a:rPr>
-              <a:t>帮扶管理信息系统 v1.18.14</a:t>
+              <a:t>帮扶管理信息系统 v1.18.15</a:t>
             </a:r>
           </a:p>
         </p:txBody>
@@ -42293,7 +42293,7 @@
                 <a:ea typeface="+mn-ea"/>
                 <a:cs typeface="+mn-cs"/>
               </a:rPr>
-              <a:t>帮扶管理信息系统 v1.18.14</a:t>
+              <a:t>帮扶管理信息系统 v1.18.15</a:t>
             </a:r>
           </a:p>
         </p:txBody>
@@ -42794,7 +42794,7 @@
                 <a:ea typeface="+mn-ea"/>
                 <a:cs typeface="+mn-cs"/>
               </a:rPr>
-              <a:t>帮扶管理信息系统 v1.18.14</a:t>
+              <a:t>帮扶管理信息系统 v1.18.15</a:t>
             </a:r>
           </a:p>
         </p:txBody>
@@ -43111,7 +43111,7 @@
                 <a:ea typeface="+mn-ea"/>
                 <a:cs typeface="+mn-cs"/>
               </a:rPr>
-              <a:t>帮扶管理信息系统 v1.18.14 · 仓库：github.com/lzh745200/MRRS · 完整文档见 docs/ 目录</a:t>
+              <a:t>帮扶管理信息系统 v1.18.15 · 仓库：github.com/lzh745200/MRRS · 完整文档见 docs/ 目录</a:t>
             </a:r>
           </a:p>
         </p:txBody>
@@ -43930,7 +43930,7 @@
                 <a:ea typeface="+mn-ea"/>
                 <a:cs typeface="+mn-cs"/>
               </a:rPr>
-              <a:t>帮扶管理信息系统 v1.18.14</a:t>
+              <a:t>帮扶管理信息系统 v1.18.15</a:t>
             </a:r>
           </a:p>
         </p:txBody>
@@ -45477,7 +45477,7 @@
                 <a:ea typeface="+mn-ea"/>
                 <a:cs typeface="+mn-cs"/>
               </a:rPr>
-              <a:t>帮扶管理信息系统 v1.18.14</a:t>
+              <a:t>帮扶管理信息系统 v1.18.15</a:t>
             </a:r>
           </a:p>
         </p:txBody>
@@ -46602,7 +46602,7 @@
                 <a:ea typeface="+mn-ea"/>
                 <a:cs typeface="+mn-cs"/>
               </a:rPr>
-              <a:t>帮扶管理信息系统 v1.18.14</a:t>
+              <a:t>帮扶管理信息系统 v1.18.15</a:t>
             </a:r>
           </a:p>
         </p:txBody>
@@ -47727,7 +47727,7 @@
                 <a:ea typeface="+mn-ea"/>
                 <a:cs typeface="+mn-cs"/>
               </a:rPr>
-              <a:t>帮扶管理信息系统 v1.18.14</a:t>
+              <a:t>帮扶管理信息系统 v1.18.15</a:t>
             </a:r>
           </a:p>
         </p:txBody>
@@ -49100,7 +49100,7 @@
                 <a:ea typeface="+mn-ea"/>
                 <a:cs typeface="+mn-cs"/>
               </a:rPr>
-              <a:t>帮扶管理信息系统 v1.18.14</a:t>
+              <a:t>帮扶管理信息系统 v1.18.15</a:t>
             </a:r>
           </a:p>
         </p:txBody>

--- a/docs/帮扶管理信息系统介绍-零基础版.pptx
+++ b/docs/帮扶管理信息系统介绍-零基础版.pptx
@@ -3881,7 +3881,7 @@
                 <a:ea typeface="+mn-ea"/>
                 <a:cs typeface="+mn-cs"/>
               </a:rPr>
-              <a:t>V1.18.15 | 2026-10-27 | FastAPI + Vue 3 + Electron + SQLite</a:t>
+              <a:t>V1.18.16 | 2026-10-27 | FastAPI + Vue 3 + Electron + SQLite</a:t>
             </a:r>
           </a:p>
         </p:txBody>
@@ -4846,7 +4846,7 @@
                 <a:ea typeface="+mn-ea"/>
                 <a:cs typeface="+mn-cs"/>
               </a:rPr>
-              <a:t>帮扶管理信息系统 v1.18.15</a:t>
+              <a:t>帮扶管理信息系统 v1.18.16</a:t>
             </a:r>
           </a:p>
         </p:txBody>
@@ -6579,7 +6579,7 @@
                 <a:ea typeface="+mn-ea"/>
                 <a:cs typeface="+mn-cs"/>
               </a:rPr>
-              <a:t>帮扶管理信息系统 v1.18.15</a:t>
+              <a:t>帮扶管理信息系统 v1.18.16</a:t>
             </a:r>
           </a:p>
         </p:txBody>
@@ -7478,7 +7478,7 @@
                 <a:ea typeface="+mn-ea"/>
                 <a:cs typeface="+mn-cs"/>
               </a:rPr>
-              <a:t>帮扶管理信息系统 v1.18.15</a:t>
+              <a:t>帮扶管理信息系统 v1.18.16</a:t>
             </a:r>
           </a:p>
         </p:txBody>
@@ -8721,7 +8721,7 @@
                 <a:ea typeface="+mn-ea"/>
                 <a:cs typeface="+mn-cs"/>
               </a:rPr>
-              <a:t>帮扶管理信息系统 v1.18.15</a:t>
+              <a:t>帮扶管理信息系统 v1.18.16</a:t>
             </a:r>
           </a:p>
         </p:txBody>
@@ -10300,7 +10300,7 @@
                 <a:ea typeface="+mn-ea"/>
                 <a:cs typeface="+mn-cs"/>
               </a:rPr>
-              <a:t>帮扶管理信息系统 v1.18.15</a:t>
+              <a:t>帮扶管理信息系统 v1.18.16</a:t>
             </a:r>
           </a:p>
         </p:txBody>
@@ -11503,7 +11503,7 @@
                 <a:ea typeface="+mn-ea"/>
                 <a:cs typeface="+mn-cs"/>
               </a:rPr>
-              <a:t>帮扶管理信息系统 v1.18.15</a:t>
+              <a:t>帮扶管理信息系统 v1.18.16</a:t>
             </a:r>
           </a:p>
         </p:txBody>
@@ -12680,7 +12680,7 @@
                 <a:ea typeface="+mn-ea"/>
                 <a:cs typeface="+mn-cs"/>
               </a:rPr>
-              <a:t>帮扶管理信息系统 v1.18.15</a:t>
+              <a:t>帮扶管理信息系统 v1.18.16</a:t>
             </a:r>
           </a:p>
         </p:txBody>
@@ -13933,7 +13933,7 @@
                 <a:ea typeface="+mn-ea"/>
                 <a:cs typeface="+mn-cs"/>
               </a:rPr>
-              <a:t>帮扶管理信息系统 v1.18.15</a:t>
+              <a:t>帮扶管理信息系统 v1.18.16</a:t>
             </a:r>
           </a:p>
         </p:txBody>
@@ -14566,7 +14566,7 @@
                 <a:ea typeface="+mn-ea"/>
                 <a:cs typeface="+mn-cs"/>
               </a:rPr>
-              <a:t>帮扶管理信息系统 v1.18.15</a:t>
+              <a:t>帮扶管理信息系统 v1.18.16</a:t>
             </a:r>
           </a:p>
         </p:txBody>
@@ -15775,7 +15775,7 @@
                 <a:ea typeface="+mn-ea"/>
                 <a:cs typeface="+mn-cs"/>
               </a:rPr>
-              <a:t>帮扶管理信息系统 v1.18.15</a:t>
+              <a:t>帮扶管理信息系统 v1.18.16</a:t>
             </a:r>
           </a:p>
         </p:txBody>
@@ -16674,7 +16674,7 @@
                 <a:ea typeface="+mn-ea"/>
                 <a:cs typeface="+mn-cs"/>
               </a:rPr>
-              <a:t>帮扶管理信息系统 v1.18.15</a:t>
+              <a:t>帮扶管理信息系统 v1.18.16</a:t>
             </a:r>
           </a:p>
         </p:txBody>
@@ -18195,7 +18195,7 @@
                 <a:ea typeface="+mn-ea"/>
                 <a:cs typeface="+mn-cs"/>
               </a:rPr>
-              <a:t>帮扶管理信息系统 v1.18.15</a:t>
+              <a:t>帮扶管理信息系统 v1.18.16</a:t>
             </a:r>
           </a:p>
         </p:txBody>
@@ -19302,7 +19302,7 @@
                 <a:ea typeface="+mn-ea"/>
                 <a:cs typeface="+mn-cs"/>
               </a:rPr>
-              <a:t>帮扶管理信息系统 v1.18.15</a:t>
+              <a:t>帮扶管理信息系统 v1.18.16</a:t>
             </a:r>
           </a:p>
         </p:txBody>
@@ -20081,7 +20081,7 @@
                 <a:ea typeface="+mn-ea"/>
                 <a:cs typeface="+mn-cs"/>
               </a:rPr>
-              <a:t>帮扶管理信息系统 v1.18.15</a:t>
+              <a:t>帮扶管理信息系统 v1.18.16</a:t>
             </a:r>
           </a:p>
         </p:txBody>
@@ -20996,7 +20996,7 @@
                 <a:ea typeface="+mn-ea"/>
                 <a:cs typeface="+mn-cs"/>
               </a:rPr>
-              <a:t>帮扶管理信息系统 v1.18.15</a:t>
+              <a:t>帮扶管理信息系统 v1.18.16</a:t>
             </a:r>
           </a:p>
         </p:txBody>
@@ -21921,7 +21921,7 @@
                 <a:ea typeface="+mn-ea"/>
                 <a:cs typeface="+mn-cs"/>
               </a:rPr>
-              <a:t>帮扶管理信息系统 v1.18.15</a:t>
+              <a:t>帮扶管理信息系统 v1.18.16</a:t>
             </a:r>
           </a:p>
         </p:txBody>
@@ -22976,7 +22976,7 @@
                 <a:ea typeface="+mn-ea"/>
                 <a:cs typeface="+mn-cs"/>
               </a:rPr>
-              <a:t>帮扶管理信息系统 v1.18.15</a:t>
+              <a:t>帮扶管理信息系统 v1.18.16</a:t>
             </a:r>
           </a:p>
         </p:txBody>
@@ -24113,7 +24113,7 @@
                 <a:ea typeface="+mn-ea"/>
                 <a:cs typeface="+mn-cs"/>
               </a:rPr>
-              <a:t>帮扶管理信息系统 v1.18.15</a:t>
+              <a:t>帮扶管理信息系统 v1.18.16</a:t>
             </a:r>
           </a:p>
         </p:txBody>
@@ -25220,7 +25220,7 @@
                 <a:ea typeface="+mn-ea"/>
                 <a:cs typeface="+mn-cs"/>
               </a:rPr>
-              <a:t>帮扶管理信息系统 v1.18.15</a:t>
+              <a:t>帮扶管理信息系统 v1.18.16</a:t>
             </a:r>
           </a:p>
         </p:txBody>
@@ -26861,7 +26861,7 @@
                 <a:ea typeface="+mn-ea"/>
                 <a:cs typeface="+mn-cs"/>
               </a:rPr>
-              <a:t>帮扶管理信息系统 v1.18.15</a:t>
+              <a:t>帮扶管理信息系统 v1.18.16</a:t>
             </a:r>
           </a:p>
         </p:txBody>
@@ -28360,7 +28360,7 @@
                 <a:ea typeface="+mn-ea"/>
                 <a:cs typeface="+mn-cs"/>
               </a:rPr>
-              <a:t>帮扶管理信息系统 v1.18.15</a:t>
+              <a:t>帮扶管理信息系统 v1.18.16</a:t>
             </a:r>
           </a:p>
         </p:txBody>
@@ -29391,7 +29391,7 @@
                 <a:ea typeface="+mn-ea"/>
                 <a:cs typeface="+mn-cs"/>
               </a:rPr>
-              <a:t>帮扶管理信息系统 v1.18.15</a:t>
+              <a:t>帮扶管理信息系统 v1.18.16</a:t>
             </a:r>
           </a:p>
         </p:txBody>
@@ -30874,7 +30874,7 @@
                 <a:ea typeface="+mn-ea"/>
                 <a:cs typeface="+mn-cs"/>
               </a:rPr>
-              <a:t>帮扶管理信息系统 v1.18.15</a:t>
+              <a:t>帮扶管理信息系统 v1.18.16</a:t>
             </a:r>
           </a:p>
         </p:txBody>
@@ -31789,7 +31789,7 @@
                 <a:ea typeface="+mn-ea"/>
                 <a:cs typeface="+mn-cs"/>
               </a:rPr>
-              <a:t>帮扶管理信息系统 v1.18.15</a:t>
+              <a:t>帮扶管理信息系统 v1.18.16</a:t>
             </a:r>
           </a:p>
         </p:txBody>
@@ -33426,7 +33426,7 @@
                 <a:ea typeface="+mn-ea"/>
                 <a:cs typeface="+mn-cs"/>
               </a:rPr>
-              <a:t>帮扶管理信息系统 v1.18.15</a:t>
+              <a:t>帮扶管理信息系统 v1.18.16</a:t>
             </a:r>
           </a:p>
         </p:txBody>
@@ -34351,7 +34351,7 @@
                 <a:ea typeface="+mn-ea"/>
                 <a:cs typeface="+mn-cs"/>
               </a:rPr>
-              <a:t>帮扶管理信息系统 v1.18.15</a:t>
+              <a:t>帮扶管理信息系统 v1.18.16</a:t>
             </a:r>
           </a:p>
         </p:txBody>
@@ -35316,7 +35316,7 @@
                 <a:ea typeface="+mn-ea"/>
                 <a:cs typeface="+mn-cs"/>
               </a:rPr>
-              <a:t>帮扶管理信息系统 v1.18.15</a:t>
+              <a:t>帮扶管理信息系统 v1.18.16</a:t>
             </a:r>
           </a:p>
         </p:txBody>
@@ -36539,7 +36539,7 @@
                 <a:ea typeface="+mn-ea"/>
                 <a:cs typeface="+mn-cs"/>
               </a:rPr>
-              <a:t>帮扶管理信息系统 v1.18.15</a:t>
+              <a:t>帮扶管理信息系统 v1.18.16</a:t>
             </a:r>
           </a:p>
         </p:txBody>
@@ -37764,7 +37764,7 @@
                 <a:ea typeface="+mn-ea"/>
                 <a:cs typeface="+mn-cs"/>
               </a:rPr>
-              <a:t>帮扶管理信息系统 v1.18.15</a:t>
+              <a:t>帮扶管理信息系统 v1.18.16</a:t>
             </a:r>
           </a:p>
         </p:txBody>
@@ -39123,7 +39123,7 @@
                 <a:ea typeface="+mn-ea"/>
                 <a:cs typeface="+mn-cs"/>
               </a:rPr>
-              <a:t>帮扶管理信息系统 v1.18.15</a:t>
+              <a:t>帮扶管理信息系统 v1.18.16</a:t>
             </a:r>
           </a:p>
         </p:txBody>
@@ -40830,7 +40830,7 @@
                 <a:ea typeface="+mn-ea"/>
                 <a:cs typeface="+mn-cs"/>
               </a:rPr>
-              <a:t>帮扶管理信息系统 v1.18.15</a:t>
+              <a:t>帮扶管理信息系统 v1.18.16</a:t>
             </a:r>
           </a:p>
         </p:txBody>
@@ -42293,7 +42293,7 @@
                 <a:ea typeface="+mn-ea"/>
                 <a:cs typeface="+mn-cs"/>
               </a:rPr>
-              <a:t>帮扶管理信息系统 v1.18.15</a:t>
+              <a:t>帮扶管理信息系统 v1.18.16</a:t>
             </a:r>
           </a:p>
         </p:txBody>
@@ -42794,7 +42794,7 @@
                 <a:ea typeface="+mn-ea"/>
                 <a:cs typeface="+mn-cs"/>
               </a:rPr>
-              <a:t>帮扶管理信息系统 v1.18.15</a:t>
+              <a:t>帮扶管理信息系统 v1.18.16</a:t>
             </a:r>
           </a:p>
         </p:txBody>
@@ -43111,7 +43111,7 @@
                 <a:ea typeface="+mn-ea"/>
                 <a:cs typeface="+mn-cs"/>
               </a:rPr>
-              <a:t>帮扶管理信息系统 v1.18.15 · 仓库：github.com/lzh745200/MRRS · 完整文档见 docs/ 目录</a:t>
+              <a:t>帮扶管理信息系统 v1.18.16 · 仓库：github.com/lzh745200/MRRS · 完整文档见 docs/ 目录</a:t>
             </a:r>
           </a:p>
         </p:txBody>
@@ -43930,7 +43930,7 @@
                 <a:ea typeface="+mn-ea"/>
                 <a:cs typeface="+mn-cs"/>
               </a:rPr>
-              <a:t>帮扶管理信息系统 v1.18.15</a:t>
+              <a:t>帮扶管理信息系统 v1.18.16</a:t>
             </a:r>
           </a:p>
         </p:txBody>
@@ -45477,7 +45477,7 @@
                 <a:ea typeface="+mn-ea"/>
                 <a:cs typeface="+mn-cs"/>
               </a:rPr>
-              <a:t>帮扶管理信息系统 v1.18.15</a:t>
+              <a:t>帮扶管理信息系统 v1.18.16</a:t>
             </a:r>
           </a:p>
         </p:txBody>
@@ -46602,7 +46602,7 @@
                 <a:ea typeface="+mn-ea"/>
                 <a:cs typeface="+mn-cs"/>
               </a:rPr>
-              <a:t>帮扶管理信息系统 v1.18.15</a:t>
+              <a:t>帮扶管理信息系统 v1.18.16</a:t>
             </a:r>
           </a:p>
         </p:txBody>
@@ -47727,7 +47727,7 @@
                 <a:ea typeface="+mn-ea"/>
                 <a:cs typeface="+mn-cs"/>
               </a:rPr>
-              <a:t>帮扶管理信息系统 v1.18.15</a:t>
+              <a:t>帮扶管理信息系统 v1.18.16</a:t>
             </a:r>
           </a:p>
         </p:txBody>
@@ -49100,7 +49100,7 @@
                 <a:ea typeface="+mn-ea"/>
                 <a:cs typeface="+mn-cs"/>
               </a:rPr>
-              <a:t>帮扶管理信息系统 v1.18.15</a:t>
+              <a:t>帮扶管理信息系统 v1.18.16</a:t>
             </a:r>
           </a:p>
         </p:txBody>

--- a/docs/帮扶管理信息系统介绍-零基础版.pptx
+++ b/docs/帮扶管理信息系统介绍-零基础版.pptx
@@ -3881,7 +3881,7 @@
                 <a:ea typeface="+mn-ea"/>
                 <a:cs typeface="+mn-cs"/>
               </a:rPr>
-              <a:t>V1.18.16 | 2026-10-27 | FastAPI + Vue 3 + Electron + SQLite</a:t>
+              <a:t>V1.18.17 | 2026-10-27 | FastAPI + Vue 3 + Electron + SQLite</a:t>
             </a:r>
           </a:p>
         </p:txBody>
@@ -4846,7 +4846,7 @@
                 <a:ea typeface="+mn-ea"/>
                 <a:cs typeface="+mn-cs"/>
               </a:rPr>
-              <a:t>帮扶管理信息系统 v1.18.16</a:t>
+              <a:t>帮扶管理信息系统 v1.18.17</a:t>
             </a:r>
           </a:p>
         </p:txBody>
@@ -6579,7 +6579,7 @@
                 <a:ea typeface="+mn-ea"/>
                 <a:cs typeface="+mn-cs"/>
               </a:rPr>
-              <a:t>帮扶管理信息系统 v1.18.16</a:t>
+              <a:t>帮扶管理信息系统 v1.18.17</a:t>
             </a:r>
           </a:p>
         </p:txBody>
@@ -7478,7 +7478,7 @@
                 <a:ea typeface="+mn-ea"/>
                 <a:cs typeface="+mn-cs"/>
               </a:rPr>
-              <a:t>帮扶管理信息系统 v1.18.16</a:t>
+              <a:t>帮扶管理信息系统 v1.18.17</a:t>
             </a:r>
           </a:p>
         </p:txBody>
@@ -8721,7 +8721,7 @@
                 <a:ea typeface="+mn-ea"/>
                 <a:cs typeface="+mn-cs"/>
               </a:rPr>
-              <a:t>帮扶管理信息系统 v1.18.16</a:t>
+              <a:t>帮扶管理信息系统 v1.18.17</a:t>
             </a:r>
           </a:p>
         </p:txBody>
@@ -10300,7 +10300,7 @@
                 <a:ea typeface="+mn-ea"/>
                 <a:cs typeface="+mn-cs"/>
               </a:rPr>
-              <a:t>帮扶管理信息系统 v1.18.16</a:t>
+              <a:t>帮扶管理信息系统 v1.18.17</a:t>
             </a:r>
           </a:p>
         </p:txBody>
@@ -11503,7 +11503,7 @@
                 <a:ea typeface="+mn-ea"/>
                 <a:cs typeface="+mn-cs"/>
               </a:rPr>
-              <a:t>帮扶管理信息系统 v1.18.16</a:t>
+              <a:t>帮扶管理信息系统 v1.18.17</a:t>
             </a:r>
           </a:p>
         </p:txBody>
@@ -12680,7 +12680,7 @@
                 <a:ea typeface="+mn-ea"/>
                 <a:cs typeface="+mn-cs"/>
               </a:rPr>
-              <a:t>帮扶管理信息系统 v1.18.16</a:t>
+              <a:t>帮扶管理信息系统 v1.18.17</a:t>
             </a:r>
           </a:p>
         </p:txBody>
@@ -13933,7 +13933,7 @@
                 <a:ea typeface="+mn-ea"/>
                 <a:cs typeface="+mn-cs"/>
               </a:rPr>
-              <a:t>帮扶管理信息系统 v1.18.16</a:t>
+              <a:t>帮扶管理信息系统 v1.18.17</a:t>
             </a:r>
           </a:p>
         </p:txBody>
@@ -14566,7 +14566,7 @@
                 <a:ea typeface="+mn-ea"/>
                 <a:cs typeface="+mn-cs"/>
               </a:rPr>
-              <a:t>帮扶管理信息系统 v1.18.16</a:t>
+              <a:t>帮扶管理信息系统 v1.18.17</a:t>
             </a:r>
           </a:p>
         </p:txBody>
@@ -15775,7 +15775,7 @@
                 <a:ea typeface="+mn-ea"/>
                 <a:cs typeface="+mn-cs"/>
               </a:rPr>
-              <a:t>帮扶管理信息系统 v1.18.16</a:t>
+              <a:t>帮扶管理信息系统 v1.18.17</a:t>
             </a:r>
           </a:p>
         </p:txBody>
@@ -16674,7 +16674,7 @@
                 <a:ea typeface="+mn-ea"/>
                 <a:cs typeface="+mn-cs"/>
               </a:rPr>
-              <a:t>帮扶管理信息系统 v1.18.16</a:t>
+              <a:t>帮扶管理信息系统 v1.18.17</a:t>
             </a:r>
           </a:p>
         </p:txBody>
@@ -18195,7 +18195,7 @@
                 <a:ea typeface="+mn-ea"/>
                 <a:cs typeface="+mn-cs"/>
               </a:rPr>
-              <a:t>帮扶管理信息系统 v1.18.16</a:t>
+              <a:t>帮扶管理信息系统 v1.18.17</a:t>
             </a:r>
           </a:p>
         </p:txBody>
@@ -19302,7 +19302,7 @@
                 <a:ea typeface="+mn-ea"/>
                 <a:cs typeface="+mn-cs"/>
               </a:rPr>
-              <a:t>帮扶管理信息系统 v1.18.16</a:t>
+              <a:t>帮扶管理信息系统 v1.18.17</a:t>
             </a:r>
           </a:p>
         </p:txBody>
@@ -20081,7 +20081,7 @@
                 <a:ea typeface="+mn-ea"/>
                 <a:cs typeface="+mn-cs"/>
               </a:rPr>
-              <a:t>帮扶管理信息系统 v1.18.16</a:t>
+              <a:t>帮扶管理信息系统 v1.18.17</a:t>
             </a:r>
           </a:p>
         </p:txBody>
@@ -20996,7 +20996,7 @@
                 <a:ea typeface="+mn-ea"/>
                 <a:cs typeface="+mn-cs"/>
               </a:rPr>
-              <a:t>帮扶管理信息系统 v1.18.16</a:t>
+              <a:t>帮扶管理信息系统 v1.18.17</a:t>
             </a:r>
           </a:p>
         </p:txBody>
@@ -21921,7 +21921,7 @@
                 <a:ea typeface="+mn-ea"/>
                 <a:cs typeface="+mn-cs"/>
               </a:rPr>
-              <a:t>帮扶管理信息系统 v1.18.16</a:t>
+              <a:t>帮扶管理信息系统 v1.18.17</a:t>
             </a:r>
           </a:p>
         </p:txBody>
@@ -22976,7 +22976,7 @@
                 <a:ea typeface="+mn-ea"/>
                 <a:cs typeface="+mn-cs"/>
               </a:rPr>
-              <a:t>帮扶管理信息系统 v1.18.16</a:t>
+              <a:t>帮扶管理信息系统 v1.18.17</a:t>
             </a:r>
           </a:p>
         </p:txBody>
@@ -24113,7 +24113,7 @@
                 <a:ea typeface="+mn-ea"/>
                 <a:cs typeface="+mn-cs"/>
               </a:rPr>
-              <a:t>帮扶管理信息系统 v1.18.16</a:t>
+              <a:t>帮扶管理信息系统 v1.18.17</a:t>
             </a:r>
           </a:p>
         </p:txBody>
@@ -25220,7 +25220,7 @@
                 <a:ea typeface="+mn-ea"/>
                 <a:cs typeface="+mn-cs"/>
               </a:rPr>
-              <a:t>帮扶管理信息系统 v1.18.16</a:t>
+              <a:t>帮扶管理信息系统 v1.18.17</a:t>
             </a:r>
           </a:p>
         </p:txBody>
@@ -26861,7 +26861,7 @@
                 <a:ea typeface="+mn-ea"/>
                 <a:cs typeface="+mn-cs"/>
               </a:rPr>
-              <a:t>帮扶管理信息系统 v1.18.16</a:t>
+              <a:t>帮扶管理信息系统 v1.18.17</a:t>
             </a:r>
           </a:p>
         </p:txBody>
@@ -28360,7 +28360,7 @@
                 <a:ea typeface="+mn-ea"/>
                 <a:cs typeface="+mn-cs"/>
               </a:rPr>
-              <a:t>帮扶管理信息系统 v1.18.16</a:t>
+              <a:t>帮扶管理信息系统 v1.18.17</a:t>
             </a:r>
           </a:p>
         </p:txBody>
@@ -29391,7 +29391,7 @@
                 <a:ea typeface="+mn-ea"/>
                 <a:cs typeface="+mn-cs"/>
               </a:rPr>
-              <a:t>帮扶管理信息系统 v1.18.16</a:t>
+              <a:t>帮扶管理信息系统 v1.18.17</a:t>
             </a:r>
           </a:p>
         </p:txBody>
@@ -30874,7 +30874,7 @@
                 <a:ea typeface="+mn-ea"/>
                 <a:cs typeface="+mn-cs"/>
               </a:rPr>
-              <a:t>帮扶管理信息系统 v1.18.16</a:t>
+              <a:t>帮扶管理信息系统 v1.18.17</a:t>
             </a:r>
           </a:p>
         </p:txBody>
@@ -31789,7 +31789,7 @@
                 <a:ea typeface="+mn-ea"/>
                 <a:cs typeface="+mn-cs"/>
               </a:rPr>
-              <a:t>帮扶管理信息系统 v1.18.16</a:t>
+              <a:t>帮扶管理信息系统 v1.18.17</a:t>
             </a:r>
           </a:p>
         </p:txBody>
@@ -33426,7 +33426,7 @@
                 <a:ea typeface="+mn-ea"/>
                 <a:cs typeface="+mn-cs"/>
               </a:rPr>
-              <a:t>帮扶管理信息系统 v1.18.16</a:t>
+              <a:t>帮扶管理信息系统 v1.18.17</a:t>
             </a:r>
           </a:p>
         </p:txBody>
@@ -34351,7 +34351,7 @@
                 <a:ea typeface="+mn-ea"/>
                 <a:cs typeface="+mn-cs"/>
               </a:rPr>
-              <a:t>帮扶管理信息系统 v1.18.16</a:t>
+              <a:t>帮扶管理信息系统 v1.18.17</a:t>
             </a:r>
           </a:p>
         </p:txBody>
@@ -35316,7 +35316,7 @@
                 <a:ea typeface="+mn-ea"/>
                 <a:cs typeface="+mn-cs"/>
               </a:rPr>
-              <a:t>帮扶管理信息系统 v1.18.16</a:t>
+              <a:t>帮扶管理信息系统 v1.18.17</a:t>
             </a:r>
           </a:p>
         </p:txBody>
@@ -36539,7 +36539,7 @@
                 <a:ea typeface="+mn-ea"/>
                 <a:cs typeface="+mn-cs"/>
               </a:rPr>
-              <a:t>帮扶管理信息系统 v1.18.16</a:t>
+              <a:t>帮扶管理信息系统 v1.18.17</a:t>
             </a:r>
           </a:p>
         </p:txBody>
@@ -37764,7 +37764,7 @@
                 <a:ea typeface="+mn-ea"/>
                 <a:cs typeface="+mn-cs"/>
               </a:rPr>
-              <a:t>帮扶管理信息系统 v1.18.16</a:t>
+              <a:t>帮扶管理信息系统 v1.18.17</a:t>
             </a:r>
           </a:p>
         </p:txBody>
@@ -39123,7 +39123,7 @@
                 <a:ea typeface="+mn-ea"/>
                 <a:cs typeface="+mn-cs"/>
               </a:rPr>
-              <a:t>帮扶管理信息系统 v1.18.16</a:t>
+              <a:t>帮扶管理信息系统 v1.18.17</a:t>
             </a:r>
           </a:p>
         </p:txBody>
@@ -40830,7 +40830,7 @@
                 <a:ea typeface="+mn-ea"/>
                 <a:cs typeface="+mn-cs"/>
               </a:rPr>
-              <a:t>帮扶管理信息系统 v1.18.16</a:t>
+              <a:t>帮扶管理信息系统 v1.18.17</a:t>
             </a:r>
           </a:p>
         </p:txBody>
@@ -42293,7 +42293,7 @@
                 <a:ea typeface="+mn-ea"/>
                 <a:cs typeface="+mn-cs"/>
               </a:rPr>
-              <a:t>帮扶管理信息系统 v1.18.16</a:t>
+              <a:t>帮扶管理信息系统 v1.18.17</a:t>
             </a:r>
           </a:p>
         </p:txBody>
@@ -42794,7 +42794,7 @@
                 <a:ea typeface="+mn-ea"/>
                 <a:cs typeface="+mn-cs"/>
               </a:rPr>
-              <a:t>帮扶管理信息系统 v1.18.16</a:t>
+              <a:t>帮扶管理信息系统 v1.18.17</a:t>
             </a:r>
           </a:p>
         </p:txBody>
@@ -43111,7 +43111,7 @@
                 <a:ea typeface="+mn-ea"/>
                 <a:cs typeface="+mn-cs"/>
               </a:rPr>
-              <a:t>帮扶管理信息系统 v1.18.16 · 仓库：github.com/lzh745200/MRRS · 完整文档见 docs/ 目录</a:t>
+              <a:t>帮扶管理信息系统 v1.18.17 · 仓库：github.com/lzh745200/MRRS · 完整文档见 docs/ 目录</a:t>
             </a:r>
           </a:p>
         </p:txBody>
@@ -43930,7 +43930,7 @@
                 <a:ea typeface="+mn-ea"/>
                 <a:cs typeface="+mn-cs"/>
               </a:rPr>
-              <a:t>帮扶管理信息系统 v1.18.16</a:t>
+              <a:t>帮扶管理信息系统 v1.18.17</a:t>
             </a:r>
           </a:p>
         </p:txBody>
@@ -45477,7 +45477,7 @@
                 <a:ea typeface="+mn-ea"/>
                 <a:cs typeface="+mn-cs"/>
               </a:rPr>
-              <a:t>帮扶管理信息系统 v1.18.16</a:t>
+              <a:t>帮扶管理信息系统 v1.18.17</a:t>
             </a:r>
           </a:p>
         </p:txBody>
@@ -46602,7 +46602,7 @@
                 <a:ea typeface="+mn-ea"/>
                 <a:cs typeface="+mn-cs"/>
               </a:rPr>
-              <a:t>帮扶管理信息系统 v1.18.16</a:t>
+              <a:t>帮扶管理信息系统 v1.18.17</a:t>
             </a:r>
           </a:p>
         </p:txBody>
@@ -47727,7 +47727,7 @@
                 <a:ea typeface="+mn-ea"/>
                 <a:cs typeface="+mn-cs"/>
               </a:rPr>
-              <a:t>帮扶管理信息系统 v1.18.16</a:t>
+              <a:t>帮扶管理信息系统 v1.18.17</a:t>
             </a:r>
           </a:p>
         </p:txBody>
@@ -49100,7 +49100,7 @@
                 <a:ea typeface="+mn-ea"/>
                 <a:cs typeface="+mn-cs"/>
               </a:rPr>
-              <a:t>帮扶管理信息系统 v1.18.16</a:t>
+              <a:t>帮扶管理信息系统 v1.18.17</a:t>
             </a:r>
           </a:p>
         </p:txBody>

--- a/docs/帮扶管理信息系统介绍-零基础版.pptx
+++ b/docs/帮扶管理信息系统介绍-零基础版.pptx
@@ -3881,7 +3881,7 @@
                 <a:ea typeface="+mn-ea"/>
                 <a:cs typeface="+mn-cs"/>
               </a:rPr>
-              <a:t>V1.18.17 | 2026-10-27 | FastAPI + Vue 3 + Electron + SQLite</a:t>
+              <a:t>V1.18.18 | 2026-10-27 | FastAPI + Vue 3 + Electron + SQLite</a:t>
             </a:r>
           </a:p>
         </p:txBody>
@@ -4846,7 +4846,7 @@
                 <a:ea typeface="+mn-ea"/>
                 <a:cs typeface="+mn-cs"/>
               </a:rPr>
-              <a:t>帮扶管理信息系统 v1.18.17</a:t>
+              <a:t>帮扶管理信息系统 v1.18.18</a:t>
             </a:r>
           </a:p>
         </p:txBody>
@@ -6579,7 +6579,7 @@
                 <a:ea typeface="+mn-ea"/>
                 <a:cs typeface="+mn-cs"/>
               </a:rPr>
-              <a:t>帮扶管理信息系统 v1.18.17</a:t>
+              <a:t>帮扶管理信息系统 v1.18.18</a:t>
             </a:r>
           </a:p>
         </p:txBody>
@@ -7478,7 +7478,7 @@
                 <a:ea typeface="+mn-ea"/>
                 <a:cs typeface="+mn-cs"/>
               </a:rPr>
-              <a:t>帮扶管理信息系统 v1.18.17</a:t>
+              <a:t>帮扶管理信息系统 v1.18.18</a:t>
             </a:r>
           </a:p>
         </p:txBody>
@@ -8721,7 +8721,7 @@
                 <a:ea typeface="+mn-ea"/>
                 <a:cs typeface="+mn-cs"/>
               </a:rPr>
-              <a:t>帮扶管理信息系统 v1.18.17</a:t>
+              <a:t>帮扶管理信息系统 v1.18.18</a:t>
             </a:r>
           </a:p>
         </p:txBody>
@@ -10300,7 +10300,7 @@
                 <a:ea typeface="+mn-ea"/>
                 <a:cs typeface="+mn-cs"/>
               </a:rPr>
-              <a:t>帮扶管理信息系统 v1.18.17</a:t>
+              <a:t>帮扶管理信息系统 v1.18.18</a:t>
             </a:r>
           </a:p>
         </p:txBody>
@@ -11503,7 +11503,7 @@
                 <a:ea typeface="+mn-ea"/>
                 <a:cs typeface="+mn-cs"/>
               </a:rPr>
-              <a:t>帮扶管理信息系统 v1.18.17</a:t>
+              <a:t>帮扶管理信息系统 v1.18.18</a:t>
             </a:r>
           </a:p>
         </p:txBody>
@@ -12680,7 +12680,7 @@
                 <a:ea typeface="+mn-ea"/>
                 <a:cs typeface="+mn-cs"/>
               </a:rPr>
-              <a:t>帮扶管理信息系统 v1.18.17</a:t>
+              <a:t>帮扶管理信息系统 v1.18.18</a:t>
             </a:r>
           </a:p>
         </p:txBody>
@@ -13933,7 +13933,7 @@
                 <a:ea typeface="+mn-ea"/>
                 <a:cs typeface="+mn-cs"/>
               </a:rPr>
-              <a:t>帮扶管理信息系统 v1.18.17</a:t>
+              <a:t>帮扶管理信息系统 v1.18.18</a:t>
             </a:r>
           </a:p>
         </p:txBody>
@@ -14566,7 +14566,7 @@
                 <a:ea typeface="+mn-ea"/>
                 <a:cs typeface="+mn-cs"/>
               </a:rPr>
-              <a:t>帮扶管理信息系统 v1.18.17</a:t>
+              <a:t>帮扶管理信息系统 v1.18.18</a:t>
             </a:r>
           </a:p>
         </p:txBody>
@@ -15775,7 +15775,7 @@
                 <a:ea typeface="+mn-ea"/>
                 <a:cs typeface="+mn-cs"/>
               </a:rPr>
-              <a:t>帮扶管理信息系统 v1.18.17</a:t>
+              <a:t>帮扶管理信息系统 v1.18.18</a:t>
             </a:r>
           </a:p>
         </p:txBody>
@@ -16674,7 +16674,7 @@
                 <a:ea typeface="+mn-ea"/>
                 <a:cs typeface="+mn-cs"/>
               </a:rPr>
-              <a:t>帮扶管理信息系统 v1.18.17</a:t>
+              <a:t>帮扶管理信息系统 v1.18.18</a:t>
             </a:r>
           </a:p>
         </p:txBody>
@@ -18195,7 +18195,7 @@
                 <a:ea typeface="+mn-ea"/>
                 <a:cs typeface="+mn-cs"/>
               </a:rPr>
-              <a:t>帮扶管理信息系统 v1.18.17</a:t>
+              <a:t>帮扶管理信息系统 v1.18.18</a:t>
             </a:r>
           </a:p>
         </p:txBody>
@@ -19302,7 +19302,7 @@
                 <a:ea typeface="+mn-ea"/>
                 <a:cs typeface="+mn-cs"/>
               </a:rPr>
-              <a:t>帮扶管理信息系统 v1.18.17</a:t>
+              <a:t>帮扶管理信息系统 v1.18.18</a:t>
             </a:r>
           </a:p>
         </p:txBody>
@@ -20081,7 +20081,7 @@
                 <a:ea typeface="+mn-ea"/>
                 <a:cs typeface="+mn-cs"/>
               </a:rPr>
-              <a:t>帮扶管理信息系统 v1.18.17</a:t>
+              <a:t>帮扶管理信息系统 v1.18.18</a:t>
             </a:r>
           </a:p>
         </p:txBody>
@@ -20996,7 +20996,7 @@
                 <a:ea typeface="+mn-ea"/>
                 <a:cs typeface="+mn-cs"/>
               </a:rPr>
-              <a:t>帮扶管理信息系统 v1.18.17</a:t>
+              <a:t>帮扶管理信息系统 v1.18.18</a:t>
             </a:r>
           </a:p>
         </p:txBody>
@@ -21921,7 +21921,7 @@
                 <a:ea typeface="+mn-ea"/>
                 <a:cs typeface="+mn-cs"/>
               </a:rPr>
-              <a:t>帮扶管理信息系统 v1.18.17</a:t>
+              <a:t>帮扶管理信息系统 v1.18.18</a:t>
             </a:r>
           </a:p>
         </p:txBody>
@@ -22976,7 +22976,7 @@
                 <a:ea typeface="+mn-ea"/>
                 <a:cs typeface="+mn-cs"/>
               </a:rPr>
-              <a:t>帮扶管理信息系统 v1.18.17</a:t>
+              <a:t>帮扶管理信息系统 v1.18.18</a:t>
             </a:r>
           </a:p>
         </p:txBody>
@@ -24113,7 +24113,7 @@
                 <a:ea typeface="+mn-ea"/>
                 <a:cs typeface="+mn-cs"/>
               </a:rPr>
-              <a:t>帮扶管理信息系统 v1.18.17</a:t>
+              <a:t>帮扶管理信息系统 v1.18.18</a:t>
             </a:r>
           </a:p>
         </p:txBody>
@@ -25220,7 +25220,7 @@
                 <a:ea typeface="+mn-ea"/>
                 <a:cs typeface="+mn-cs"/>
               </a:rPr>
-              <a:t>帮扶管理信息系统 v1.18.17</a:t>
+              <a:t>帮扶管理信息系统 v1.18.18</a:t>
             </a:r>
           </a:p>
         </p:txBody>
@@ -26861,7 +26861,7 @@
                 <a:ea typeface="+mn-ea"/>
                 <a:cs typeface="+mn-cs"/>
               </a:rPr>
-              <a:t>帮扶管理信息系统 v1.18.17</a:t>
+              <a:t>帮扶管理信息系统 v1.18.18</a:t>
             </a:r>
           </a:p>
         </p:txBody>
@@ -28360,7 +28360,7 @@
                 <a:ea typeface="+mn-ea"/>
                 <a:cs typeface="+mn-cs"/>
               </a:rPr>
-              <a:t>帮扶管理信息系统 v1.18.17</a:t>
+              <a:t>帮扶管理信息系统 v1.18.18</a:t>
             </a:r>
           </a:p>
         </p:txBody>
@@ -29391,7 +29391,7 @@
                 <a:ea typeface="+mn-ea"/>
                 <a:cs typeface="+mn-cs"/>
               </a:rPr>
-              <a:t>帮扶管理信息系统 v1.18.17</a:t>
+              <a:t>帮扶管理信息系统 v1.18.18</a:t>
             </a:r>
           </a:p>
         </p:txBody>
@@ -30874,7 +30874,7 @@
                 <a:ea typeface="+mn-ea"/>
                 <a:cs typeface="+mn-cs"/>
               </a:rPr>
-              <a:t>帮扶管理信息系统 v1.18.17</a:t>
+              <a:t>帮扶管理信息系统 v1.18.18</a:t>
             </a:r>
           </a:p>
         </p:txBody>
@@ -31789,7 +31789,7 @@
                 <a:ea typeface="+mn-ea"/>
                 <a:cs typeface="+mn-cs"/>
               </a:rPr>
-              <a:t>帮扶管理信息系统 v1.18.17</a:t>
+              <a:t>帮扶管理信息系统 v1.18.18</a:t>
             </a:r>
           </a:p>
         </p:txBody>
@@ -33426,7 +33426,7 @@
                 <a:ea typeface="+mn-ea"/>
                 <a:cs typeface="+mn-cs"/>
               </a:rPr>
-              <a:t>帮扶管理信息系统 v1.18.17</a:t>
+              <a:t>帮扶管理信息系统 v1.18.18</a:t>
             </a:r>
           </a:p>
         </p:txBody>
@@ -34351,7 +34351,7 @@
                 <a:ea typeface="+mn-ea"/>
                 <a:cs typeface="+mn-cs"/>
               </a:rPr>
-              <a:t>帮扶管理信息系统 v1.18.17</a:t>
+              <a:t>帮扶管理信息系统 v1.18.18</a:t>
             </a:r>
           </a:p>
         </p:txBody>
@@ -35316,7 +35316,7 @@
                 <a:ea typeface="+mn-ea"/>
                 <a:cs typeface="+mn-cs"/>
               </a:rPr>
-              <a:t>帮扶管理信息系统 v1.18.17</a:t>
+              <a:t>帮扶管理信息系统 v1.18.18</a:t>
             </a:r>
           </a:p>
         </p:txBody>
@@ -36539,7 +36539,7 @@
                 <a:ea typeface="+mn-ea"/>
                 <a:cs typeface="+mn-cs"/>
               </a:rPr>
-              <a:t>帮扶管理信息系统 v1.18.17</a:t>
+              <a:t>帮扶管理信息系统 v1.18.18</a:t>
             </a:r>
           </a:p>
         </p:txBody>
@@ -37764,7 +37764,7 @@
                 <a:ea typeface="+mn-ea"/>
                 <a:cs typeface="+mn-cs"/>
               </a:rPr>
-              <a:t>帮扶管理信息系统 v1.18.17</a:t>
+              <a:t>帮扶管理信息系统 v1.18.18</a:t>
             </a:r>
           </a:p>
         </p:txBody>
@@ -39123,7 +39123,7 @@
                 <a:ea typeface="+mn-ea"/>
                 <a:cs typeface="+mn-cs"/>
               </a:rPr>
-              <a:t>帮扶管理信息系统 v1.18.17</a:t>
+              <a:t>帮扶管理信息系统 v1.18.18</a:t>
             </a:r>
           </a:p>
         </p:txBody>
@@ -40830,7 +40830,7 @@
                 <a:ea typeface="+mn-ea"/>
                 <a:cs typeface="+mn-cs"/>
               </a:rPr>
-              <a:t>帮扶管理信息系统 v1.18.17</a:t>
+              <a:t>帮扶管理信息系统 v1.18.18</a:t>
             </a:r>
           </a:p>
         </p:txBody>
@@ -42293,7 +42293,7 @@
                 <a:ea typeface="+mn-ea"/>
                 <a:cs typeface="+mn-cs"/>
               </a:rPr>
-              <a:t>帮扶管理信息系统 v1.18.17</a:t>
+              <a:t>帮扶管理信息系统 v1.18.18</a:t>
             </a:r>
           </a:p>
         </p:txBody>
@@ -42794,7 +42794,7 @@
                 <a:ea typeface="+mn-ea"/>
                 <a:cs typeface="+mn-cs"/>
               </a:rPr>
-              <a:t>帮扶管理信息系统 v1.18.17</a:t>
+              <a:t>帮扶管理信息系统 v1.18.18</a:t>
             </a:r>
           </a:p>
         </p:txBody>
@@ -43111,7 +43111,7 @@
                 <a:ea typeface="+mn-ea"/>
                 <a:cs typeface="+mn-cs"/>
               </a:rPr>
-              <a:t>帮扶管理信息系统 v1.18.17 · 仓库：github.com/lzh745200/MRRS · 完整文档见 docs/ 目录</a:t>
+              <a:t>帮扶管理信息系统 v1.18.18 · 仓库：github.com/lzh745200/MRRS · 完整文档见 docs/ 目录</a:t>
             </a:r>
           </a:p>
         </p:txBody>
@@ -43930,7 +43930,7 @@
                 <a:ea typeface="+mn-ea"/>
                 <a:cs typeface="+mn-cs"/>
               </a:rPr>
-              <a:t>帮扶管理信息系统 v1.18.17</a:t>
+              <a:t>帮扶管理信息系统 v1.18.18</a:t>
             </a:r>
           </a:p>
         </p:txBody>
@@ -45477,7 +45477,7 @@
                 <a:ea typeface="+mn-ea"/>
                 <a:cs typeface="+mn-cs"/>
               </a:rPr>
-              <a:t>帮扶管理信息系统 v1.18.17</a:t>
+              <a:t>帮扶管理信息系统 v1.18.18</a:t>
             </a:r>
           </a:p>
         </p:txBody>
@@ -46602,7 +46602,7 @@
                 <a:ea typeface="+mn-ea"/>
                 <a:cs typeface="+mn-cs"/>
               </a:rPr>
-              <a:t>帮扶管理信息系统 v1.18.17</a:t>
+              <a:t>帮扶管理信息系统 v1.18.18</a:t>
             </a:r>
           </a:p>
         </p:txBody>
@@ -47727,7 +47727,7 @@
                 <a:ea typeface="+mn-ea"/>
                 <a:cs typeface="+mn-cs"/>
               </a:rPr>
-              <a:t>帮扶管理信息系统 v1.18.17</a:t>
+              <a:t>帮扶管理信息系统 v1.18.18</a:t>
             </a:r>
           </a:p>
         </p:txBody>
@@ -49100,7 +49100,7 @@
                 <a:ea typeface="+mn-ea"/>
                 <a:cs typeface="+mn-cs"/>
               </a:rPr>
-              <a:t>帮扶管理信息系统 v1.18.17</a:t>
+              <a:t>帮扶管理信息系统 v1.18.18</a:t>
             </a:r>
           </a:p>
         </p:txBody>

--- a/docs/帮扶管理信息系统介绍-零基础版.pptx
+++ b/docs/帮扶管理信息系统介绍-零基础版.pptx
@@ -3881,7 +3881,7 @@
                 <a:ea typeface="+mn-ea"/>
                 <a:cs typeface="+mn-cs"/>
               </a:rPr>
-              <a:t>V1.18.18 | 2026-10-27 | FastAPI + Vue 3 + Electron + SQLite</a:t>
+              <a:t>V1.18.22 | 2026-10-28 | FastAPI + Vue 3 + Electron + SQLite</a:t>
             </a:r>
           </a:p>
         </p:txBody>
@@ -4846,7 +4846,7 @@
                 <a:ea typeface="+mn-ea"/>
                 <a:cs typeface="+mn-cs"/>
               </a:rPr>
-              <a:t>帮扶管理信息系统 v1.18.18</a:t>
+              <a:t>帮扶管理信息系统 v1.18.22</a:t>
             </a:r>
           </a:p>
         </p:txBody>
@@ -6579,7 +6579,7 @@
                 <a:ea typeface="+mn-ea"/>
                 <a:cs typeface="+mn-cs"/>
               </a:rPr>
-              <a:t>帮扶管理信息系统 v1.18.18</a:t>
+              <a:t>帮扶管理信息系统 v1.18.22</a:t>
             </a:r>
           </a:p>
         </p:txBody>
@@ -7478,7 +7478,7 @@
                 <a:ea typeface="+mn-ea"/>
                 <a:cs typeface="+mn-cs"/>
               </a:rPr>
-              <a:t>帮扶管理信息系统 v1.18.18</a:t>
+              <a:t>帮扶管理信息系统 v1.18.22</a:t>
             </a:r>
           </a:p>
         </p:txBody>
@@ -8721,7 +8721,7 @@
                 <a:ea typeface="+mn-ea"/>
                 <a:cs typeface="+mn-cs"/>
               </a:rPr>
-              <a:t>帮扶管理信息系统 v1.18.18</a:t>
+              <a:t>帮扶管理信息系统 v1.18.22</a:t>
             </a:r>
           </a:p>
         </p:txBody>
@@ -10300,7 +10300,7 @@
                 <a:ea typeface="+mn-ea"/>
                 <a:cs typeface="+mn-cs"/>
               </a:rPr>
-              <a:t>帮扶管理信息系统 v1.18.18</a:t>
+              <a:t>帮扶管理信息系统 v1.18.22</a:t>
             </a:r>
           </a:p>
         </p:txBody>
@@ -11503,7 +11503,7 @@
                 <a:ea typeface="+mn-ea"/>
                 <a:cs typeface="+mn-cs"/>
               </a:rPr>
-              <a:t>帮扶管理信息系统 v1.18.18</a:t>
+              <a:t>帮扶管理信息系统 v1.18.22</a:t>
             </a:r>
           </a:p>
         </p:txBody>
@@ -12680,7 +12680,7 @@
                 <a:ea typeface="+mn-ea"/>
                 <a:cs typeface="+mn-cs"/>
               </a:rPr>
-              <a:t>帮扶管理信息系统 v1.18.18</a:t>
+              <a:t>帮扶管理信息系统 v1.18.22</a:t>
             </a:r>
           </a:p>
         </p:txBody>
@@ -13933,7 +13933,7 @@
                 <a:ea typeface="+mn-ea"/>
                 <a:cs typeface="+mn-cs"/>
               </a:rPr>
-              <a:t>帮扶管理信息系统 v1.18.18</a:t>
+              <a:t>帮扶管理信息系统 v1.18.22</a:t>
             </a:r>
           </a:p>
         </p:txBody>
@@ -14566,7 +14566,7 @@
                 <a:ea typeface="+mn-ea"/>
                 <a:cs typeface="+mn-cs"/>
               </a:rPr>
-              <a:t>帮扶管理信息系统 v1.18.18</a:t>
+              <a:t>帮扶管理信息系统 v1.18.22</a:t>
             </a:r>
           </a:p>
         </p:txBody>
@@ -15775,7 +15775,7 @@
                 <a:ea typeface="+mn-ea"/>
                 <a:cs typeface="+mn-cs"/>
               </a:rPr>
-              <a:t>帮扶管理信息系统 v1.18.18</a:t>
+              <a:t>帮扶管理信息系统 v1.18.22</a:t>
             </a:r>
           </a:p>
         </p:txBody>
@@ -16674,7 +16674,7 @@
                 <a:ea typeface="+mn-ea"/>
                 <a:cs typeface="+mn-cs"/>
               </a:rPr>
-              <a:t>帮扶管理信息系统 v1.18.18</a:t>
+              <a:t>帮扶管理信息系统 v1.18.22</a:t>
             </a:r>
           </a:p>
         </p:txBody>
@@ -18195,7 +18195,7 @@
                 <a:ea typeface="+mn-ea"/>
                 <a:cs typeface="+mn-cs"/>
               </a:rPr>
-              <a:t>帮扶管理信息系统 v1.18.18</a:t>
+              <a:t>帮扶管理信息系统 v1.18.22</a:t>
             </a:r>
           </a:p>
         </p:txBody>
@@ -19302,7 +19302,7 @@
                 <a:ea typeface="+mn-ea"/>
                 <a:cs typeface="+mn-cs"/>
               </a:rPr>
-              <a:t>帮扶管理信息系统 v1.18.18</a:t>
+              <a:t>帮扶管理信息系统 v1.18.22</a:t>
             </a:r>
           </a:p>
         </p:txBody>
@@ -20081,7 +20081,7 @@
                 <a:ea typeface="+mn-ea"/>
                 <a:cs typeface="+mn-cs"/>
               </a:rPr>
-              <a:t>帮扶管理信息系统 v1.18.18</a:t>
+              <a:t>帮扶管理信息系统 v1.18.22</a:t>
             </a:r>
           </a:p>
         </p:txBody>
@@ -20996,7 +20996,7 @@
                 <a:ea typeface="+mn-ea"/>
                 <a:cs typeface="+mn-cs"/>
               </a:rPr>
-              <a:t>帮扶管理信息系统 v1.18.18</a:t>
+              <a:t>帮扶管理信息系统 v1.18.22</a:t>
             </a:r>
           </a:p>
         </p:txBody>
@@ -21921,7 +21921,7 @@
                 <a:ea typeface="+mn-ea"/>
                 <a:cs typeface="+mn-cs"/>
               </a:rPr>
-              <a:t>帮扶管理信息系统 v1.18.18</a:t>
+              <a:t>帮扶管理信息系统 v1.18.22</a:t>
             </a:r>
           </a:p>
         </p:txBody>
@@ -22976,7 +22976,7 @@
                 <a:ea typeface="+mn-ea"/>
                 <a:cs typeface="+mn-cs"/>
               </a:rPr>
-              <a:t>帮扶管理信息系统 v1.18.18</a:t>
+              <a:t>帮扶管理信息系统 v1.18.22</a:t>
             </a:r>
           </a:p>
         </p:txBody>
@@ -24113,7 +24113,7 @@
                 <a:ea typeface="+mn-ea"/>
                 <a:cs typeface="+mn-cs"/>
               </a:rPr>
-              <a:t>帮扶管理信息系统 v1.18.18</a:t>
+              <a:t>帮扶管理信息系统 v1.18.22</a:t>
             </a:r>
           </a:p>
         </p:txBody>
@@ -25220,7 +25220,7 @@
                 <a:ea typeface="+mn-ea"/>
                 <a:cs typeface="+mn-cs"/>
               </a:rPr>
-              <a:t>帮扶管理信息系统 v1.18.18</a:t>
+              <a:t>帮扶管理信息系统 v1.18.22</a:t>
             </a:r>
           </a:p>
         </p:txBody>
@@ -26861,7 +26861,7 @@
                 <a:ea typeface="+mn-ea"/>
                 <a:cs typeface="+mn-cs"/>
               </a:rPr>
-              <a:t>帮扶管理信息系统 v1.18.18</a:t>
+              <a:t>帮扶管理信息系统 v1.18.22</a:t>
             </a:r>
           </a:p>
         </p:txBody>
@@ -27939,7 +27939,7 @@
                   <a:ea typeface="+mn-ea"/>
                   <a:cs typeface="+mn-cs"/>
                 </a:rPr>
-                <a:t>22,244</a:t>
+                <a:t>22,280</a:t>
               </a:r>
             </a:p>
           </p:txBody>
@@ -28319,7 +28319,7 @@
                   <a:ea typeface="+mn-ea"/>
                   <a:cs typeface="+mn-cs"/>
                 </a:rPr>
-                <a:t>数据来源：2026-10-27 实测（v1.18.15）—— 后端 14,870 用例 + 前端 7,374 用例</a:t>
+                <a:t>数据来源：2026-10-28 实测（v1.18.22）—— 后端 14,896 用例 + 前端 7,384 用例</a:t>
               </a:r>
             </a:p>
           </p:txBody>
@@ -28360,7 +28360,7 @@
                 <a:ea typeface="+mn-ea"/>
                 <a:cs typeface="+mn-cs"/>
               </a:rPr>
-              <a:t>帮扶管理信息系统 v1.18.18</a:t>
+              <a:t>帮扶管理信息系统 v1.18.22</a:t>
             </a:r>
           </a:p>
         </p:txBody>
@@ -29152,7 +29152,7 @@
                   <a:ea typeface="+mn-ea"/>
                   <a:cs typeface="+mn-cs"/>
                 </a:rPr>
-                <a:t>后端 14,870 个自动化用例，前端 7,374 个用例，每次改动全部重跑。</a:t>
+                <a:t>后端 14,896 个自动化用例，前端 7,384 个用例，每次改动全部重跑。</a:t>
               </a:r>
             </a:p>
           </p:txBody>
@@ -29391,7 +29391,7 @@
                 <a:ea typeface="+mn-ea"/>
                 <a:cs typeface="+mn-cs"/>
               </a:rPr>
-              <a:t>帮扶管理信息系统 v1.18.18</a:t>
+              <a:t>帮扶管理信息系统 v1.18.22</a:t>
             </a:r>
           </a:p>
         </p:txBody>
@@ -30874,7 +30874,7 @@
                 <a:ea typeface="+mn-ea"/>
                 <a:cs typeface="+mn-cs"/>
               </a:rPr>
-              <a:t>帮扶管理信息系统 v1.18.18</a:t>
+              <a:t>帮扶管理信息系统 v1.18.22</a:t>
             </a:r>
           </a:p>
         </p:txBody>
@@ -31789,7 +31789,7 @@
                 <a:ea typeface="+mn-ea"/>
                 <a:cs typeface="+mn-cs"/>
               </a:rPr>
-              <a:t>帮扶管理信息系统 v1.18.18</a:t>
+              <a:t>帮扶管理信息系统 v1.18.22</a:t>
             </a:r>
           </a:p>
         </p:txBody>
@@ -33426,7 +33426,7 @@
                 <a:ea typeface="+mn-ea"/>
                 <a:cs typeface="+mn-cs"/>
               </a:rPr>
-              <a:t>帮扶管理信息系统 v1.18.18</a:t>
+              <a:t>帮扶管理信息系统 v1.18.22</a:t>
             </a:r>
           </a:p>
         </p:txBody>
@@ -34351,7 +34351,7 @@
                 <a:ea typeface="+mn-ea"/>
                 <a:cs typeface="+mn-cs"/>
               </a:rPr>
-              <a:t>帮扶管理信息系统 v1.18.18</a:t>
+              <a:t>帮扶管理信息系统 v1.18.22</a:t>
             </a:r>
           </a:p>
         </p:txBody>
@@ -35316,7 +35316,7 @@
                 <a:ea typeface="+mn-ea"/>
                 <a:cs typeface="+mn-cs"/>
               </a:rPr>
-              <a:t>帮扶管理信息系统 v1.18.18</a:t>
+              <a:t>帮扶管理信息系统 v1.18.22</a:t>
             </a:r>
           </a:p>
         </p:txBody>
@@ -36539,7 +36539,7 @@
                 <a:ea typeface="+mn-ea"/>
                 <a:cs typeface="+mn-cs"/>
               </a:rPr>
-              <a:t>帮扶管理信息系统 v1.18.18</a:t>
+              <a:t>帮扶管理信息系统 v1.18.22</a:t>
             </a:r>
           </a:p>
         </p:txBody>
@@ -37764,7 +37764,7 @@
                 <a:ea typeface="+mn-ea"/>
                 <a:cs typeface="+mn-cs"/>
               </a:rPr>
-              <a:t>帮扶管理信息系统 v1.18.18</a:t>
+              <a:t>帮扶管理信息系统 v1.18.22</a:t>
             </a:r>
           </a:p>
         </p:txBody>
@@ -39123,7 +39123,7 @@
                 <a:ea typeface="+mn-ea"/>
                 <a:cs typeface="+mn-cs"/>
               </a:rPr>
-              <a:t>帮扶管理信息系统 v1.18.18</a:t>
+              <a:t>帮扶管理信息系统 v1.18.22</a:t>
             </a:r>
           </a:p>
         </p:txBody>
@@ -40830,7 +40830,7 @@
                 <a:ea typeface="+mn-ea"/>
                 <a:cs typeface="+mn-cs"/>
               </a:rPr>
-              <a:t>帮扶管理信息系统 v1.18.18</a:t>
+              <a:t>帮扶管理信息系统 v1.18.22</a:t>
             </a:r>
           </a:p>
         </p:txBody>
@@ -42293,7 +42293,7 @@
                 <a:ea typeface="+mn-ea"/>
                 <a:cs typeface="+mn-cs"/>
               </a:rPr>
-              <a:t>帮扶管理信息系统 v1.18.18</a:t>
+              <a:t>帮扶管理信息系统 v1.18.22</a:t>
             </a:r>
           </a:p>
         </p:txBody>
@@ -42794,7 +42794,7 @@
                 <a:ea typeface="+mn-ea"/>
                 <a:cs typeface="+mn-cs"/>
               </a:rPr>
-              <a:t>帮扶管理信息系统 v1.18.18</a:t>
+              <a:t>帮扶管理信息系统 v1.18.22</a:t>
             </a:r>
           </a:p>
         </p:txBody>
@@ -43111,7 +43111,7 @@
                 <a:ea typeface="+mn-ea"/>
                 <a:cs typeface="+mn-cs"/>
               </a:rPr>
-              <a:t>帮扶管理信息系统 v1.18.18 · 仓库：github.com/lzh745200/MRRS · 完整文档见 docs/ 目录</a:t>
+              <a:t>帮扶管理信息系统 v1.18.22 · 仓库：github.com/lzh745200/MRRS · 完整文档见 docs/ 目录</a:t>
             </a:r>
           </a:p>
         </p:txBody>
@@ -43151,7 +43151,7 @@
                 <a:ea typeface="+mn-ea"/>
                 <a:cs typeface="+mn-cs"/>
               </a:rPr>
-              <a:t>22,244 项自动化测试守护 · 双平台离线交付 · 数据不出本机</a:t>
+              <a:t>22,280 项自动化测试守护 · 双平台离线交付 · 数据不出本机</a:t>
             </a:r>
           </a:p>
         </p:txBody>
@@ -43930,7 +43930,7 @@
                 <a:ea typeface="+mn-ea"/>
                 <a:cs typeface="+mn-cs"/>
               </a:rPr>
-              <a:t>帮扶管理信息系统 v1.18.18</a:t>
+              <a:t>帮扶管理信息系统 v1.18.22</a:t>
             </a:r>
           </a:p>
         </p:txBody>
@@ -45477,7 +45477,7 @@
                 <a:ea typeface="+mn-ea"/>
                 <a:cs typeface="+mn-cs"/>
               </a:rPr>
-              <a:t>帮扶管理信息系统 v1.18.18</a:t>
+              <a:t>帮扶管理信息系统 v1.18.22</a:t>
             </a:r>
           </a:p>
         </p:txBody>
@@ -46602,7 +46602,7 @@
                 <a:ea typeface="+mn-ea"/>
                 <a:cs typeface="+mn-cs"/>
               </a:rPr>
-              <a:t>帮扶管理信息系统 v1.18.18</a:t>
+              <a:t>帮扶管理信息系统 v1.18.22</a:t>
             </a:r>
           </a:p>
         </p:txBody>
@@ -47727,7 +47727,7 @@
                 <a:ea typeface="+mn-ea"/>
                 <a:cs typeface="+mn-cs"/>
               </a:rPr>
-              <a:t>帮扶管理信息系统 v1.18.18</a:t>
+              <a:t>帮扶管理信息系统 v1.18.22</a:t>
             </a:r>
           </a:p>
         </p:txBody>
@@ -49100,7 +49100,7 @@
                 <a:ea typeface="+mn-ea"/>
                 <a:cs typeface="+mn-cs"/>
               </a:rPr>
-              <a:t>帮扶管理信息系统 v1.18.18</a:t>
+              <a:t>帮扶管理信息系统 v1.18.22</a:t>
             </a:r>
           </a:p>
         </p:txBody>

--- a/docs/帮扶管理信息系统介绍-零基础版.pptx
+++ b/docs/帮扶管理信息系统介绍-零基础版.pptx
@@ -3881,7 +3881,7 @@
                 <a:ea typeface="+mn-ea"/>
                 <a:cs typeface="+mn-cs"/>
               </a:rPr>
-              <a:t>V1.18.22 | 2026-10-28 | FastAPI + Vue 3 + Electron + SQLite</a:t>
+              <a:t>V1.18.23 | 2026-10-28 | FastAPI + Vue 3 + Electron + SQLite</a:t>
             </a:r>
           </a:p>
         </p:txBody>
@@ -4846,7 +4846,7 @@
                 <a:ea typeface="+mn-ea"/>
                 <a:cs typeface="+mn-cs"/>
               </a:rPr>
-              <a:t>帮扶管理信息系统 v1.18.22</a:t>
+              <a:t>帮扶管理信息系统 v1.18.23</a:t>
             </a:r>
           </a:p>
         </p:txBody>
@@ -6579,7 +6579,7 @@
                 <a:ea typeface="+mn-ea"/>
                 <a:cs typeface="+mn-cs"/>
               </a:rPr>
-              <a:t>帮扶管理信息系统 v1.18.22</a:t>
+              <a:t>帮扶管理信息系统 v1.18.23</a:t>
             </a:r>
           </a:p>
         </p:txBody>
@@ -7478,7 +7478,7 @@
                 <a:ea typeface="+mn-ea"/>
                 <a:cs typeface="+mn-cs"/>
               </a:rPr>
-              <a:t>帮扶管理信息系统 v1.18.22</a:t>
+              <a:t>帮扶管理信息系统 v1.18.23</a:t>
             </a:r>
           </a:p>
         </p:txBody>
@@ -8721,7 +8721,7 @@
                 <a:ea typeface="+mn-ea"/>
                 <a:cs typeface="+mn-cs"/>
               </a:rPr>
-              <a:t>帮扶管理信息系统 v1.18.22</a:t>
+              <a:t>帮扶管理信息系统 v1.18.23</a:t>
             </a:r>
           </a:p>
         </p:txBody>
@@ -10300,7 +10300,7 @@
                 <a:ea typeface="+mn-ea"/>
                 <a:cs typeface="+mn-cs"/>
               </a:rPr>
-              <a:t>帮扶管理信息系统 v1.18.22</a:t>
+              <a:t>帮扶管理信息系统 v1.18.23</a:t>
             </a:r>
           </a:p>
         </p:txBody>
@@ -11503,7 +11503,7 @@
                 <a:ea typeface="+mn-ea"/>
                 <a:cs typeface="+mn-cs"/>
               </a:rPr>
-              <a:t>帮扶管理信息系统 v1.18.22</a:t>
+              <a:t>帮扶管理信息系统 v1.18.23</a:t>
             </a:r>
           </a:p>
         </p:txBody>
@@ -12680,7 +12680,7 @@
                 <a:ea typeface="+mn-ea"/>
                 <a:cs typeface="+mn-cs"/>
               </a:rPr>
-              <a:t>帮扶管理信息系统 v1.18.22</a:t>
+              <a:t>帮扶管理信息系统 v1.18.23</a:t>
             </a:r>
           </a:p>
         </p:txBody>
@@ -13933,7 +13933,7 @@
                 <a:ea typeface="+mn-ea"/>
                 <a:cs typeface="+mn-cs"/>
               </a:rPr>
-              <a:t>帮扶管理信息系统 v1.18.22</a:t>
+              <a:t>帮扶管理信息系统 v1.18.23</a:t>
             </a:r>
           </a:p>
         </p:txBody>
@@ -14566,7 +14566,7 @@
                 <a:ea typeface="+mn-ea"/>
                 <a:cs typeface="+mn-cs"/>
               </a:rPr>
-              <a:t>帮扶管理信息系统 v1.18.22</a:t>
+              <a:t>帮扶管理信息系统 v1.18.23</a:t>
             </a:r>
           </a:p>
         </p:txBody>
@@ -15775,7 +15775,7 @@
                 <a:ea typeface="+mn-ea"/>
                 <a:cs typeface="+mn-cs"/>
               </a:rPr>
-              <a:t>帮扶管理信息系统 v1.18.22</a:t>
+              <a:t>帮扶管理信息系统 v1.18.23</a:t>
             </a:r>
           </a:p>
         </p:txBody>
@@ -16674,7 +16674,7 @@
                 <a:ea typeface="+mn-ea"/>
                 <a:cs typeface="+mn-cs"/>
               </a:rPr>
-              <a:t>帮扶管理信息系统 v1.18.22</a:t>
+              <a:t>帮扶管理信息系统 v1.18.23</a:t>
             </a:r>
           </a:p>
         </p:txBody>
@@ -18195,7 +18195,7 @@
                 <a:ea typeface="+mn-ea"/>
                 <a:cs typeface="+mn-cs"/>
               </a:rPr>
-              <a:t>帮扶管理信息系统 v1.18.22</a:t>
+              <a:t>帮扶管理信息系统 v1.18.23</a:t>
             </a:r>
           </a:p>
         </p:txBody>
@@ -19302,7 +19302,7 @@
                 <a:ea typeface="+mn-ea"/>
                 <a:cs typeface="+mn-cs"/>
               </a:rPr>
-              <a:t>帮扶管理信息系统 v1.18.22</a:t>
+              <a:t>帮扶管理信息系统 v1.18.23</a:t>
             </a:r>
           </a:p>
         </p:txBody>
@@ -20081,7 +20081,7 @@
                 <a:ea typeface="+mn-ea"/>
                 <a:cs typeface="+mn-cs"/>
               </a:rPr>
-              <a:t>帮扶管理信息系统 v1.18.22</a:t>
+              <a:t>帮扶管理信息系统 v1.18.23</a:t>
             </a:r>
           </a:p>
         </p:txBody>
@@ -20996,7 +20996,7 @@
                 <a:ea typeface="+mn-ea"/>
                 <a:cs typeface="+mn-cs"/>
               </a:rPr>
-              <a:t>帮扶管理信息系统 v1.18.22</a:t>
+              <a:t>帮扶管理信息系统 v1.18.23</a:t>
             </a:r>
           </a:p>
         </p:txBody>
@@ -21921,7 +21921,7 @@
                 <a:ea typeface="+mn-ea"/>
                 <a:cs typeface="+mn-cs"/>
               </a:rPr>
-              <a:t>帮扶管理信息系统 v1.18.22</a:t>
+              <a:t>帮扶管理信息系统 v1.18.23</a:t>
             </a:r>
           </a:p>
         </p:txBody>
@@ -22976,7 +22976,7 @@
                 <a:ea typeface="+mn-ea"/>
                 <a:cs typeface="+mn-cs"/>
               </a:rPr>
-              <a:t>帮扶管理信息系统 v1.18.22</a:t>
+              <a:t>帮扶管理信息系统 v1.18.23</a:t>
             </a:r>
           </a:p>
         </p:txBody>
@@ -24113,7 +24113,7 @@
                 <a:ea typeface="+mn-ea"/>
                 <a:cs typeface="+mn-cs"/>
               </a:rPr>
-              <a:t>帮扶管理信息系统 v1.18.22</a:t>
+              <a:t>帮扶管理信息系统 v1.18.23</a:t>
             </a:r>
           </a:p>
         </p:txBody>
@@ -25220,7 +25220,7 @@
                 <a:ea typeface="+mn-ea"/>
                 <a:cs typeface="+mn-cs"/>
               </a:rPr>
-              <a:t>帮扶管理信息系统 v1.18.22</a:t>
+              <a:t>帮扶管理信息系统 v1.18.23</a:t>
             </a:r>
           </a:p>
         </p:txBody>
@@ -26861,7 +26861,7 @@
                 <a:ea typeface="+mn-ea"/>
                 <a:cs typeface="+mn-cs"/>
               </a:rPr>
-              <a:t>帮扶管理信息系统 v1.18.22</a:t>
+              <a:t>帮扶管理信息系统 v1.18.23</a:t>
             </a:r>
           </a:p>
         </p:txBody>
@@ -28319,7 +28319,7 @@
                   <a:ea typeface="+mn-ea"/>
                   <a:cs typeface="+mn-cs"/>
                 </a:rPr>
-                <a:t>数据来源：2026-10-28 实测（v1.18.22）—— 后端 14,896 用例 + 前端 7,384 用例</a:t>
+                <a:t>数据来源：2026-10-28 实测（v1.18.23）—— 后端 14,896 用例 + 前端 7,384 用例</a:t>
               </a:r>
             </a:p>
           </p:txBody>
@@ -28360,7 +28360,7 @@
                 <a:ea typeface="+mn-ea"/>
                 <a:cs typeface="+mn-cs"/>
               </a:rPr>
-              <a:t>帮扶管理信息系统 v1.18.22</a:t>
+              <a:t>帮扶管理信息系统 v1.18.23</a:t>
             </a:r>
           </a:p>
         </p:txBody>
@@ -29391,7 +29391,7 @@
                 <a:ea typeface="+mn-ea"/>
                 <a:cs typeface="+mn-cs"/>
               </a:rPr>
-              <a:t>帮扶管理信息系统 v1.18.22</a:t>
+              <a:t>帮扶管理信息系统 v1.18.23</a:t>
             </a:r>
           </a:p>
         </p:txBody>
@@ -30874,7 +30874,7 @@
                 <a:ea typeface="+mn-ea"/>
                 <a:cs typeface="+mn-cs"/>
               </a:rPr>
-              <a:t>帮扶管理信息系统 v1.18.22</a:t>
+              <a:t>帮扶管理信息系统 v1.18.23</a:t>
             </a:r>
           </a:p>
         </p:txBody>
@@ -31789,7 +31789,7 @@
                 <a:ea typeface="+mn-ea"/>
                 <a:cs typeface="+mn-cs"/>
               </a:rPr>
-              <a:t>帮扶管理信息系统 v1.18.22</a:t>
+              <a:t>帮扶管理信息系统 v1.18.23</a:t>
             </a:r>
           </a:p>
         </p:txBody>
@@ -33426,7 +33426,7 @@
                 <a:ea typeface="+mn-ea"/>
                 <a:cs typeface="+mn-cs"/>
               </a:rPr>
-              <a:t>帮扶管理信息系统 v1.18.22</a:t>
+              <a:t>帮扶管理信息系统 v1.18.23</a:t>
             </a:r>
           </a:p>
         </p:txBody>
@@ -34351,7 +34351,7 @@
                 <a:ea typeface="+mn-ea"/>
                 <a:cs typeface="+mn-cs"/>
               </a:rPr>
-              <a:t>帮扶管理信息系统 v1.18.22</a:t>
+              <a:t>帮扶管理信息系统 v1.18.23</a:t>
             </a:r>
           </a:p>
         </p:txBody>
@@ -35316,7 +35316,7 @@
                 <a:ea typeface="+mn-ea"/>
                 <a:cs typeface="+mn-cs"/>
               </a:rPr>
-              <a:t>帮扶管理信息系统 v1.18.22</a:t>
+              <a:t>帮扶管理信息系统 v1.18.23</a:t>
             </a:r>
           </a:p>
         </p:txBody>
@@ -36539,7 +36539,7 @@
                 <a:ea typeface="+mn-ea"/>
                 <a:cs typeface="+mn-cs"/>
               </a:rPr>
-              <a:t>帮扶管理信息系统 v1.18.22</a:t>
+              <a:t>帮扶管理信息系统 v1.18.23</a:t>
             </a:r>
           </a:p>
         </p:txBody>
@@ -37764,7 +37764,7 @@
                 <a:ea typeface="+mn-ea"/>
                 <a:cs typeface="+mn-cs"/>
               </a:rPr>
-              <a:t>帮扶管理信息系统 v1.18.22</a:t>
+              <a:t>帮扶管理信息系统 v1.18.23</a:t>
             </a:r>
           </a:p>
         </p:txBody>
@@ -39123,7 +39123,7 @@
                 <a:ea typeface="+mn-ea"/>
                 <a:cs typeface="+mn-cs"/>
               </a:rPr>
-              <a:t>帮扶管理信息系统 v1.18.22</a:t>
+              <a:t>帮扶管理信息系统 v1.18.23</a:t>
             </a:r>
           </a:p>
         </p:txBody>
@@ -40830,7 +40830,7 @@
                 <a:ea typeface="+mn-ea"/>
                 <a:cs typeface="+mn-cs"/>
               </a:rPr>
-              <a:t>帮扶管理信息系统 v1.18.22</a:t>
+              <a:t>帮扶管理信息系统 v1.18.23</a:t>
             </a:r>
           </a:p>
         </p:txBody>
@@ -42293,7 +42293,7 @@
                 <a:ea typeface="+mn-ea"/>
                 <a:cs typeface="+mn-cs"/>
               </a:rPr>
-              <a:t>帮扶管理信息系统 v1.18.22</a:t>
+              <a:t>帮扶管理信息系统 v1.18.23</a:t>
             </a:r>
           </a:p>
         </p:txBody>
@@ -42794,7 +42794,7 @@
                 <a:ea typeface="+mn-ea"/>
                 <a:cs typeface="+mn-cs"/>
               </a:rPr>
-              <a:t>帮扶管理信息系统 v1.18.22</a:t>
+              <a:t>帮扶管理信息系统 v1.18.23</a:t>
             </a:r>
           </a:p>
         </p:txBody>
@@ -43111,7 +43111,7 @@
                 <a:ea typeface="+mn-ea"/>
                 <a:cs typeface="+mn-cs"/>
               </a:rPr>
-              <a:t>帮扶管理信息系统 v1.18.22 · 仓库：github.com/lzh745200/MRRS · 完整文档见 docs/ 目录</a:t>
+              <a:t>帮扶管理信息系统 v1.18.23 · 仓库：github.com/lzh745200/MRRS · 完整文档见 docs/ 目录</a:t>
             </a:r>
           </a:p>
         </p:txBody>
@@ -43930,7 +43930,7 @@
                 <a:ea typeface="+mn-ea"/>
                 <a:cs typeface="+mn-cs"/>
               </a:rPr>
-              <a:t>帮扶管理信息系统 v1.18.22</a:t>
+              <a:t>帮扶管理信息系统 v1.18.23</a:t>
             </a:r>
           </a:p>
         </p:txBody>
@@ -45477,7 +45477,7 @@
                 <a:ea typeface="+mn-ea"/>
                 <a:cs typeface="+mn-cs"/>
               </a:rPr>
-              <a:t>帮扶管理信息系统 v1.18.22</a:t>
+              <a:t>帮扶管理信息系统 v1.18.23</a:t>
             </a:r>
           </a:p>
         </p:txBody>
@@ -46602,7 +46602,7 @@
                 <a:ea typeface="+mn-ea"/>
                 <a:cs typeface="+mn-cs"/>
               </a:rPr>
-              <a:t>帮扶管理信息系统 v1.18.22</a:t>
+              <a:t>帮扶管理信息系统 v1.18.23</a:t>
             </a:r>
           </a:p>
         </p:txBody>
@@ -47727,7 +47727,7 @@
                 <a:ea typeface="+mn-ea"/>
                 <a:cs typeface="+mn-cs"/>
               </a:rPr>
-              <a:t>帮扶管理信息系统 v1.18.22</a:t>
+              <a:t>帮扶管理信息系统 v1.18.23</a:t>
             </a:r>
           </a:p>
         </p:txBody>
@@ -49100,7 +49100,7 @@
                 <a:ea typeface="+mn-ea"/>
                 <a:cs typeface="+mn-cs"/>
               </a:rPr>
-              <a:t>帮扶管理信息系统 v1.18.22</a:t>
+              <a:t>帮扶管理信息系统 v1.18.23</a:t>
             </a:r>
           </a:p>
         </p:txBody>

--- a/docs/帮扶管理信息系统介绍-零基础版.pptx
+++ b/docs/帮扶管理信息系统介绍-零基础版.pptx
@@ -3881,7 +3881,7 @@
                 <a:ea typeface="+mn-ea"/>
                 <a:cs typeface="+mn-cs"/>
               </a:rPr>
-              <a:t>V1.18.23 | 2026-10-28 | FastAPI + Vue 3 + Electron + SQLite</a:t>
+              <a:t>V1.18.24 | 2026-10-28 | FastAPI + Vue 3 + Electron + SQLite</a:t>
             </a:r>
           </a:p>
         </p:txBody>
@@ -4846,7 +4846,7 @@
                 <a:ea typeface="+mn-ea"/>
                 <a:cs typeface="+mn-cs"/>
               </a:rPr>
-              <a:t>帮扶管理信息系统 v1.18.23</a:t>
+              <a:t>帮扶管理信息系统 v1.18.24</a:t>
             </a:r>
           </a:p>
         </p:txBody>
@@ -6579,7 +6579,7 @@
                 <a:ea typeface="+mn-ea"/>
                 <a:cs typeface="+mn-cs"/>
               </a:rPr>
-              <a:t>帮扶管理信息系统 v1.18.23</a:t>
+              <a:t>帮扶管理信息系统 v1.18.24</a:t>
             </a:r>
           </a:p>
         </p:txBody>
@@ -7478,7 +7478,7 @@
                 <a:ea typeface="+mn-ea"/>
                 <a:cs typeface="+mn-cs"/>
               </a:rPr>
-              <a:t>帮扶管理信息系统 v1.18.23</a:t>
+              <a:t>帮扶管理信息系统 v1.18.24</a:t>
             </a:r>
           </a:p>
         </p:txBody>
@@ -8721,7 +8721,7 @@
                 <a:ea typeface="+mn-ea"/>
                 <a:cs typeface="+mn-cs"/>
               </a:rPr>
-              <a:t>帮扶管理信息系统 v1.18.23</a:t>
+              <a:t>帮扶管理信息系统 v1.18.24</a:t>
             </a:r>
           </a:p>
         </p:txBody>
@@ -10300,7 +10300,7 @@
                 <a:ea typeface="+mn-ea"/>
                 <a:cs typeface="+mn-cs"/>
               </a:rPr>
-              <a:t>帮扶管理信息系统 v1.18.23</a:t>
+              <a:t>帮扶管理信息系统 v1.18.24</a:t>
             </a:r>
           </a:p>
         </p:txBody>
@@ -11503,7 +11503,7 @@
                 <a:ea typeface="+mn-ea"/>
                 <a:cs typeface="+mn-cs"/>
               </a:rPr>
-              <a:t>帮扶管理信息系统 v1.18.23</a:t>
+              <a:t>帮扶管理信息系统 v1.18.24</a:t>
             </a:r>
           </a:p>
         </p:txBody>
@@ -12680,7 +12680,7 @@
                 <a:ea typeface="+mn-ea"/>
                 <a:cs typeface="+mn-cs"/>
               </a:rPr>
-              <a:t>帮扶管理信息系统 v1.18.23</a:t>
+              <a:t>帮扶管理信息系统 v1.18.24</a:t>
             </a:r>
           </a:p>
         </p:txBody>
@@ -13933,7 +13933,7 @@
                 <a:ea typeface="+mn-ea"/>
                 <a:cs typeface="+mn-cs"/>
               </a:rPr>
-              <a:t>帮扶管理信息系统 v1.18.23</a:t>
+              <a:t>帮扶管理信息系统 v1.18.24</a:t>
             </a:r>
           </a:p>
         </p:txBody>
@@ -14566,7 +14566,7 @@
                 <a:ea typeface="+mn-ea"/>
                 <a:cs typeface="+mn-cs"/>
               </a:rPr>
-              <a:t>帮扶管理信息系统 v1.18.23</a:t>
+              <a:t>帮扶管理信息系统 v1.18.24</a:t>
             </a:r>
           </a:p>
         </p:txBody>
@@ -15775,7 +15775,7 @@
                 <a:ea typeface="+mn-ea"/>
                 <a:cs typeface="+mn-cs"/>
               </a:rPr>
-              <a:t>帮扶管理信息系统 v1.18.23</a:t>
+              <a:t>帮扶管理信息系统 v1.18.24</a:t>
             </a:r>
           </a:p>
         </p:txBody>
@@ -16674,7 +16674,7 @@
                 <a:ea typeface="+mn-ea"/>
                 <a:cs typeface="+mn-cs"/>
               </a:rPr>
-              <a:t>帮扶管理信息系统 v1.18.23</a:t>
+              <a:t>帮扶管理信息系统 v1.18.24</a:t>
             </a:r>
           </a:p>
         </p:txBody>
@@ -18195,7 +18195,7 @@
                 <a:ea typeface="+mn-ea"/>
                 <a:cs typeface="+mn-cs"/>
               </a:rPr>
-              <a:t>帮扶管理信息系统 v1.18.23</a:t>
+              <a:t>帮扶管理信息系统 v1.18.24</a:t>
             </a:r>
           </a:p>
         </p:txBody>
@@ -19302,7 +19302,7 @@
                 <a:ea typeface="+mn-ea"/>
                 <a:cs typeface="+mn-cs"/>
               </a:rPr>
-              <a:t>帮扶管理信息系统 v1.18.23</a:t>
+              <a:t>帮扶管理信息系统 v1.18.24</a:t>
             </a:r>
           </a:p>
         </p:txBody>
@@ -20081,7 +20081,7 @@
                 <a:ea typeface="+mn-ea"/>
                 <a:cs typeface="+mn-cs"/>
               </a:rPr>
-              <a:t>帮扶管理信息系统 v1.18.23</a:t>
+              <a:t>帮扶管理信息系统 v1.18.24</a:t>
             </a:r>
           </a:p>
         </p:txBody>
@@ -20996,7 +20996,7 @@
                 <a:ea typeface="+mn-ea"/>
                 <a:cs typeface="+mn-cs"/>
               </a:rPr>
-              <a:t>帮扶管理信息系统 v1.18.23</a:t>
+              <a:t>帮扶管理信息系统 v1.18.24</a:t>
             </a:r>
           </a:p>
         </p:txBody>
@@ -21921,7 +21921,7 @@
                 <a:ea typeface="+mn-ea"/>
                 <a:cs typeface="+mn-cs"/>
               </a:rPr>
-              <a:t>帮扶管理信息系统 v1.18.23</a:t>
+              <a:t>帮扶管理信息系统 v1.18.24</a:t>
             </a:r>
           </a:p>
         </p:txBody>
@@ -22976,7 +22976,7 @@
                 <a:ea typeface="+mn-ea"/>
                 <a:cs typeface="+mn-cs"/>
               </a:rPr>
-              <a:t>帮扶管理信息系统 v1.18.23</a:t>
+              <a:t>帮扶管理信息系统 v1.18.24</a:t>
             </a:r>
           </a:p>
         </p:txBody>
@@ -24113,7 +24113,7 @@
                 <a:ea typeface="+mn-ea"/>
                 <a:cs typeface="+mn-cs"/>
               </a:rPr>
-              <a:t>帮扶管理信息系统 v1.18.23</a:t>
+              <a:t>帮扶管理信息系统 v1.18.24</a:t>
             </a:r>
           </a:p>
         </p:txBody>
@@ -25220,7 +25220,7 @@
                 <a:ea typeface="+mn-ea"/>
                 <a:cs typeface="+mn-cs"/>
               </a:rPr>
-              <a:t>帮扶管理信息系统 v1.18.23</a:t>
+              <a:t>帮扶管理信息系统 v1.18.24</a:t>
             </a:r>
           </a:p>
         </p:txBody>
@@ -26861,7 +26861,7 @@
                 <a:ea typeface="+mn-ea"/>
                 <a:cs typeface="+mn-cs"/>
               </a:rPr>
-              <a:t>帮扶管理信息系统 v1.18.23</a:t>
+              <a:t>帮扶管理信息系统 v1.18.24</a:t>
             </a:r>
           </a:p>
         </p:txBody>
@@ -28319,7 +28319,7 @@
                   <a:ea typeface="+mn-ea"/>
                   <a:cs typeface="+mn-cs"/>
                 </a:rPr>
-                <a:t>数据来源：2026-10-28 实测（v1.18.23）—— 后端 14,896 用例 + 前端 7,384 用例</a:t>
+                <a:t>数据来源：2026-10-28 实测（v1.18.24）—— 后端 14,896 用例 + 前端 7,384 用例</a:t>
               </a:r>
             </a:p>
           </p:txBody>
@@ -28360,7 +28360,7 @@
                 <a:ea typeface="+mn-ea"/>
                 <a:cs typeface="+mn-cs"/>
               </a:rPr>
-              <a:t>帮扶管理信息系统 v1.18.23</a:t>
+              <a:t>帮扶管理信息系统 v1.18.24</a:t>
             </a:r>
           </a:p>
         </p:txBody>
@@ -29391,7 +29391,7 @@
                 <a:ea typeface="+mn-ea"/>
                 <a:cs typeface="+mn-cs"/>
               </a:rPr>
-              <a:t>帮扶管理信息系统 v1.18.23</a:t>
+              <a:t>帮扶管理信息系统 v1.18.24</a:t>
             </a:r>
           </a:p>
         </p:txBody>
@@ -30874,7 +30874,7 @@
                 <a:ea typeface="+mn-ea"/>
                 <a:cs typeface="+mn-cs"/>
               </a:rPr>
-              <a:t>帮扶管理信息系统 v1.18.23</a:t>
+              <a:t>帮扶管理信息系统 v1.18.24</a:t>
             </a:r>
           </a:p>
         </p:txBody>
@@ -31789,7 +31789,7 @@
                 <a:ea typeface="+mn-ea"/>
                 <a:cs typeface="+mn-cs"/>
               </a:rPr>
-              <a:t>帮扶管理信息系统 v1.18.23</a:t>
+              <a:t>帮扶管理信息系统 v1.18.24</a:t>
             </a:r>
           </a:p>
         </p:txBody>
@@ -33426,7 +33426,7 @@
                 <a:ea typeface="+mn-ea"/>
                 <a:cs typeface="+mn-cs"/>
               </a:rPr>
-              <a:t>帮扶管理信息系统 v1.18.23</a:t>
+              <a:t>帮扶管理信息系统 v1.18.24</a:t>
             </a:r>
           </a:p>
         </p:txBody>
@@ -34351,7 +34351,7 @@
                 <a:ea typeface="+mn-ea"/>
                 <a:cs typeface="+mn-cs"/>
               </a:rPr>
-              <a:t>帮扶管理信息系统 v1.18.23</a:t>
+              <a:t>帮扶管理信息系统 v1.18.24</a:t>
             </a:r>
           </a:p>
         </p:txBody>
@@ -35316,7 +35316,7 @@
                 <a:ea typeface="+mn-ea"/>
                 <a:cs typeface="+mn-cs"/>
               </a:rPr>
-              <a:t>帮扶管理信息系统 v1.18.23</a:t>
+              <a:t>帮扶管理信息系统 v1.18.24</a:t>
             </a:r>
           </a:p>
         </p:txBody>
@@ -36539,7 +36539,7 @@
                 <a:ea typeface="+mn-ea"/>
                 <a:cs typeface="+mn-cs"/>
               </a:rPr>
-              <a:t>帮扶管理信息系统 v1.18.23</a:t>
+              <a:t>帮扶管理信息系统 v1.18.24</a:t>
             </a:r>
           </a:p>
         </p:txBody>
@@ -37764,7 +37764,7 @@
                 <a:ea typeface="+mn-ea"/>
                 <a:cs typeface="+mn-cs"/>
               </a:rPr>
-              <a:t>帮扶管理信息系统 v1.18.23</a:t>
+              <a:t>帮扶管理信息系统 v1.18.24</a:t>
             </a:r>
           </a:p>
         </p:txBody>
@@ -39123,7 +39123,7 @@
                 <a:ea typeface="+mn-ea"/>
                 <a:cs typeface="+mn-cs"/>
               </a:rPr>
-              <a:t>帮扶管理信息系统 v1.18.23</a:t>
+              <a:t>帮扶管理信息系统 v1.18.24</a:t>
             </a:r>
           </a:p>
         </p:txBody>
@@ -40830,7 +40830,7 @@
                 <a:ea typeface="+mn-ea"/>
                 <a:cs typeface="+mn-cs"/>
               </a:rPr>
-              <a:t>帮扶管理信息系统 v1.18.23</a:t>
+              <a:t>帮扶管理信息系统 v1.18.24</a:t>
             </a:r>
           </a:p>
         </p:txBody>
@@ -42293,7 +42293,7 @@
                 <a:ea typeface="+mn-ea"/>
                 <a:cs typeface="+mn-cs"/>
               </a:rPr>
-              <a:t>帮扶管理信息系统 v1.18.23</a:t>
+              <a:t>帮扶管理信息系统 v1.18.24</a:t>
             </a:r>
           </a:p>
         </p:txBody>
@@ -42794,7 +42794,7 @@
                 <a:ea typeface="+mn-ea"/>
                 <a:cs typeface="+mn-cs"/>
               </a:rPr>
-              <a:t>帮扶管理信息系统 v1.18.23</a:t>
+              <a:t>帮扶管理信息系统 v1.18.24</a:t>
             </a:r>
           </a:p>
         </p:txBody>
@@ -43111,7 +43111,7 @@
                 <a:ea typeface="+mn-ea"/>
                 <a:cs typeface="+mn-cs"/>
               </a:rPr>
-              <a:t>帮扶管理信息系统 v1.18.23 · 仓库：github.com/lzh745200/MRRS · 完整文档见 docs/ 目录</a:t>
+              <a:t>帮扶管理信息系统 v1.18.24 · 仓库：github.com/lzh745200/MRRS · 完整文档见 docs/ 目录</a:t>
             </a:r>
           </a:p>
         </p:txBody>
@@ -43930,7 +43930,7 @@
                 <a:ea typeface="+mn-ea"/>
                 <a:cs typeface="+mn-cs"/>
               </a:rPr>
-              <a:t>帮扶管理信息系统 v1.18.23</a:t>
+              <a:t>帮扶管理信息系统 v1.18.24</a:t>
             </a:r>
           </a:p>
         </p:txBody>
@@ -45477,7 +45477,7 @@
                 <a:ea typeface="+mn-ea"/>
                 <a:cs typeface="+mn-cs"/>
               </a:rPr>
-              <a:t>帮扶管理信息系统 v1.18.23</a:t>
+              <a:t>帮扶管理信息系统 v1.18.24</a:t>
             </a:r>
           </a:p>
         </p:txBody>
@@ -46602,7 +46602,7 @@
                 <a:ea typeface="+mn-ea"/>
                 <a:cs typeface="+mn-cs"/>
               </a:rPr>
-              <a:t>帮扶管理信息系统 v1.18.23</a:t>
+              <a:t>帮扶管理信息系统 v1.18.24</a:t>
             </a:r>
           </a:p>
         </p:txBody>
@@ -47727,7 +47727,7 @@
                 <a:ea typeface="+mn-ea"/>
                 <a:cs typeface="+mn-cs"/>
               </a:rPr>
-              <a:t>帮扶管理信息系统 v1.18.23</a:t>
+              <a:t>帮扶管理信息系统 v1.18.24</a:t>
             </a:r>
           </a:p>
         </p:txBody>
@@ -49100,7 +49100,7 @@
                 <a:ea typeface="+mn-ea"/>
                 <a:cs typeface="+mn-cs"/>
               </a:rPr>
-              <a:t>帮扶管理信息系统 v1.18.23</a:t>
+              <a:t>帮扶管理信息系统 v1.18.24</a:t>
             </a:r>
           </a:p>
         </p:txBody>

--- a/docs/帮扶管理信息系统介绍-零基础版.pptx
+++ b/docs/帮扶管理信息系统介绍-零基础版.pptx
@@ -3881,7 +3881,7 @@
                 <a:ea typeface="+mn-ea"/>
                 <a:cs typeface="+mn-cs"/>
               </a:rPr>
-              <a:t>V1.18.24 | 2026-10-28 | FastAPI + Vue 3 + Electron + SQLite</a:t>
+              <a:t>V1.18.25 | 2026-10-28 | FastAPI + Vue 3 + Electron + SQLite</a:t>
             </a:r>
           </a:p>
         </p:txBody>
@@ -4846,7 +4846,7 @@
                 <a:ea typeface="+mn-ea"/>
                 <a:cs typeface="+mn-cs"/>
               </a:rPr>
-              <a:t>帮扶管理信息系统 v1.18.24</a:t>
+              <a:t>帮扶管理信息系统 v1.18.25</a:t>
             </a:r>
           </a:p>
         </p:txBody>
@@ -6579,7 +6579,7 @@
                 <a:ea typeface="+mn-ea"/>
                 <a:cs typeface="+mn-cs"/>
               </a:rPr>
-              <a:t>帮扶管理信息系统 v1.18.24</a:t>
+              <a:t>帮扶管理信息系统 v1.18.25</a:t>
             </a:r>
           </a:p>
         </p:txBody>
@@ -7478,7 +7478,7 @@
                 <a:ea typeface="+mn-ea"/>
                 <a:cs typeface="+mn-cs"/>
               </a:rPr>
-              <a:t>帮扶管理信息系统 v1.18.24</a:t>
+              <a:t>帮扶管理信息系统 v1.18.25</a:t>
             </a:r>
           </a:p>
         </p:txBody>
@@ -8721,7 +8721,7 @@
                 <a:ea typeface="+mn-ea"/>
                 <a:cs typeface="+mn-cs"/>
               </a:rPr>
-              <a:t>帮扶管理信息系统 v1.18.24</a:t>
+              <a:t>帮扶管理信息系统 v1.18.25</a:t>
             </a:r>
           </a:p>
         </p:txBody>
@@ -10300,7 +10300,7 @@
                 <a:ea typeface="+mn-ea"/>
                 <a:cs typeface="+mn-cs"/>
               </a:rPr>
-              <a:t>帮扶管理信息系统 v1.18.24</a:t>
+              <a:t>帮扶管理信息系统 v1.18.25</a:t>
             </a:r>
           </a:p>
         </p:txBody>
@@ -11503,7 +11503,7 @@
                 <a:ea typeface="+mn-ea"/>
                 <a:cs typeface="+mn-cs"/>
               </a:rPr>
-              <a:t>帮扶管理信息系统 v1.18.24</a:t>
+              <a:t>帮扶管理信息系统 v1.18.25</a:t>
             </a:r>
           </a:p>
         </p:txBody>
@@ -12680,7 +12680,7 @@
                 <a:ea typeface="+mn-ea"/>
                 <a:cs typeface="+mn-cs"/>
               </a:rPr>
-              <a:t>帮扶管理信息系统 v1.18.24</a:t>
+              <a:t>帮扶管理信息系统 v1.18.25</a:t>
             </a:r>
           </a:p>
         </p:txBody>
@@ -13933,7 +13933,7 @@
                 <a:ea typeface="+mn-ea"/>
                 <a:cs typeface="+mn-cs"/>
               </a:rPr>
-              <a:t>帮扶管理信息系统 v1.18.24</a:t>
+              <a:t>帮扶管理信息系统 v1.18.25</a:t>
             </a:r>
           </a:p>
         </p:txBody>
@@ -14566,7 +14566,7 @@
                 <a:ea typeface="+mn-ea"/>
                 <a:cs typeface="+mn-cs"/>
               </a:rPr>
-              <a:t>帮扶管理信息系统 v1.18.24</a:t>
+              <a:t>帮扶管理信息系统 v1.18.25</a:t>
             </a:r>
           </a:p>
         </p:txBody>
@@ -15775,7 +15775,7 @@
                 <a:ea typeface="+mn-ea"/>
                 <a:cs typeface="+mn-cs"/>
               </a:rPr>
-              <a:t>帮扶管理信息系统 v1.18.24</a:t>
+              <a:t>帮扶管理信息系统 v1.18.25</a:t>
             </a:r>
           </a:p>
         </p:txBody>
@@ -16674,7 +16674,7 @@
                 <a:ea typeface="+mn-ea"/>
                 <a:cs typeface="+mn-cs"/>
               </a:rPr>
-              <a:t>帮扶管理信息系统 v1.18.24</a:t>
+              <a:t>帮扶管理信息系统 v1.18.25</a:t>
             </a:r>
           </a:p>
         </p:txBody>
@@ -18195,7 +18195,7 @@
                 <a:ea typeface="+mn-ea"/>
                 <a:cs typeface="+mn-cs"/>
               </a:rPr>
-              <a:t>帮扶管理信息系统 v1.18.24</a:t>
+              <a:t>帮扶管理信息系统 v1.18.25</a:t>
             </a:r>
           </a:p>
         </p:txBody>
@@ -19302,7 +19302,7 @@
                 <a:ea typeface="+mn-ea"/>
                 <a:cs typeface="+mn-cs"/>
               </a:rPr>
-              <a:t>帮扶管理信息系统 v1.18.24</a:t>
+              <a:t>帮扶管理信息系统 v1.18.25</a:t>
             </a:r>
           </a:p>
         </p:txBody>
@@ -20081,7 +20081,7 @@
                 <a:ea typeface="+mn-ea"/>
                 <a:cs typeface="+mn-cs"/>
               </a:rPr>
-              <a:t>帮扶管理信息系统 v1.18.24</a:t>
+              <a:t>帮扶管理信息系统 v1.18.25</a:t>
             </a:r>
           </a:p>
         </p:txBody>
@@ -20996,7 +20996,7 @@
                 <a:ea typeface="+mn-ea"/>
                 <a:cs typeface="+mn-cs"/>
               </a:rPr>
-              <a:t>帮扶管理信息系统 v1.18.24</a:t>
+              <a:t>帮扶管理信息系统 v1.18.25</a:t>
             </a:r>
           </a:p>
         </p:txBody>
@@ -21921,7 +21921,7 @@
                 <a:ea typeface="+mn-ea"/>
                 <a:cs typeface="+mn-cs"/>
               </a:rPr>
-              <a:t>帮扶管理信息系统 v1.18.24</a:t>
+              <a:t>帮扶管理信息系统 v1.18.25</a:t>
             </a:r>
           </a:p>
         </p:txBody>
@@ -22976,7 +22976,7 @@
                 <a:ea typeface="+mn-ea"/>
                 <a:cs typeface="+mn-cs"/>
               </a:rPr>
-              <a:t>帮扶管理信息系统 v1.18.24</a:t>
+              <a:t>帮扶管理信息系统 v1.18.25</a:t>
             </a:r>
           </a:p>
         </p:txBody>
@@ -24113,7 +24113,7 @@
                 <a:ea typeface="+mn-ea"/>
                 <a:cs typeface="+mn-cs"/>
               </a:rPr>
-              <a:t>帮扶管理信息系统 v1.18.24</a:t>
+              <a:t>帮扶管理信息系统 v1.18.25</a:t>
             </a:r>
           </a:p>
         </p:txBody>
@@ -25220,7 +25220,7 @@
                 <a:ea typeface="+mn-ea"/>
                 <a:cs typeface="+mn-cs"/>
               </a:rPr>
-              <a:t>帮扶管理信息系统 v1.18.24</a:t>
+              <a:t>帮扶管理信息系统 v1.18.25</a:t>
             </a:r>
           </a:p>
         </p:txBody>
@@ -26861,7 +26861,7 @@
                 <a:ea typeface="+mn-ea"/>
                 <a:cs typeface="+mn-cs"/>
               </a:rPr>
-              <a:t>帮扶管理信息系统 v1.18.24</a:t>
+              <a:t>帮扶管理信息系统 v1.18.25</a:t>
             </a:r>
           </a:p>
         </p:txBody>
@@ -28319,7 +28319,7 @@
                   <a:ea typeface="+mn-ea"/>
                   <a:cs typeface="+mn-cs"/>
                 </a:rPr>
-                <a:t>数据来源：2026-10-28 实测（v1.18.24）—— 后端 14,896 用例 + 前端 7,384 用例</a:t>
+                <a:t>数据来源：2026-10-28 实测（v1.18.25）—— 后端 14,896 用例 + 前端 7,384 用例</a:t>
               </a:r>
             </a:p>
           </p:txBody>
@@ -28360,7 +28360,7 @@
                 <a:ea typeface="+mn-ea"/>
                 <a:cs typeface="+mn-cs"/>
               </a:rPr>
-              <a:t>帮扶管理信息系统 v1.18.24</a:t>
+              <a:t>帮扶管理信息系统 v1.18.25</a:t>
             </a:r>
           </a:p>
         </p:txBody>
@@ -29391,7 +29391,7 @@
                 <a:ea typeface="+mn-ea"/>
                 <a:cs typeface="+mn-cs"/>
               </a:rPr>
-              <a:t>帮扶管理信息系统 v1.18.24</a:t>
+              <a:t>帮扶管理信息系统 v1.18.25</a:t>
             </a:r>
           </a:p>
         </p:txBody>
@@ -30874,7 +30874,7 @@
                 <a:ea typeface="+mn-ea"/>
                 <a:cs typeface="+mn-cs"/>
               </a:rPr>
-              <a:t>帮扶管理信息系统 v1.18.24</a:t>
+              <a:t>帮扶管理信息系统 v1.18.25</a:t>
             </a:r>
           </a:p>
         </p:txBody>
@@ -31789,7 +31789,7 @@
                 <a:ea typeface="+mn-ea"/>
                 <a:cs typeface="+mn-cs"/>
               </a:rPr>
-              <a:t>帮扶管理信息系统 v1.18.24</a:t>
+              <a:t>帮扶管理信息系统 v1.18.25</a:t>
             </a:r>
           </a:p>
         </p:txBody>
@@ -33426,7 +33426,7 @@
                 <a:ea typeface="+mn-ea"/>
                 <a:cs typeface="+mn-cs"/>
               </a:rPr>
-              <a:t>帮扶管理信息系统 v1.18.24</a:t>
+              <a:t>帮扶管理信息系统 v1.18.25</a:t>
             </a:r>
           </a:p>
         </p:txBody>
@@ -34351,7 +34351,7 @@
                 <a:ea typeface="+mn-ea"/>
                 <a:cs typeface="+mn-cs"/>
               </a:rPr>
-              <a:t>帮扶管理信息系统 v1.18.24</a:t>
+              <a:t>帮扶管理信息系统 v1.18.25</a:t>
             </a:r>
           </a:p>
         </p:txBody>
@@ -35316,7 +35316,7 @@
                 <a:ea typeface="+mn-ea"/>
                 <a:cs typeface="+mn-cs"/>
               </a:rPr>
-              <a:t>帮扶管理信息系统 v1.18.24</a:t>
+              <a:t>帮扶管理信息系统 v1.18.25</a:t>
             </a:r>
           </a:p>
         </p:txBody>
@@ -36539,7 +36539,7 @@
                 <a:ea typeface="+mn-ea"/>
                 <a:cs typeface="+mn-cs"/>
               </a:rPr>
-              <a:t>帮扶管理信息系统 v1.18.24</a:t>
+              <a:t>帮扶管理信息系统 v1.18.25</a:t>
             </a:r>
           </a:p>
         </p:txBody>
@@ -37764,7 +37764,7 @@
                 <a:ea typeface="+mn-ea"/>
                 <a:cs typeface="+mn-cs"/>
               </a:rPr>
-              <a:t>帮扶管理信息系统 v1.18.24</a:t>
+              <a:t>帮扶管理信息系统 v1.18.25</a:t>
             </a:r>
           </a:p>
         </p:txBody>
@@ -39123,7 +39123,7 @@
                 <a:ea typeface="+mn-ea"/>
                 <a:cs typeface="+mn-cs"/>
               </a:rPr>
-              <a:t>帮扶管理信息系统 v1.18.24</a:t>
+              <a:t>帮扶管理信息系统 v1.18.25</a:t>
             </a:r>
           </a:p>
         </p:txBody>
@@ -40830,7 +40830,7 @@
                 <a:ea typeface="+mn-ea"/>
                 <a:cs typeface="+mn-cs"/>
               </a:rPr>
-              <a:t>帮扶管理信息系统 v1.18.24</a:t>
+              <a:t>帮扶管理信息系统 v1.18.25</a:t>
             </a:r>
           </a:p>
         </p:txBody>
@@ -42293,7 +42293,7 @@
                 <a:ea typeface="+mn-ea"/>
                 <a:cs typeface="+mn-cs"/>
               </a:rPr>
-              <a:t>帮扶管理信息系统 v1.18.24</a:t>
+              <a:t>帮扶管理信息系统 v1.18.25</a:t>
             </a:r>
           </a:p>
         </p:txBody>
@@ -42794,7 +42794,7 @@
                 <a:ea typeface="+mn-ea"/>
                 <a:cs typeface="+mn-cs"/>
               </a:rPr>
-              <a:t>帮扶管理信息系统 v1.18.24</a:t>
+              <a:t>帮扶管理信息系统 v1.18.25</a:t>
             </a:r>
           </a:p>
         </p:txBody>
@@ -43111,7 +43111,7 @@
                 <a:ea typeface="+mn-ea"/>
                 <a:cs typeface="+mn-cs"/>
               </a:rPr>
-              <a:t>帮扶管理信息系统 v1.18.24 · 仓库：github.com/lzh745200/MRRS · 完整文档见 docs/ 目录</a:t>
+              <a:t>帮扶管理信息系统 v1.18.25 · 仓库：github.com/lzh745200/MRRS · 完整文档见 docs/ 目录</a:t>
             </a:r>
           </a:p>
         </p:txBody>
@@ -43930,7 +43930,7 @@
                 <a:ea typeface="+mn-ea"/>
                 <a:cs typeface="+mn-cs"/>
               </a:rPr>
-              <a:t>帮扶管理信息系统 v1.18.24</a:t>
+              <a:t>帮扶管理信息系统 v1.18.25</a:t>
             </a:r>
           </a:p>
         </p:txBody>
@@ -45477,7 +45477,7 @@
                 <a:ea typeface="+mn-ea"/>
                 <a:cs typeface="+mn-cs"/>
               </a:rPr>
-              <a:t>帮扶管理信息系统 v1.18.24</a:t>
+              <a:t>帮扶管理信息系统 v1.18.25</a:t>
             </a:r>
           </a:p>
         </p:txBody>
@@ -46602,7 +46602,7 @@
                 <a:ea typeface="+mn-ea"/>
                 <a:cs typeface="+mn-cs"/>
               </a:rPr>
-              <a:t>帮扶管理信息系统 v1.18.24</a:t>
+              <a:t>帮扶管理信息系统 v1.18.25</a:t>
             </a:r>
           </a:p>
         </p:txBody>
@@ -47727,7 +47727,7 @@
                 <a:ea typeface="+mn-ea"/>
                 <a:cs typeface="+mn-cs"/>
               </a:rPr>
-              <a:t>帮扶管理信息系统 v1.18.24</a:t>
+              <a:t>帮扶管理信息系统 v1.18.25</a:t>
             </a:r>
           </a:p>
         </p:txBody>
@@ -49100,7 +49100,7 @@
                 <a:ea typeface="+mn-ea"/>
                 <a:cs typeface="+mn-cs"/>
               </a:rPr>
-              <a:t>帮扶管理信息系统 v1.18.24</a:t>
+              <a:t>帮扶管理信息系统 v1.18.25</a:t>
             </a:r>
           </a:p>
         </p:txBody>

--- a/docs/帮扶管理信息系统介绍-零基础版.pptx
+++ b/docs/帮扶管理信息系统介绍-零基础版.pptx
@@ -3881,7 +3881,7 @@
                 <a:ea typeface="+mn-ea"/>
                 <a:cs typeface="+mn-cs"/>
               </a:rPr>
-              <a:t>V1.18.25 | 2026-10-28 | FastAPI + Vue 3 + Electron + SQLite</a:t>
+              <a:t>V1.18.26 | 2026-10-29 | FastAPI + Vue 3 + Electron + SQLite</a:t>
             </a:r>
           </a:p>
         </p:txBody>
@@ -4846,7 +4846,7 @@
                 <a:ea typeface="+mn-ea"/>
                 <a:cs typeface="+mn-cs"/>
               </a:rPr>
-              <a:t>帮扶管理信息系统 v1.18.25</a:t>
+              <a:t>帮扶管理信息系统 v1.18.26</a:t>
             </a:r>
           </a:p>
         </p:txBody>
@@ -6579,7 +6579,7 @@
                 <a:ea typeface="+mn-ea"/>
                 <a:cs typeface="+mn-cs"/>
               </a:rPr>
-              <a:t>帮扶管理信息系统 v1.18.25</a:t>
+              <a:t>帮扶管理信息系统 v1.18.26</a:t>
             </a:r>
           </a:p>
         </p:txBody>
@@ -7478,7 +7478,7 @@
                 <a:ea typeface="+mn-ea"/>
                 <a:cs typeface="+mn-cs"/>
               </a:rPr>
-              <a:t>帮扶管理信息系统 v1.18.25</a:t>
+              <a:t>帮扶管理信息系统 v1.18.26</a:t>
             </a:r>
           </a:p>
         </p:txBody>
@@ -8721,7 +8721,7 @@
                 <a:ea typeface="+mn-ea"/>
                 <a:cs typeface="+mn-cs"/>
               </a:rPr>
-              <a:t>帮扶管理信息系统 v1.18.25</a:t>
+              <a:t>帮扶管理信息系统 v1.18.26</a:t>
             </a:r>
           </a:p>
         </p:txBody>
@@ -10300,7 +10300,7 @@
                 <a:ea typeface="+mn-ea"/>
                 <a:cs typeface="+mn-cs"/>
               </a:rPr>
-              <a:t>帮扶管理信息系统 v1.18.25</a:t>
+              <a:t>帮扶管理信息系统 v1.18.26</a:t>
             </a:r>
           </a:p>
         </p:txBody>
@@ -11503,7 +11503,7 @@
                 <a:ea typeface="+mn-ea"/>
                 <a:cs typeface="+mn-cs"/>
               </a:rPr>
-              <a:t>帮扶管理信息系统 v1.18.25</a:t>
+              <a:t>帮扶管理信息系统 v1.18.26</a:t>
             </a:r>
           </a:p>
         </p:txBody>
@@ -12680,7 +12680,7 @@
                 <a:ea typeface="+mn-ea"/>
                 <a:cs typeface="+mn-cs"/>
               </a:rPr>
-              <a:t>帮扶管理信息系统 v1.18.25</a:t>
+              <a:t>帮扶管理信息系统 v1.18.26</a:t>
             </a:r>
           </a:p>
         </p:txBody>
@@ -13933,7 +13933,7 @@
                 <a:ea typeface="+mn-ea"/>
                 <a:cs typeface="+mn-cs"/>
               </a:rPr>
-              <a:t>帮扶管理信息系统 v1.18.25</a:t>
+              <a:t>帮扶管理信息系统 v1.18.26</a:t>
             </a:r>
           </a:p>
         </p:txBody>
@@ -14566,7 +14566,7 @@
                 <a:ea typeface="+mn-ea"/>
                 <a:cs typeface="+mn-cs"/>
               </a:rPr>
-              <a:t>帮扶管理信息系统 v1.18.25</a:t>
+              <a:t>帮扶管理信息系统 v1.18.26</a:t>
             </a:r>
           </a:p>
         </p:txBody>
@@ -15775,7 +15775,7 @@
                 <a:ea typeface="+mn-ea"/>
                 <a:cs typeface="+mn-cs"/>
               </a:rPr>
-              <a:t>帮扶管理信息系统 v1.18.25</a:t>
+              <a:t>帮扶管理信息系统 v1.18.26</a:t>
             </a:r>
           </a:p>
         </p:txBody>
@@ -16674,7 +16674,7 @@
                 <a:ea typeface="+mn-ea"/>
                 <a:cs typeface="+mn-cs"/>
               </a:rPr>
-              <a:t>帮扶管理信息系统 v1.18.25</a:t>
+              <a:t>帮扶管理信息系统 v1.18.26</a:t>
             </a:r>
           </a:p>
         </p:txBody>
@@ -18195,7 +18195,7 @@
                 <a:ea typeface="+mn-ea"/>
                 <a:cs typeface="+mn-cs"/>
               </a:rPr>
-              <a:t>帮扶管理信息系统 v1.18.25</a:t>
+              <a:t>帮扶管理信息系统 v1.18.26</a:t>
             </a:r>
           </a:p>
         </p:txBody>
@@ -19302,7 +19302,7 @@
                 <a:ea typeface="+mn-ea"/>
                 <a:cs typeface="+mn-cs"/>
               </a:rPr>
-              <a:t>帮扶管理信息系统 v1.18.25</a:t>
+              <a:t>帮扶管理信息系统 v1.18.26</a:t>
             </a:r>
           </a:p>
         </p:txBody>
@@ -20081,7 +20081,7 @@
                 <a:ea typeface="+mn-ea"/>
                 <a:cs typeface="+mn-cs"/>
               </a:rPr>
-              <a:t>帮扶管理信息系统 v1.18.25</a:t>
+              <a:t>帮扶管理信息系统 v1.18.26</a:t>
             </a:r>
           </a:p>
         </p:txBody>
@@ -20996,7 +20996,7 @@
                 <a:ea typeface="+mn-ea"/>
                 <a:cs typeface="+mn-cs"/>
               </a:rPr>
-              <a:t>帮扶管理信息系统 v1.18.25</a:t>
+              <a:t>帮扶管理信息系统 v1.18.26</a:t>
             </a:r>
           </a:p>
         </p:txBody>
@@ -21921,7 +21921,7 @@
                 <a:ea typeface="+mn-ea"/>
                 <a:cs typeface="+mn-cs"/>
               </a:rPr>
-              <a:t>帮扶管理信息系统 v1.18.25</a:t>
+              <a:t>帮扶管理信息系统 v1.18.26</a:t>
             </a:r>
           </a:p>
         </p:txBody>
@@ -22976,7 +22976,7 @@
                 <a:ea typeface="+mn-ea"/>
                 <a:cs typeface="+mn-cs"/>
               </a:rPr>
-              <a:t>帮扶管理信息系统 v1.18.25</a:t>
+              <a:t>帮扶管理信息系统 v1.18.26</a:t>
             </a:r>
           </a:p>
         </p:txBody>
@@ -24113,7 +24113,7 @@
                 <a:ea typeface="+mn-ea"/>
                 <a:cs typeface="+mn-cs"/>
               </a:rPr>
-              <a:t>帮扶管理信息系统 v1.18.25</a:t>
+              <a:t>帮扶管理信息系统 v1.18.26</a:t>
             </a:r>
           </a:p>
         </p:txBody>
@@ -25220,7 +25220,7 @@
                 <a:ea typeface="+mn-ea"/>
                 <a:cs typeface="+mn-cs"/>
               </a:rPr>
-              <a:t>帮扶管理信息系统 v1.18.25</a:t>
+              <a:t>帮扶管理信息系统 v1.18.26</a:t>
             </a:r>
           </a:p>
         </p:txBody>
@@ -26861,7 +26861,7 @@
                 <a:ea typeface="+mn-ea"/>
                 <a:cs typeface="+mn-cs"/>
               </a:rPr>
-              <a:t>帮扶管理信息系统 v1.18.25</a:t>
+              <a:t>帮扶管理信息系统 v1.18.26</a:t>
             </a:r>
           </a:p>
         </p:txBody>
@@ -27939,7 +27939,7 @@
                   <a:ea typeface="+mn-ea"/>
                   <a:cs typeface="+mn-cs"/>
                 </a:rPr>
-                <a:t>22,280</a:t>
+                <a:t>22,358</a:t>
               </a:r>
             </a:p>
           </p:txBody>
@@ -28319,7 +28319,7 @@
                   <a:ea typeface="+mn-ea"/>
                   <a:cs typeface="+mn-cs"/>
                 </a:rPr>
-                <a:t>数据来源：2026-10-28 实测（v1.18.25）—— 后端 14,896 用例 + 前端 7,384 用例</a:t>
+                <a:t>数据来源：2026-10-29 实测（v1.18.26）—— 后端 14,938 用例 + 前端 7,420 用例</a:t>
               </a:r>
             </a:p>
           </p:txBody>
@@ -28360,7 +28360,7 @@
                 <a:ea typeface="+mn-ea"/>
                 <a:cs typeface="+mn-cs"/>
               </a:rPr>
-              <a:t>帮扶管理信息系统 v1.18.25</a:t>
+              <a:t>帮扶管理信息系统 v1.18.26</a:t>
             </a:r>
           </a:p>
         </p:txBody>
@@ -29152,7 +29152,7 @@
                   <a:ea typeface="+mn-ea"/>
                   <a:cs typeface="+mn-cs"/>
                 </a:rPr>
-                <a:t>后端 14,896 个自动化用例，前端 7,384 个用例，每次改动全部重跑。</a:t>
+                <a:t>后端 14,938 个自动化用例，前端 7,420 个用例，每次改动全部重跑。</a:t>
               </a:r>
             </a:p>
           </p:txBody>
@@ -29391,7 +29391,7 @@
                 <a:ea typeface="+mn-ea"/>
                 <a:cs typeface="+mn-cs"/>
               </a:rPr>
-              <a:t>帮扶管理信息系统 v1.18.25</a:t>
+              <a:t>帮扶管理信息系统 v1.18.26</a:t>
             </a:r>
           </a:p>
         </p:txBody>
@@ -30874,7 +30874,7 @@
                 <a:ea typeface="+mn-ea"/>
                 <a:cs typeface="+mn-cs"/>
               </a:rPr>
-              <a:t>帮扶管理信息系统 v1.18.25</a:t>
+              <a:t>帮扶管理信息系统 v1.18.26</a:t>
             </a:r>
           </a:p>
         </p:txBody>
@@ -31789,7 +31789,7 @@
                 <a:ea typeface="+mn-ea"/>
                 <a:cs typeface="+mn-cs"/>
               </a:rPr>
-              <a:t>帮扶管理信息系统 v1.18.25</a:t>
+              <a:t>帮扶管理信息系统 v1.18.26</a:t>
             </a:r>
           </a:p>
         </p:txBody>
@@ -33426,7 +33426,7 @@
                 <a:ea typeface="+mn-ea"/>
                 <a:cs typeface="+mn-cs"/>
               </a:rPr>
-              <a:t>帮扶管理信息系统 v1.18.25</a:t>
+              <a:t>帮扶管理信息系统 v1.18.26</a:t>
             </a:r>
           </a:p>
         </p:txBody>
@@ -34351,7 +34351,7 @@
                 <a:ea typeface="+mn-ea"/>
                 <a:cs typeface="+mn-cs"/>
               </a:rPr>
-              <a:t>帮扶管理信息系统 v1.18.25</a:t>
+              <a:t>帮扶管理信息系统 v1.18.26</a:t>
             </a:r>
           </a:p>
         </p:txBody>
@@ -35316,7 +35316,7 @@
                 <a:ea typeface="+mn-ea"/>
                 <a:cs typeface="+mn-cs"/>
               </a:rPr>
-              <a:t>帮扶管理信息系统 v1.18.25</a:t>
+              <a:t>帮扶管理信息系统 v1.18.26</a:t>
             </a:r>
           </a:p>
         </p:txBody>
@@ -36539,7 +36539,7 @@
                 <a:ea typeface="+mn-ea"/>
                 <a:cs typeface="+mn-cs"/>
               </a:rPr>
-              <a:t>帮扶管理信息系统 v1.18.25</a:t>
+              <a:t>帮扶管理信息系统 v1.18.26</a:t>
             </a:r>
           </a:p>
         </p:txBody>
@@ -37764,7 +37764,7 @@
                 <a:ea typeface="+mn-ea"/>
                 <a:cs typeface="+mn-cs"/>
               </a:rPr>
-              <a:t>帮扶管理信息系统 v1.18.25</a:t>
+              <a:t>帮扶管理信息系统 v1.18.26</a:t>
             </a:r>
           </a:p>
         </p:txBody>
@@ -39123,7 +39123,7 @@
                 <a:ea typeface="+mn-ea"/>
                 <a:cs typeface="+mn-cs"/>
               </a:rPr>
-              <a:t>帮扶管理信息系统 v1.18.25</a:t>
+              <a:t>帮扶管理信息系统 v1.18.26</a:t>
             </a:r>
           </a:p>
         </p:txBody>
@@ -40830,7 +40830,7 @@
                 <a:ea typeface="+mn-ea"/>
                 <a:cs typeface="+mn-cs"/>
               </a:rPr>
-              <a:t>帮扶管理信息系统 v1.18.25</a:t>
+              <a:t>帮扶管理信息系统 v1.18.26</a:t>
             </a:r>
           </a:p>
         </p:txBody>
@@ -42293,7 +42293,7 @@
                 <a:ea typeface="+mn-ea"/>
                 <a:cs typeface="+mn-cs"/>
               </a:rPr>
-              <a:t>帮扶管理信息系统 v1.18.25</a:t>
+              <a:t>帮扶管理信息系统 v1.18.26</a:t>
             </a:r>
           </a:p>
         </p:txBody>
@@ -42794,7 +42794,7 @@
                 <a:ea typeface="+mn-ea"/>
                 <a:cs typeface="+mn-cs"/>
               </a:rPr>
-              <a:t>帮扶管理信息系统 v1.18.25</a:t>
+              <a:t>帮扶管理信息系统 v1.18.26</a:t>
             </a:r>
           </a:p>
         </p:txBody>
@@ -43111,7 +43111,7 @@
                 <a:ea typeface="+mn-ea"/>
                 <a:cs typeface="+mn-cs"/>
               </a:rPr>
-              <a:t>帮扶管理信息系统 v1.18.25 · 仓库：github.com/lzh745200/MRRS · 完整文档见 docs/ 目录</a:t>
+              <a:t>帮扶管理信息系统 v1.18.26 · 仓库：github.com/lzh745200/MRRS · 完整文档见 docs/ 目录</a:t>
             </a:r>
           </a:p>
         </p:txBody>
@@ -43151,7 +43151,7 @@
                 <a:ea typeface="+mn-ea"/>
                 <a:cs typeface="+mn-cs"/>
               </a:rPr>
-              <a:t>22,280 项自动化测试守护 · 双平台离线交付 · 数据不出本机</a:t>
+              <a:t>22,358 项自动化测试守护 · 双平台离线交付 · 数据不出本机</a:t>
             </a:r>
           </a:p>
         </p:txBody>
@@ -43930,7 +43930,7 @@
                 <a:ea typeface="+mn-ea"/>
                 <a:cs typeface="+mn-cs"/>
               </a:rPr>
-              <a:t>帮扶管理信息系统 v1.18.25</a:t>
+              <a:t>帮扶管理信息系统 v1.18.26</a:t>
             </a:r>
           </a:p>
         </p:txBody>
@@ -45477,7 +45477,7 @@
                 <a:ea typeface="+mn-ea"/>
                 <a:cs typeface="+mn-cs"/>
               </a:rPr>
-              <a:t>帮扶管理信息系统 v1.18.25</a:t>
+              <a:t>帮扶管理信息系统 v1.18.26</a:t>
             </a:r>
           </a:p>
         </p:txBody>
@@ -46602,7 +46602,7 @@
                 <a:ea typeface="+mn-ea"/>
                 <a:cs typeface="+mn-cs"/>
               </a:rPr>
-              <a:t>帮扶管理信息系统 v1.18.25</a:t>
+              <a:t>帮扶管理信息系统 v1.18.26</a:t>
             </a:r>
           </a:p>
         </p:txBody>
@@ -47727,7 +47727,7 @@
                 <a:ea typeface="+mn-ea"/>
                 <a:cs typeface="+mn-cs"/>
               </a:rPr>
-              <a:t>帮扶管理信息系统 v1.18.25</a:t>
+              <a:t>帮扶管理信息系统 v1.18.26</a:t>
             </a:r>
           </a:p>
         </p:txBody>
@@ -49100,7 +49100,7 @@
                 <a:ea typeface="+mn-ea"/>
                 <a:cs typeface="+mn-cs"/>
               </a:rPr>
-              <a:t>帮扶管理信息系统 v1.18.25</a:t>
+              <a:t>帮扶管理信息系统 v1.18.26</a:t>
             </a:r>
           </a:p>
         </p:txBody>

--- a/docs/帮扶管理信息系统介绍-零基础版.pptx
+++ b/docs/帮扶管理信息系统介绍-零基础版.pptx
@@ -27939,7 +27939,7 @@
                   <a:ea typeface="+mn-ea"/>
                   <a:cs typeface="+mn-cs"/>
                 </a:rPr>
-                <a:t>22,358</a:t>
+                <a:t>22,373</a:t>
               </a:r>
             </a:p>
           </p:txBody>
@@ -28319,7 +28319,7 @@
                   <a:ea typeface="+mn-ea"/>
                   <a:cs typeface="+mn-cs"/>
                 </a:rPr>
-                <a:t>数据来源：2026-10-29 实测（v1.18.26）—— 后端 14,938 用例 + 前端 7,420 用例</a:t>
+                <a:t>数据来源：2026-10-29 实测（v1.18.26）—— 后端 14,953 用例 + 前端 7,420 用例</a:t>
               </a:r>
             </a:p>
           </p:txBody>
@@ -29152,7 +29152,7 @@
                   <a:ea typeface="+mn-ea"/>
                   <a:cs typeface="+mn-cs"/>
                 </a:rPr>
-                <a:t>后端 14,938 个自动化用例，前端 7,420 个用例，每次改动全部重跑。</a:t>
+                <a:t>后端 14,953 个自动化用例，前端 7,420 个用例，每次改动全部重跑。</a:t>
               </a:r>
             </a:p>
           </p:txBody>
@@ -43151,7 +43151,7 @@
                 <a:ea typeface="+mn-ea"/>
                 <a:cs typeface="+mn-cs"/>
               </a:rPr>
-              <a:t>22,358 项自动化测试守护 · 双平台离线交付 · 数据不出本机</a:t>
+              <a:t>22,373 项自动化测试守护 · 双平台离线交付 · 数据不出本机</a:t>
             </a:r>
           </a:p>
         </p:txBody>

--- a/docs/帮扶管理信息系统介绍-零基础版.pptx
+++ b/docs/帮扶管理信息系统介绍-零基础版.pptx
@@ -27939,7 +27939,7 @@
                   <a:ea typeface="+mn-ea"/>
                   <a:cs typeface="+mn-cs"/>
                 </a:rPr>
-                <a:t>22,373</a:t>
+                <a:t>22,396</a:t>
               </a:r>
             </a:p>
           </p:txBody>
@@ -28319,7 +28319,7 @@
                   <a:ea typeface="+mn-ea"/>
                   <a:cs typeface="+mn-cs"/>
                 </a:rPr>
-                <a:t>数据来源：2026-10-29 实测（v1.18.26）—— 后端 14,953 用例 + 前端 7,420 用例</a:t>
+                <a:t>数据来源：2026-10-29 实测（v1.18.26）—— 后端 14,976 用例 + 前端 7,420 用例</a:t>
               </a:r>
             </a:p>
           </p:txBody>
@@ -29152,7 +29152,7 @@
                   <a:ea typeface="+mn-ea"/>
                   <a:cs typeface="+mn-cs"/>
                 </a:rPr>
-                <a:t>后端 14,953 个自动化用例，前端 7,420 个用例，每次改动全部重跑。</a:t>
+                <a:t>后端 14,976 个自动化用例，前端 7,420 个用例，每次改动全部重跑。</a:t>
               </a:r>
             </a:p>
           </p:txBody>
@@ -43151,7 +43151,7 @@
                 <a:ea typeface="+mn-ea"/>
                 <a:cs typeface="+mn-cs"/>
               </a:rPr>
-              <a:t>22,373 项自动化测试守护 · 双平台离线交付 · 数据不出本机</a:t>
+              <a:t>22,396 项自动化测试守护 · 双平台离线交付 · 数据不出本机</a:t>
             </a:r>
           </a:p>
         </p:txBody>

--- a/docs/帮扶管理信息系统介绍-零基础版.pptx
+++ b/docs/帮扶管理信息系统介绍-零基础版.pptx
@@ -27939,7 +27939,7 @@
                   <a:ea typeface="+mn-ea"/>
                   <a:cs typeface="+mn-cs"/>
                 </a:rPr>
-                <a:t>22,396</a:t>
+                <a:t>22,422</a:t>
               </a:r>
             </a:p>
           </p:txBody>
@@ -28319,7 +28319,7 @@
                   <a:ea typeface="+mn-ea"/>
                   <a:cs typeface="+mn-cs"/>
                 </a:rPr>
-                <a:t>数据来源：2026-10-29 实测（v1.18.26）—— 后端 14,976 用例 + 前端 7,420 用例</a:t>
+                <a:t>数据来源：2026-10-29 实测（v1.18.26）—— 后端 14,994 用例 + 前端 7,428 用例</a:t>
               </a:r>
             </a:p>
           </p:txBody>
@@ -29152,7 +29152,7 @@
                   <a:ea typeface="+mn-ea"/>
                   <a:cs typeface="+mn-cs"/>
                 </a:rPr>
-                <a:t>后端 14,976 个自动化用例，前端 7,420 个用例，每次改动全部重跑。</a:t>
+                <a:t>后端 14,994 个自动化用例，前端 7,428 个用例，每次改动全部重跑。</a:t>
               </a:r>
             </a:p>
           </p:txBody>
@@ -43151,7 +43151,7 @@
                 <a:ea typeface="+mn-ea"/>
                 <a:cs typeface="+mn-cs"/>
               </a:rPr>
-              <a:t>22,396 项自动化测试守护 · 双平台离线交付 · 数据不出本机</a:t>
+              <a:t>22,422 项自动化测试守护 · 双平台离线交付 · 数据不出本机</a:t>
             </a:r>
           </a:p>
         </p:txBody>
